--- a/radar agent/LD智能体架构图PPT/LD智能体架构流程图组.pptx
+++ b/radar agent/LD智能体架构图PPT/LD智能体架构流程图组.pptx
@@ -15,13 +15,13 @@
     <p:sldId id="264" r:id="rId10"/>
     <p:sldId id="265" r:id="rId11"/>
   </p:sldIdLst>
-  <p:sldSz cx="12192000" cy="6858000" type="wide"/>
+  <p:sldSz cx="12192000" cy="6858000" type="screen4x3"/>
   <p:notesSz cx="6858000" cy="9144000"/>
   <p:defaultTextStyle>
     <a:defPPr>
       <a:defRPr lang="zh-CN">
-        <a:latin typeface="Microsoft YaHei"/>
-        <a:ea typeface="Microsoft YaHei"/>
+        <a:latin typeface="微软雅黑" panose="020B0503020204020204" charset="-122"/>
+        <a:ea typeface="微软雅黑" panose="020B0503020204020204" charset="-122"/>
       </a:defRPr>
     </a:defPPr>
   </p:defaultTextStyle>
@@ -56,6 +56,11 @@
 <file path=ppt/slideMasters/slideMaster1.xml><?xml version="1.0" encoding="utf-8"?>
 <p:sldMaster xmlns:a="http://schemas.openxmlformats.org/drawingml/2006/main" xmlns:r="http://schemas.openxmlformats.org/officeDocument/2006/relationships" xmlns:p="http://schemas.openxmlformats.org/presentationml/2006/main">
   <p:cSld>
+    <p:bg>
+      <p:bgRef idx="1001">
+        <a:schemeClr val="bg1"/>
+      </p:bgRef>
+    </p:bg>
     <p:spTree>
       <p:nvGrpSpPr>
         <p:cNvPr id="1" name=""/>
@@ -143,7 +148,7 @@
           </a:ln>
         </p:spPr>
         <p:txBody>
-          <a:bodyPr wrap="square" anchor="mid" lIns="0" rIns="0" tIns="0" bIns="0"/>
+          <a:bodyPr wrap="square" lIns="0" tIns="0" rIns="0" bIns="0" anchor="ctr"/>
           <a:lstStyle/>
           <a:p>
             <a:pPr algn="l"/>
@@ -152,11 +157,18 @@
                 <a:solidFill>
                   <a:srgbClr val="64748B"/>
                 </a:solidFill>
-                <a:latin typeface="Microsoft YaHei"/>
-                <a:ea typeface="Microsoft YaHei"/>
+                <a:latin typeface="微软雅黑" panose="020B0503020204020204" charset="-122"/>
+                <a:ea typeface="微软雅黑" panose="020B0503020204020204" charset="-122"/>
               </a:rPr>
               <a:t>ARCHITECTURE · FLOW · SEQUENCE · COMPOSITION</a:t>
             </a:r>
+            <a:endParaRPr lang="zh-CN" sz="800" b="1">
+              <a:solidFill>
+                <a:srgbClr val="64748B"/>
+              </a:solidFill>
+              <a:latin typeface="微软雅黑" panose="020B0503020204020204" charset="-122"/>
+              <a:ea typeface="微软雅黑" panose="020B0503020204020204" charset="-122"/>
+            </a:endParaRPr>
           </a:p>
         </p:txBody>
       </p:sp>
@@ -180,7 +192,7 @@
           </a:ln>
         </p:spPr>
         <p:txBody>
-          <a:bodyPr wrap="square" anchor="mid" lIns="0" rIns="0" tIns="0" bIns="0"/>
+          <a:bodyPr wrap="square" lIns="0" tIns="0" rIns="0" bIns="0" anchor="ctr"/>
           <a:lstStyle/>
           <a:p>
             <a:pPr algn="l"/>
@@ -189,11 +201,18 @@
                 <a:solidFill>
                   <a:srgbClr val="172033"/>
                 </a:solidFill>
-                <a:latin typeface="Microsoft YaHei"/>
-                <a:ea typeface="Microsoft YaHei"/>
+                <a:latin typeface="微软雅黑" panose="020B0503020204020204" charset="-122"/>
+                <a:ea typeface="微软雅黑" panose="020B0503020204020204" charset="-122"/>
               </a:rPr>
               <a:t>雷达智能体子系统图组</a:t>
             </a:r>
+            <a:endParaRPr lang="zh-CN" sz="2400" b="1">
+              <a:solidFill>
+                <a:srgbClr val="172033"/>
+              </a:solidFill>
+              <a:latin typeface="微软雅黑" panose="020B0503020204020204" charset="-122"/>
+              <a:ea typeface="微软雅黑" panose="020B0503020204020204" charset="-122"/>
+            </a:endParaRPr>
           </a:p>
         </p:txBody>
       </p:sp>
@@ -239,7 +258,7 @@
           </a:ln>
         </p:spPr>
         <p:txBody>
-          <a:bodyPr wrap="square" anchor="mid" lIns="0" rIns="0" tIns="0" bIns="0"/>
+          <a:bodyPr wrap="square" lIns="0" tIns="0" rIns="0" bIns="0" anchor="ctr"/>
           <a:lstStyle/>
           <a:p>
             <a:pPr algn="r"/>
@@ -248,11 +267,18 @@
                 <a:solidFill>
                   <a:srgbClr val="64748B"/>
                 </a:solidFill>
-                <a:latin typeface="Microsoft YaHei"/>
-                <a:ea typeface="Microsoft YaHei"/>
+                <a:latin typeface="微软雅黑" panose="020B0503020204020204" charset="-122"/>
+                <a:ea typeface="微软雅黑" panose="020B0503020204020204" charset="-122"/>
               </a:rPr>
               <a:t>01 / 09</a:t>
             </a:r>
+            <a:endParaRPr lang="zh-CN" sz="900" b="1">
+              <a:solidFill>
+                <a:srgbClr val="64748B"/>
+              </a:solidFill>
+              <a:latin typeface="微软雅黑" panose="020B0503020204020204" charset="-122"/>
+              <a:ea typeface="微软雅黑" panose="020B0503020204020204" charset="-122"/>
+            </a:endParaRPr>
           </a:p>
         </p:txBody>
       </p:sp>
@@ -276,7 +302,7 @@
           </a:ln>
         </p:spPr>
         <p:txBody>
-          <a:bodyPr wrap="square" anchor="mid" lIns="0" rIns="0" tIns="0" bIns="0"/>
+          <a:bodyPr wrap="square" lIns="0" tIns="0" rIns="0" bIns="0" anchor="ctr"/>
           <a:lstStyle/>
           <a:p>
             <a:pPr algn="l"/>
@@ -285,11 +311,18 @@
                 <a:solidFill>
                   <a:srgbClr val="64748B"/>
                 </a:solidFill>
-                <a:latin typeface="Microsoft YaHei"/>
-                <a:ea typeface="Microsoft YaHei"/>
+                <a:latin typeface="微软雅黑" panose="020B0503020204020204" charset="-122"/>
+                <a:ea typeface="微软雅黑" panose="020B0503020204020204" charset="-122"/>
               </a:rPr>
               <a:t>面向方案文档和汇报复用的可编辑 PowerPoint 原生图形</a:t>
             </a:r>
+            <a:endParaRPr lang="zh-CN" sz="1000">
+              <a:solidFill>
+                <a:srgbClr val="64748B"/>
+              </a:solidFill>
+              <a:latin typeface="微软雅黑" panose="020B0503020204020204" charset="-122"/>
+              <a:ea typeface="微软雅黑" panose="020B0503020204020204" charset="-122"/>
+            </a:endParaRPr>
           </a:p>
         </p:txBody>
       </p:sp>
@@ -335,7 +368,7 @@
           </a:ln>
         </p:spPr>
         <p:txBody>
-          <a:bodyPr wrap="square" anchor="mid" lIns="0" rIns="0" tIns="0" bIns="0"/>
+          <a:bodyPr wrap="square" lIns="0" tIns="0" rIns="0" bIns="0" anchor="ctr"/>
           <a:lstStyle/>
           <a:p>
             <a:pPr algn="l"/>
@@ -344,11 +377,18 @@
                 <a:solidFill>
                   <a:srgbClr val="B9C7E6"/>
                 </a:solidFill>
-                <a:latin typeface="Microsoft YaHei"/>
-                <a:ea typeface="Microsoft YaHei"/>
+                <a:latin typeface="微软雅黑" panose="020B0503020204020204" charset="-122"/>
+                <a:ea typeface="微软雅黑" panose="020B0503020204020204" charset="-122"/>
               </a:rPr>
               <a:t>LD AGENT SUBSYSTEM · 2026.05</a:t>
             </a:r>
+            <a:endParaRPr lang="zh-CN" sz="900" b="1">
+              <a:solidFill>
+                <a:srgbClr val="B9C7E6"/>
+              </a:solidFill>
+              <a:latin typeface="微软雅黑" panose="020B0503020204020204" charset="-122"/>
+              <a:ea typeface="微软雅黑" panose="020B0503020204020204" charset="-122"/>
+            </a:endParaRPr>
           </a:p>
         </p:txBody>
       </p:sp>
@@ -372,7 +412,7 @@
           </a:ln>
         </p:spPr>
         <p:txBody>
-          <a:bodyPr wrap="square" anchor="mid" lIns="0" rIns="0" tIns="0" bIns="0"/>
+          <a:bodyPr wrap="square" lIns="0" tIns="0" rIns="0" bIns="0" anchor="ctr"/>
           <a:lstStyle/>
           <a:p>
             <a:pPr algn="l"/>
@@ -381,11 +421,18 @@
                 <a:solidFill>
                   <a:srgbClr val="FFFFFF"/>
                 </a:solidFill>
-                <a:latin typeface="Microsoft YaHei"/>
-                <a:ea typeface="Microsoft YaHei"/>
+                <a:latin typeface="微软雅黑" panose="020B0503020204020204" charset="-122"/>
+                <a:ea typeface="微软雅黑" panose="020B0503020204020204" charset="-122"/>
               </a:rPr>
               <a:t>雷达智能体</a:t>
             </a:r>
+            <a:endParaRPr lang="zh-CN" sz="3400" b="1">
+              <a:solidFill>
+                <a:srgbClr val="FFFFFF"/>
+              </a:solidFill>
+              <a:latin typeface="微软雅黑" panose="020B0503020204020204" charset="-122"/>
+              <a:ea typeface="微软雅黑" panose="020B0503020204020204" charset="-122"/>
+            </a:endParaRPr>
           </a:p>
           <a:p>
             <a:pPr algn="l"/>
@@ -394,11 +441,18 @@
                 <a:solidFill>
                   <a:srgbClr val="FFFFFF"/>
                 </a:solidFill>
-                <a:latin typeface="Microsoft YaHei"/>
-                <a:ea typeface="Microsoft YaHei"/>
+                <a:latin typeface="微软雅黑" panose="020B0503020204020204" charset="-122"/>
+                <a:ea typeface="微软雅黑" panose="020B0503020204020204" charset="-122"/>
               </a:rPr>
               <a:t>架构流程图组</a:t>
             </a:r>
+            <a:endParaRPr lang="zh-CN" sz="3200" b="1">
+              <a:solidFill>
+                <a:srgbClr val="FFFFFF"/>
+              </a:solidFill>
+              <a:latin typeface="微软雅黑" panose="020B0503020204020204" charset="-122"/>
+              <a:ea typeface="微软雅黑" panose="020B0503020204020204" charset="-122"/>
+            </a:endParaRPr>
           </a:p>
         </p:txBody>
       </p:sp>
@@ -422,7 +476,7 @@
           </a:ln>
         </p:spPr>
         <p:txBody>
-          <a:bodyPr wrap="square" anchor="mid" lIns="0" rIns="0" tIns="0" bIns="0"/>
+          <a:bodyPr wrap="square" lIns="0" tIns="0" rIns="0" bIns="0" anchor="ctr"/>
           <a:lstStyle/>
           <a:p>
             <a:pPr algn="l"/>
@@ -431,11 +485,18 @@
                 <a:solidFill>
                   <a:srgbClr val="D7DEEE"/>
                 </a:solidFill>
-                <a:latin typeface="Microsoft YaHei"/>
-                <a:ea typeface="Microsoft YaHei"/>
+                <a:latin typeface="微软雅黑" panose="020B0503020204020204" charset="-122"/>
+                <a:ea typeface="微软雅黑" panose="020B0503020204020204" charset="-122"/>
               </a:rPr>
               <a:t>用于 PPT 汇报，也可复制到 Word 方案文档。图形由原生形状、线条和文本组成，后续可直接编辑。</a:t>
             </a:r>
+            <a:endParaRPr lang="zh-CN" sz="1500">
+              <a:solidFill>
+                <a:srgbClr val="D7DEEE"/>
+              </a:solidFill>
+              <a:latin typeface="微软雅黑" panose="020B0503020204020204" charset="-122"/>
+              <a:ea typeface="微软雅黑" panose="020B0503020204020204" charset="-122"/>
+            </a:endParaRPr>
           </a:p>
         </p:txBody>
       </p:sp>
@@ -463,7 +524,7 @@
           </a:ln>
         </p:spPr>
         <p:txBody>
-          <a:bodyPr wrap="square" anchor="mid" lIns="91440" rIns="91440" tIns="50292" bIns="50292"/>
+          <a:bodyPr wrap="square" lIns="91440" tIns="50292" rIns="91440" bIns="50292" anchor="ctr"/>
           <a:lstStyle/>
           <a:p>
             <a:pPr algn="l"/>
@@ -472,11 +533,18 @@
                 <a:solidFill>
                   <a:srgbClr val="FFFFFF"/>
                 </a:solidFill>
-                <a:latin typeface="Microsoft YaHei"/>
-                <a:ea typeface="Microsoft YaHei"/>
+                <a:latin typeface="微软雅黑" panose="020B0503020204020204" charset="-122"/>
+                <a:ea typeface="微软雅黑" panose="020B0503020204020204" charset="-122"/>
               </a:rPr>
               <a:t>01</a:t>
             </a:r>
+            <a:endParaRPr lang="zh-CN" sz="1200" b="1">
+              <a:solidFill>
+                <a:srgbClr val="FFFFFF"/>
+              </a:solidFill>
+              <a:latin typeface="微软雅黑" panose="020B0503020204020204" charset="-122"/>
+              <a:ea typeface="微软雅黑" panose="020B0503020204020204" charset="-122"/>
+            </a:endParaRPr>
           </a:p>
           <a:p>
             <a:pPr algn="l"/>
@@ -485,11 +553,18 @@
                 <a:solidFill>
                   <a:srgbClr val="FFFFFF"/>
                 </a:solidFill>
-                <a:latin typeface="Microsoft YaHei"/>
-                <a:ea typeface="Microsoft YaHei"/>
+                <a:latin typeface="微软雅黑" panose="020B0503020204020204" charset="-122"/>
+                <a:ea typeface="微软雅黑" panose="020B0503020204020204" charset="-122"/>
               </a:rPr>
               <a:t>总体架构</a:t>
             </a:r>
+            <a:endParaRPr lang="zh-CN" sz="1000">
+              <a:solidFill>
+                <a:srgbClr val="FFFFFF"/>
+              </a:solidFill>
+              <a:latin typeface="微软雅黑" panose="020B0503020204020204" charset="-122"/>
+              <a:ea typeface="微软雅黑" panose="020B0503020204020204" charset="-122"/>
+            </a:endParaRPr>
           </a:p>
           <a:p>
             <a:pPr algn="l"/>
@@ -498,11 +573,18 @@
                 <a:solidFill>
                   <a:srgbClr val="FFFFFF"/>
                 </a:solidFill>
-                <a:latin typeface="Microsoft YaHei"/>
-                <a:ea typeface="Microsoft YaHei"/>
+                <a:latin typeface="微软雅黑" panose="020B0503020204020204" charset="-122"/>
+                <a:ea typeface="微软雅黑" panose="020B0503020204020204" charset="-122"/>
               </a:rPr>
               <a:t>外部系统、智能体核心与输出联动</a:t>
             </a:r>
+            <a:endParaRPr lang="zh-CN" sz="1000">
+              <a:solidFill>
+                <a:srgbClr val="FFFFFF"/>
+              </a:solidFill>
+              <a:latin typeface="微软雅黑" panose="020B0503020204020204" charset="-122"/>
+              <a:ea typeface="微软雅黑" panose="020B0503020204020204" charset="-122"/>
+            </a:endParaRPr>
           </a:p>
         </p:txBody>
       </p:sp>
@@ -530,7 +612,7 @@
           </a:ln>
         </p:spPr>
         <p:txBody>
-          <a:bodyPr wrap="square" anchor="mid" lIns="91440" rIns="91440" tIns="50292" bIns="50292"/>
+          <a:bodyPr wrap="square" lIns="91440" tIns="50292" rIns="91440" bIns="50292" anchor="ctr"/>
           <a:lstStyle/>
           <a:p>
             <a:pPr algn="l"/>
@@ -539,11 +621,18 @@
                 <a:solidFill>
                   <a:srgbClr val="FFFFFF"/>
                 </a:solidFill>
-                <a:latin typeface="Microsoft YaHei"/>
-                <a:ea typeface="Microsoft YaHei"/>
+                <a:latin typeface="微软雅黑" panose="020B0503020204020204" charset="-122"/>
+                <a:ea typeface="微软雅黑" panose="020B0503020204020204" charset="-122"/>
               </a:rPr>
               <a:t>02</a:t>
             </a:r>
+            <a:endParaRPr lang="zh-CN" sz="1200" b="1">
+              <a:solidFill>
+                <a:srgbClr val="FFFFFF"/>
+              </a:solidFill>
+              <a:latin typeface="微软雅黑" panose="020B0503020204020204" charset="-122"/>
+              <a:ea typeface="微软雅黑" panose="020B0503020204020204" charset="-122"/>
+            </a:endParaRPr>
           </a:p>
           <a:p>
             <a:pPr algn="l"/>
@@ -552,11 +641,18 @@
                 <a:solidFill>
                   <a:srgbClr val="FFFFFF"/>
                 </a:solidFill>
-                <a:latin typeface="Microsoft YaHei"/>
-                <a:ea typeface="Microsoft YaHei"/>
+                <a:latin typeface="微软雅黑" panose="020B0503020204020204" charset="-122"/>
+                <a:ea typeface="微软雅黑" panose="020B0503020204020204" charset="-122"/>
               </a:rPr>
               <a:t>功能组成</a:t>
             </a:r>
+            <a:endParaRPr lang="zh-CN" sz="1000">
+              <a:solidFill>
+                <a:srgbClr val="FFFFFF"/>
+              </a:solidFill>
+              <a:latin typeface="微软雅黑" panose="020B0503020204020204" charset="-122"/>
+              <a:ea typeface="微软雅黑" panose="020B0503020204020204" charset="-122"/>
+            </a:endParaRPr>
           </a:p>
           <a:p>
             <a:pPr algn="l"/>
@@ -565,11 +661,18 @@
                 <a:solidFill>
                   <a:srgbClr val="FFFFFF"/>
                 </a:solidFill>
-                <a:latin typeface="Microsoft YaHei"/>
-                <a:ea typeface="Microsoft YaHei"/>
+                <a:latin typeface="微软雅黑" panose="020B0503020204020204" charset="-122"/>
+                <a:ea typeface="微软雅黑" panose="020B0503020204020204" charset="-122"/>
               </a:rPr>
               <a:t>五大模块与贯穿治理机制</a:t>
             </a:r>
+            <a:endParaRPr lang="zh-CN" sz="1000">
+              <a:solidFill>
+                <a:srgbClr val="FFFFFF"/>
+              </a:solidFill>
+              <a:latin typeface="微软雅黑" panose="020B0503020204020204" charset="-122"/>
+              <a:ea typeface="微软雅黑" panose="020B0503020204020204" charset="-122"/>
+            </a:endParaRPr>
           </a:p>
         </p:txBody>
       </p:sp>
@@ -597,7 +700,7 @@
           </a:ln>
         </p:spPr>
         <p:txBody>
-          <a:bodyPr wrap="square" anchor="mid" lIns="91440" rIns="91440" tIns="50292" bIns="50292"/>
+          <a:bodyPr wrap="square" lIns="91440" tIns="50292" rIns="91440" bIns="50292" anchor="ctr"/>
           <a:lstStyle/>
           <a:p>
             <a:pPr algn="l"/>
@@ -606,11 +709,18 @@
                 <a:solidFill>
                   <a:srgbClr val="FFFFFF"/>
                 </a:solidFill>
-                <a:latin typeface="Microsoft YaHei"/>
-                <a:ea typeface="Microsoft YaHei"/>
+                <a:latin typeface="微软雅黑" panose="020B0503020204020204" charset="-122"/>
+                <a:ea typeface="微软雅黑" panose="020B0503020204020204" charset="-122"/>
               </a:rPr>
               <a:t>03</a:t>
             </a:r>
+            <a:endParaRPr lang="zh-CN" sz="1200" b="1">
+              <a:solidFill>
+                <a:srgbClr val="FFFFFF"/>
+              </a:solidFill>
+              <a:latin typeface="微软雅黑" panose="020B0503020204020204" charset="-122"/>
+              <a:ea typeface="微软雅黑" panose="020B0503020204020204" charset="-122"/>
+            </a:endParaRPr>
           </a:p>
           <a:p>
             <a:pPr algn="l"/>
@@ -619,11 +729,18 @@
                 <a:solidFill>
                   <a:srgbClr val="FFFFFF"/>
                 </a:solidFill>
-                <a:latin typeface="Microsoft YaHei"/>
-                <a:ea typeface="Microsoft YaHei"/>
+                <a:latin typeface="微软雅黑" panose="020B0503020204020204" charset="-122"/>
+                <a:ea typeface="微软雅黑" panose="020B0503020204020204" charset="-122"/>
               </a:rPr>
               <a:t>执行流程</a:t>
             </a:r>
+            <a:endParaRPr lang="zh-CN" sz="1000">
+              <a:solidFill>
+                <a:srgbClr val="FFFFFF"/>
+              </a:solidFill>
+              <a:latin typeface="微软雅黑" panose="020B0503020204020204" charset="-122"/>
+              <a:ea typeface="微软雅黑" panose="020B0503020204020204" charset="-122"/>
+            </a:endParaRPr>
           </a:p>
           <a:p>
             <a:pPr algn="l"/>
@@ -632,11 +749,18 @@
                 <a:solidFill>
                   <a:srgbClr val="FFFFFF"/>
                 </a:solidFill>
-                <a:latin typeface="Microsoft YaHei"/>
-                <a:ea typeface="Microsoft YaHei"/>
+                <a:latin typeface="微软雅黑" panose="020B0503020204020204" charset="-122"/>
+                <a:ea typeface="微软雅黑" panose="020B0503020204020204" charset="-122"/>
               </a:rPr>
               <a:t>从任务触发到追溯记忆</a:t>
             </a:r>
+            <a:endParaRPr lang="zh-CN" sz="1000">
+              <a:solidFill>
+                <a:srgbClr val="FFFFFF"/>
+              </a:solidFill>
+              <a:latin typeface="微软雅黑" panose="020B0503020204020204" charset="-122"/>
+              <a:ea typeface="微软雅黑" panose="020B0503020204020204" charset="-122"/>
+            </a:endParaRPr>
           </a:p>
         </p:txBody>
       </p:sp>
@@ -664,7 +788,7 @@
           </a:ln>
         </p:spPr>
         <p:txBody>
-          <a:bodyPr wrap="square" anchor="mid" lIns="91440" rIns="91440" tIns="50292" bIns="50292"/>
+          <a:bodyPr wrap="square" lIns="91440" tIns="50292" rIns="91440" bIns="50292" anchor="ctr"/>
           <a:lstStyle/>
           <a:p>
             <a:pPr algn="l"/>
@@ -673,11 +797,18 @@
                 <a:solidFill>
                   <a:srgbClr val="FFFFFF"/>
                 </a:solidFill>
-                <a:latin typeface="Microsoft YaHei"/>
-                <a:ea typeface="Microsoft YaHei"/>
+                <a:latin typeface="微软雅黑" panose="020B0503020204020204" charset="-122"/>
+                <a:ea typeface="微软雅黑" panose="020B0503020204020204" charset="-122"/>
               </a:rPr>
               <a:t>04</a:t>
             </a:r>
+            <a:endParaRPr lang="zh-CN" sz="1200" b="1">
+              <a:solidFill>
+                <a:srgbClr val="FFFFFF"/>
+              </a:solidFill>
+              <a:latin typeface="微软雅黑" panose="020B0503020204020204" charset="-122"/>
+              <a:ea typeface="微软雅黑" panose="020B0503020204020204" charset="-122"/>
+            </a:endParaRPr>
           </a:p>
           <a:p>
             <a:pPr algn="l"/>
@@ -686,11 +817,18 @@
                 <a:solidFill>
                   <a:srgbClr val="FFFFFF"/>
                 </a:solidFill>
-                <a:latin typeface="Microsoft YaHei"/>
-                <a:ea typeface="Microsoft YaHei"/>
+                <a:latin typeface="微软雅黑" panose="020B0503020204020204" charset="-122"/>
+                <a:ea typeface="微软雅黑" panose="020B0503020204020204" charset="-122"/>
               </a:rPr>
               <a:t>时序交互</a:t>
             </a:r>
+            <a:endParaRPr lang="zh-CN" sz="1000">
+              <a:solidFill>
+                <a:srgbClr val="FFFFFF"/>
+              </a:solidFill>
+              <a:latin typeface="微软雅黑" panose="020B0503020204020204" charset="-122"/>
+              <a:ea typeface="微软雅黑" panose="020B0503020204020204" charset="-122"/>
+            </a:endParaRPr>
           </a:p>
           <a:p>
             <a:pPr algn="l"/>
@@ -699,11 +837,18 @@
                 <a:solidFill>
                   <a:srgbClr val="FFFFFF"/>
                 </a:solidFill>
-                <a:latin typeface="Microsoft YaHei"/>
-                <a:ea typeface="Microsoft YaHei"/>
+                <a:latin typeface="微软雅黑" panose="020B0503020204020204" charset="-122"/>
+                <a:ea typeface="微软雅黑" panose="020B0503020204020204" charset="-122"/>
               </a:rPr>
               <a:t>低风险工具与高风险工作流</a:t>
             </a:r>
+            <a:endParaRPr lang="zh-CN" sz="1000">
+              <a:solidFill>
+                <a:srgbClr val="FFFFFF"/>
+              </a:solidFill>
+              <a:latin typeface="微软雅黑" panose="020B0503020204020204" charset="-122"/>
+              <a:ea typeface="微软雅黑" panose="020B0503020204020204" charset="-122"/>
+            </a:endParaRPr>
           </a:p>
         </p:txBody>
       </p:sp>
@@ -816,7 +961,7 @@
           </a:ln>
         </p:spPr>
         <p:txBody>
-          <a:bodyPr wrap="square" anchor="mid" lIns="0" rIns="0" tIns="0" bIns="0"/>
+          <a:bodyPr wrap="square" lIns="0" tIns="0" rIns="0" bIns="0" anchor="ctr"/>
           <a:lstStyle/>
           <a:p>
             <a:pPr algn="r"/>
@@ -825,11 +970,18 @@
                 <a:solidFill>
                   <a:srgbClr val="64748B"/>
                 </a:solidFill>
-                <a:latin typeface="Microsoft YaHei"/>
-                <a:ea typeface="Microsoft YaHei"/>
+                <a:latin typeface="微软雅黑" panose="020B0503020204020204" charset="-122"/>
+                <a:ea typeface="微软雅黑" panose="020B0503020204020204" charset="-122"/>
               </a:rPr>
               <a:t>Source: 4.3.3.2 雷达智能体子系统技术方案 · editable PowerPoint shapes</a:t>
             </a:r>
+            <a:endParaRPr lang="zh-CN" sz="700">
+              <a:solidFill>
+                <a:srgbClr val="64748B"/>
+              </a:solidFill>
+              <a:latin typeface="微软雅黑" panose="020B0503020204020204" charset="-122"/>
+              <a:ea typeface="微软雅黑" panose="020B0503020204020204" charset="-122"/>
+            </a:endParaRPr>
           </a:p>
         </p:txBody>
       </p:sp>
@@ -900,7 +1052,7 @@
           </a:ln>
         </p:spPr>
         <p:txBody>
-          <a:bodyPr wrap="square" anchor="mid" lIns="0" rIns="0" tIns="0" bIns="0"/>
+          <a:bodyPr wrap="square" lIns="0" tIns="0" rIns="0" bIns="0" anchor="ctr"/>
           <a:lstStyle/>
           <a:p>
             <a:pPr algn="l"/>
@@ -909,11 +1061,18 @@
                 <a:solidFill>
                   <a:srgbClr val="64748B"/>
                 </a:solidFill>
-                <a:latin typeface="Microsoft YaHei"/>
-                <a:ea typeface="Microsoft YaHei"/>
+                <a:latin typeface="微软雅黑" panose="020B0503020204020204" charset="-122"/>
+                <a:ea typeface="微软雅黑" panose="020B0503020204020204" charset="-122"/>
               </a:rPr>
               <a:t>SYSTEM ARCHITECTURE</a:t>
             </a:r>
+            <a:endParaRPr lang="zh-CN" sz="800" b="1">
+              <a:solidFill>
+                <a:srgbClr val="64748B"/>
+              </a:solidFill>
+              <a:latin typeface="微软雅黑" panose="020B0503020204020204" charset="-122"/>
+              <a:ea typeface="微软雅黑" panose="020B0503020204020204" charset="-122"/>
+            </a:endParaRPr>
           </a:p>
         </p:txBody>
       </p:sp>
@@ -937,7 +1096,7 @@
           </a:ln>
         </p:spPr>
         <p:txBody>
-          <a:bodyPr wrap="square" anchor="mid" lIns="0" rIns="0" tIns="0" bIns="0"/>
+          <a:bodyPr wrap="square" lIns="0" tIns="0" rIns="0" bIns="0" anchor="ctr"/>
           <a:lstStyle/>
           <a:p>
             <a:pPr algn="l"/>
@@ -946,11 +1105,18 @@
                 <a:solidFill>
                   <a:srgbClr val="172033"/>
                 </a:solidFill>
-                <a:latin typeface="Microsoft YaHei"/>
-                <a:ea typeface="Microsoft YaHei"/>
+                <a:latin typeface="微软雅黑" panose="020B0503020204020204" charset="-122"/>
+                <a:ea typeface="微软雅黑" panose="020B0503020204020204" charset="-122"/>
               </a:rPr>
               <a:t>总体架构图</a:t>
             </a:r>
+            <a:endParaRPr lang="zh-CN" sz="2400" b="1">
+              <a:solidFill>
+                <a:srgbClr val="172033"/>
+              </a:solidFill>
+              <a:latin typeface="微软雅黑" panose="020B0503020204020204" charset="-122"/>
+              <a:ea typeface="微软雅黑" panose="020B0503020204020204" charset="-122"/>
+            </a:endParaRPr>
           </a:p>
         </p:txBody>
       </p:sp>
@@ -996,7 +1162,7 @@
           </a:ln>
         </p:spPr>
         <p:txBody>
-          <a:bodyPr wrap="square" anchor="mid" lIns="0" rIns="0" tIns="0" bIns="0"/>
+          <a:bodyPr wrap="square" lIns="0" tIns="0" rIns="0" bIns="0" anchor="ctr"/>
           <a:lstStyle/>
           <a:p>
             <a:pPr algn="r"/>
@@ -1005,11 +1171,18 @@
                 <a:solidFill>
                   <a:srgbClr val="64748B"/>
                 </a:solidFill>
-                <a:latin typeface="Microsoft YaHei"/>
-                <a:ea typeface="Microsoft YaHei"/>
+                <a:latin typeface="微软雅黑" panose="020B0503020204020204" charset="-122"/>
+                <a:ea typeface="微软雅黑" panose="020B0503020204020204" charset="-122"/>
               </a:rPr>
               <a:t>02 / 09</a:t>
             </a:r>
+            <a:endParaRPr lang="zh-CN" sz="900" b="1">
+              <a:solidFill>
+                <a:srgbClr val="64748B"/>
+              </a:solidFill>
+              <a:latin typeface="微软雅黑" panose="020B0503020204020204" charset="-122"/>
+              <a:ea typeface="微软雅黑" panose="020B0503020204020204" charset="-122"/>
+            </a:endParaRPr>
           </a:p>
         </p:txBody>
       </p:sp>
@@ -1033,7 +1206,7 @@
           </a:ln>
         </p:spPr>
         <p:txBody>
-          <a:bodyPr wrap="square" anchor="mid" lIns="0" rIns="0" tIns="0" bIns="0"/>
+          <a:bodyPr wrap="square" lIns="0" tIns="0" rIns="0" bIns="0" anchor="ctr"/>
           <a:lstStyle/>
           <a:p>
             <a:pPr algn="l"/>
@@ -1042,11 +1215,18 @@
                 <a:solidFill>
                   <a:srgbClr val="64748B"/>
                 </a:solidFill>
-                <a:latin typeface="Microsoft YaHei"/>
-                <a:ea typeface="Microsoft YaHei"/>
+                <a:latin typeface="微软雅黑" panose="020B0503020204020204" charset="-122"/>
+                <a:ea typeface="微软雅黑" panose="020B0503020204020204" charset="-122"/>
               </a:rPr>
               <a:t>以雷达智能体为智能决策中枢，连接显控、感知、状态、控制执行链路和数据知识底座。</a:t>
             </a:r>
+            <a:endParaRPr lang="zh-CN" sz="1000">
+              <a:solidFill>
+                <a:srgbClr val="64748B"/>
+              </a:solidFill>
+              <a:latin typeface="微软雅黑" panose="020B0503020204020204" charset="-122"/>
+              <a:ea typeface="微软雅黑" panose="020B0503020204020204" charset="-122"/>
+            </a:endParaRPr>
           </a:p>
         </p:txBody>
       </p:sp>
@@ -1074,7 +1254,7 @@
           </a:ln>
         </p:spPr>
         <p:txBody>
-          <a:bodyPr wrap="square" anchor="mid" lIns="91440" rIns="91440" tIns="50292" bIns="50292"/>
+          <a:bodyPr wrap="square" lIns="91440" tIns="50292" rIns="91440" bIns="50292" anchor="ctr"/>
           <a:lstStyle/>
           <a:p>
             <a:pPr algn="ctr"/>
@@ -1083,11 +1263,18 @@
                 <a:solidFill>
                   <a:srgbClr val="172033"/>
                 </a:solidFill>
-                <a:latin typeface="Microsoft YaHei"/>
-                <a:ea typeface="Microsoft YaHei"/>
+                <a:latin typeface="微软雅黑" panose="020B0503020204020204" charset="-122"/>
+                <a:ea typeface="微软雅黑" panose="020B0503020204020204" charset="-122"/>
               </a:rPr>
               <a:t>显控分系统</a:t>
             </a:r>
+            <a:endParaRPr lang="zh-CN" sz="1100" b="1">
+              <a:solidFill>
+                <a:srgbClr val="172033"/>
+              </a:solidFill>
+              <a:latin typeface="微软雅黑" panose="020B0503020204020204" charset="-122"/>
+              <a:ea typeface="微软雅黑" panose="020B0503020204020204" charset="-122"/>
+            </a:endParaRPr>
           </a:p>
           <a:p>
             <a:pPr algn="ctr"/>
@@ -1096,11 +1283,18 @@
                 <a:solidFill>
                   <a:srgbClr val="172033"/>
                 </a:solidFill>
-                <a:latin typeface="Microsoft YaHei"/>
-                <a:ea typeface="Microsoft YaHei"/>
+                <a:latin typeface="微软雅黑" panose="020B0503020204020204" charset="-122"/>
+                <a:ea typeface="微软雅黑" panose="020B0503020204020204" charset="-122"/>
               </a:rPr>
               <a:t>自然语言 / 目标选择</a:t>
             </a:r>
+            <a:endParaRPr lang="zh-CN" sz="900">
+              <a:solidFill>
+                <a:srgbClr val="172033"/>
+              </a:solidFill>
+              <a:latin typeface="微软雅黑" panose="020B0503020204020204" charset="-122"/>
+              <a:ea typeface="微软雅黑" panose="020B0503020204020204" charset="-122"/>
+            </a:endParaRPr>
           </a:p>
           <a:p>
             <a:pPr algn="ctr"/>
@@ -1109,11 +1303,18 @@
                 <a:solidFill>
                   <a:srgbClr val="172033"/>
                 </a:solidFill>
-                <a:latin typeface="Microsoft YaHei"/>
-                <a:ea typeface="Microsoft YaHei"/>
+                <a:latin typeface="微软雅黑" panose="020B0503020204020204" charset="-122"/>
+                <a:ea typeface="微软雅黑" panose="020B0503020204020204" charset="-122"/>
               </a:rPr>
               <a:t>区域选择 / 审批确认</a:t>
             </a:r>
+            <a:endParaRPr lang="zh-CN" sz="900">
+              <a:solidFill>
+                <a:srgbClr val="172033"/>
+              </a:solidFill>
+              <a:latin typeface="微软雅黑" panose="020B0503020204020204" charset="-122"/>
+              <a:ea typeface="微软雅黑" panose="020B0503020204020204" charset="-122"/>
+            </a:endParaRPr>
           </a:p>
         </p:txBody>
       </p:sp>
@@ -1138,43 +1339,6 @@
             </a:solidFill>
           </a:ln>
         </p:spPr>
-      </p:sp>
-      <p:sp>
-        <p:nvSpPr>
-          <p:cNvPr id="13" name="Shape 13"/>
-          <p:cNvSpPr/>
-          <p:nvPr/>
-        </p:nvSpPr>
-        <p:spPr>
-          <a:xfrm>
-            <a:off x="576072" y="1709928"/>
-            <a:ext cx="1874520" cy="256032"/>
-          </a:xfrm>
-          <a:prstGeom prst="rect">
-            <a:avLst/>
-          </a:prstGeom>
-          <a:noFill/>
-          <a:ln>
-            <a:noFill/>
-          </a:ln>
-        </p:spPr>
-        <p:txBody>
-          <a:bodyPr wrap="square" anchor="mid" lIns="0" rIns="0" tIns="0" bIns="0"/>
-          <a:lstStyle/>
-          <a:p>
-            <a:pPr algn="ctr"/>
-            <a:r>
-              <a:rPr lang="zh-CN" sz="1200" b="1">
-                <a:solidFill>
-                  <a:srgbClr val="172033"/>
-                </a:solidFill>
-                <a:latin typeface="Microsoft YaHei"/>
-                <a:ea typeface="Microsoft YaHei"/>
-              </a:rPr>
-              <a:t>显控分系统</a:t>
-            </a:r>
-          </a:p>
-        </p:txBody>
       </p:sp>
       <p:sp>
         <p:nvSpPr>
@@ -1223,7 +1387,7 @@
           </a:ln>
         </p:spPr>
         <p:txBody>
-          <a:bodyPr wrap="square" anchor="mid" lIns="91440" rIns="91440" tIns="50292" bIns="50292"/>
+          <a:bodyPr wrap="square" lIns="91440" tIns="50292" rIns="91440" bIns="50292" anchor="ctr"/>
           <a:lstStyle/>
           <a:p>
             <a:pPr algn="ctr"/>
@@ -1232,11 +1396,18 @@
                 <a:solidFill>
                   <a:srgbClr val="172033"/>
                 </a:solidFill>
-                <a:latin typeface="Microsoft YaHei"/>
-                <a:ea typeface="Microsoft YaHei"/>
+                <a:latin typeface="微软雅黑" panose="020B0503020204020204" charset="-122"/>
+                <a:ea typeface="微软雅黑" panose="020B0503020204020204" charset="-122"/>
               </a:rPr>
               <a:t>信息处理感知子系统</a:t>
             </a:r>
+            <a:endParaRPr lang="zh-CN" sz="1100" b="1">
+              <a:solidFill>
+                <a:srgbClr val="172033"/>
+              </a:solidFill>
+              <a:latin typeface="微软雅黑" panose="020B0503020204020204" charset="-122"/>
+              <a:ea typeface="微软雅黑" panose="020B0503020204020204" charset="-122"/>
+            </a:endParaRPr>
           </a:p>
           <a:p>
             <a:pPr algn="ctr"/>
@@ -1245,11 +1416,18 @@
                 <a:solidFill>
                   <a:srgbClr val="172033"/>
                 </a:solidFill>
-                <a:latin typeface="Microsoft YaHei"/>
-                <a:ea typeface="Microsoft YaHei"/>
+                <a:latin typeface="微软雅黑" panose="020B0503020204020204" charset="-122"/>
+                <a:ea typeface="微软雅黑" panose="020B0503020204020204" charset="-122"/>
               </a:rPr>
               <a:t>检测 / 识别 / 跟踪 / 定位</a:t>
             </a:r>
+            <a:endParaRPr lang="zh-CN" sz="900">
+              <a:solidFill>
+                <a:srgbClr val="172033"/>
+              </a:solidFill>
+              <a:latin typeface="微软雅黑" panose="020B0503020204020204" charset="-122"/>
+              <a:ea typeface="微软雅黑" panose="020B0503020204020204" charset="-122"/>
+            </a:endParaRPr>
           </a:p>
           <a:p>
             <a:pPr algn="ctr"/>
@@ -1258,11 +1436,18 @@
                 <a:solidFill>
                   <a:srgbClr val="172033"/>
                 </a:solidFill>
-                <a:latin typeface="Microsoft YaHei"/>
-                <a:ea typeface="Microsoft YaHei"/>
+                <a:latin typeface="微软雅黑" panose="020B0503020204020204" charset="-122"/>
+                <a:ea typeface="微软雅黑" panose="020B0503020204020204" charset="-122"/>
               </a:rPr>
               <a:t>模型结果与置信度</a:t>
             </a:r>
+            <a:endParaRPr lang="zh-CN" sz="900">
+              <a:solidFill>
+                <a:srgbClr val="172033"/>
+              </a:solidFill>
+              <a:latin typeface="微软雅黑" panose="020B0503020204020204" charset="-122"/>
+              <a:ea typeface="微软雅黑" panose="020B0503020204020204" charset="-122"/>
+            </a:endParaRPr>
           </a:p>
         </p:txBody>
       </p:sp>
@@ -1287,43 +1472,6 @@
             </a:solidFill>
           </a:ln>
         </p:spPr>
-      </p:sp>
-      <p:sp>
-        <p:nvSpPr>
-          <p:cNvPr id="17" name="Shape 17"/>
-          <p:cNvSpPr/>
-          <p:nvPr/>
-        </p:nvSpPr>
-        <p:spPr>
-          <a:xfrm>
-            <a:off x="576072" y="2761488"/>
-            <a:ext cx="1874520" cy="256032"/>
-          </a:xfrm>
-          <a:prstGeom prst="rect">
-            <a:avLst/>
-          </a:prstGeom>
-          <a:noFill/>
-          <a:ln>
-            <a:noFill/>
-          </a:ln>
-        </p:spPr>
-        <p:txBody>
-          <a:bodyPr wrap="square" anchor="mid" lIns="0" rIns="0" tIns="0" bIns="0"/>
-          <a:lstStyle/>
-          <a:p>
-            <a:pPr algn="ctr"/>
-            <a:r>
-              <a:rPr lang="zh-CN" sz="1200" b="1">
-                <a:solidFill>
-                  <a:srgbClr val="172033"/>
-                </a:solidFill>
-                <a:latin typeface="Microsoft YaHei"/>
-                <a:ea typeface="Microsoft YaHei"/>
-              </a:rPr>
-              <a:t>信息处理感知子系统</a:t>
-            </a:r>
-          </a:p>
-        </p:txBody>
       </p:sp>
       <p:sp>
         <p:nvSpPr>
@@ -1372,7 +1520,7 @@
           </a:ln>
         </p:spPr>
         <p:txBody>
-          <a:bodyPr wrap="square" anchor="mid" lIns="91440" rIns="91440" tIns="50292" bIns="50292"/>
+          <a:bodyPr wrap="square" lIns="91440" tIns="50292" rIns="91440" bIns="50292" anchor="ctr"/>
           <a:lstStyle/>
           <a:p>
             <a:pPr algn="ctr"/>
@@ -1381,11 +1529,18 @@
                 <a:solidFill>
                   <a:srgbClr val="172033"/>
                 </a:solidFill>
-                <a:latin typeface="Microsoft YaHei"/>
-                <a:ea typeface="Microsoft YaHei"/>
+                <a:latin typeface="微软雅黑" panose="020B0503020204020204" charset="-122"/>
+                <a:ea typeface="微软雅黑" panose="020B0503020204020204" charset="-122"/>
               </a:rPr>
               <a:t>雷达状态与环境数据</a:t>
             </a:r>
+            <a:endParaRPr lang="zh-CN" sz="1100" b="1">
+              <a:solidFill>
+                <a:srgbClr val="172033"/>
+              </a:solidFill>
+              <a:latin typeface="微软雅黑" panose="020B0503020204020204" charset="-122"/>
+              <a:ea typeface="微软雅黑" panose="020B0503020204020204" charset="-122"/>
+            </a:endParaRPr>
           </a:p>
           <a:p>
             <a:pPr algn="ctr"/>
@@ -1394,11 +1549,18 @@
                 <a:solidFill>
                   <a:srgbClr val="172033"/>
                 </a:solidFill>
-                <a:latin typeface="Microsoft YaHei"/>
-                <a:ea typeface="Microsoft YaHei"/>
+                <a:latin typeface="微软雅黑" panose="020B0503020204020204" charset="-122"/>
+                <a:ea typeface="微软雅黑" panose="020B0503020204020204" charset="-122"/>
               </a:rPr>
               <a:t>工作模式 / 参数 / 资源</a:t>
             </a:r>
+            <a:endParaRPr lang="zh-CN" sz="900">
+              <a:solidFill>
+                <a:srgbClr val="172033"/>
+              </a:solidFill>
+              <a:latin typeface="微软雅黑" panose="020B0503020204020204" charset="-122"/>
+              <a:ea typeface="微软雅黑" panose="020B0503020204020204" charset="-122"/>
+            </a:endParaRPr>
           </a:p>
           <a:p>
             <a:pPr algn="ctr"/>
@@ -1407,11 +1569,18 @@
                 <a:solidFill>
                   <a:srgbClr val="172033"/>
                 </a:solidFill>
-                <a:latin typeface="Microsoft YaHei"/>
-                <a:ea typeface="Microsoft YaHei"/>
+                <a:latin typeface="微软雅黑" panose="020B0503020204020204" charset="-122"/>
+                <a:ea typeface="微软雅黑" panose="020B0503020204020204" charset="-122"/>
               </a:rPr>
               <a:t>设备健康 / 环境条件</a:t>
             </a:r>
+            <a:endParaRPr lang="zh-CN" sz="900">
+              <a:solidFill>
+                <a:srgbClr val="172033"/>
+              </a:solidFill>
+              <a:latin typeface="微软雅黑" panose="020B0503020204020204" charset="-122"/>
+              <a:ea typeface="微软雅黑" panose="020B0503020204020204" charset="-122"/>
+            </a:endParaRPr>
           </a:p>
         </p:txBody>
       </p:sp>
@@ -1436,43 +1605,6 @@
             </a:solidFill>
           </a:ln>
         </p:spPr>
-      </p:sp>
-      <p:sp>
-        <p:nvSpPr>
-          <p:cNvPr id="21" name="Shape 21"/>
-          <p:cNvSpPr/>
-          <p:nvPr/>
-        </p:nvSpPr>
-        <p:spPr>
-          <a:xfrm>
-            <a:off x="576072" y="3813048"/>
-            <a:ext cx="1874520" cy="256032"/>
-          </a:xfrm>
-          <a:prstGeom prst="rect">
-            <a:avLst/>
-          </a:prstGeom>
-          <a:noFill/>
-          <a:ln>
-            <a:noFill/>
-          </a:ln>
-        </p:spPr>
-        <p:txBody>
-          <a:bodyPr wrap="square" anchor="mid" lIns="0" rIns="0" tIns="0" bIns="0"/>
-          <a:lstStyle/>
-          <a:p>
-            <a:pPr algn="ctr"/>
-            <a:r>
-              <a:rPr lang="zh-CN" sz="1200" b="1">
-                <a:solidFill>
-                  <a:srgbClr val="172033"/>
-                </a:solidFill>
-                <a:latin typeface="Microsoft YaHei"/>
-                <a:ea typeface="Microsoft YaHei"/>
-              </a:rPr>
-              <a:t>雷达状态与环境数据</a:t>
-            </a:r>
-          </a:p>
-        </p:txBody>
       </p:sp>
       <p:sp>
         <p:nvSpPr>
@@ -1521,7 +1653,7 @@
           </a:ln>
         </p:spPr>
         <p:txBody>
-          <a:bodyPr wrap="square" anchor="mid" lIns="91440" rIns="91440" tIns="50292" bIns="50292"/>
+          <a:bodyPr wrap="square" lIns="91440" tIns="50292" rIns="91440" bIns="50292" anchor="ctr"/>
           <a:lstStyle/>
           <a:p>
             <a:pPr algn="ctr"/>
@@ -1530,11 +1662,18 @@
                 <a:solidFill>
                   <a:srgbClr val="FFFFFF"/>
                 </a:solidFill>
-                <a:latin typeface="Microsoft YaHei"/>
-                <a:ea typeface="Microsoft YaHei"/>
+                <a:latin typeface="微软雅黑" panose="020B0503020204020204" charset="-122"/>
+                <a:ea typeface="微软雅黑" panose="020B0503020204020204" charset="-122"/>
               </a:rPr>
               <a:t>雷达智能体子系统</a:t>
             </a:r>
+            <a:endParaRPr lang="zh-CN" sz="1400" b="1">
+              <a:solidFill>
+                <a:srgbClr val="FFFFFF"/>
+              </a:solidFill>
+              <a:latin typeface="微软雅黑" panose="020B0503020204020204" charset="-122"/>
+              <a:ea typeface="微软雅黑" panose="020B0503020204020204" charset="-122"/>
+            </a:endParaRPr>
           </a:p>
           <a:p>
             <a:pPr algn="ctr"/>
@@ -1543,11 +1682,18 @@
                 <a:solidFill>
                   <a:srgbClr val="FFFFFF"/>
                 </a:solidFill>
-                <a:latin typeface="Microsoft YaHei"/>
-                <a:ea typeface="Microsoft YaHei"/>
+                <a:latin typeface="微软雅黑" panose="020B0503020204020204" charset="-122"/>
+                <a:ea typeface="微软雅黑" panose="020B0503020204020204" charset="-122"/>
               </a:rPr>
               <a:t>Agent Harness / Safety Gate / Trace</a:t>
             </a:r>
+            <a:endParaRPr lang="zh-CN" sz="1200">
+              <a:solidFill>
+                <a:srgbClr val="FFFFFF"/>
+              </a:solidFill>
+              <a:latin typeface="微软雅黑" panose="020B0503020204020204" charset="-122"/>
+              <a:ea typeface="微软雅黑" panose="020B0503020204020204" charset="-122"/>
+            </a:endParaRPr>
           </a:p>
         </p:txBody>
       </p:sp>
@@ -1571,7 +1717,7 @@
           </a:ln>
         </p:spPr>
         <p:txBody>
-          <a:bodyPr wrap="square" anchor="mid" lIns="0" rIns="0" tIns="0" bIns="0"/>
+          <a:bodyPr wrap="square" lIns="0" tIns="0" rIns="0" bIns="0" anchor="ctr"/>
           <a:lstStyle/>
           <a:p>
             <a:pPr algn="ctr"/>
@@ -1580,11 +1726,18 @@
                 <a:solidFill>
                   <a:srgbClr val="FFFFFF"/>
                 </a:solidFill>
-                <a:latin typeface="Microsoft YaHei"/>
-                <a:ea typeface="Microsoft YaHei"/>
+                <a:latin typeface="微软雅黑" panose="020B0503020204020204" charset="-122"/>
+                <a:ea typeface="微软雅黑" panose="020B0503020204020204" charset="-122"/>
               </a:rPr>
               <a:t>雷达智能体子系统</a:t>
             </a:r>
+            <a:endParaRPr lang="zh-CN" sz="1900" b="1">
+              <a:solidFill>
+                <a:srgbClr val="FFFFFF"/>
+              </a:solidFill>
+              <a:latin typeface="微软雅黑" panose="020B0503020204020204" charset="-122"/>
+              <a:ea typeface="微软雅黑" panose="020B0503020204020204" charset="-122"/>
+            </a:endParaRPr>
           </a:p>
         </p:txBody>
       </p:sp>
@@ -1612,7 +1765,7 @@
           </a:ln>
         </p:spPr>
         <p:txBody>
-          <a:bodyPr wrap="square" anchor="mid" lIns="91440" rIns="91440" tIns="50292" bIns="50292"/>
+          <a:bodyPr wrap="square" lIns="91440" tIns="50292" rIns="91440" bIns="50292" anchor="ctr"/>
           <a:lstStyle/>
           <a:p>
             <a:pPr algn="ctr"/>
@@ -1621,11 +1774,18 @@
                 <a:solidFill>
                   <a:srgbClr val="FFFFFF"/>
                 </a:solidFill>
-                <a:latin typeface="Microsoft YaHei"/>
-                <a:ea typeface="Microsoft YaHei"/>
+                <a:latin typeface="微软雅黑" panose="020B0503020204020204" charset="-122"/>
+                <a:ea typeface="微软雅黑" panose="020B0503020204020204" charset="-122"/>
               </a:rPr>
               <a:t>认知核心</a:t>
             </a:r>
+            <a:endParaRPr lang="zh-CN" sz="1200" b="1">
+              <a:solidFill>
+                <a:srgbClr val="FFFFFF"/>
+              </a:solidFill>
+              <a:latin typeface="微软雅黑" panose="020B0503020204020204" charset="-122"/>
+              <a:ea typeface="微软雅黑" panose="020B0503020204020204" charset="-122"/>
+            </a:endParaRPr>
           </a:p>
         </p:txBody>
       </p:sp>
@@ -1653,7 +1813,7 @@
           </a:ln>
         </p:spPr>
         <p:txBody>
-          <a:bodyPr wrap="square" anchor="mid" lIns="91440" rIns="91440" tIns="50292" bIns="50292"/>
+          <a:bodyPr wrap="square" lIns="91440" tIns="50292" rIns="91440" bIns="50292" anchor="ctr"/>
           <a:lstStyle/>
           <a:p>
             <a:pPr algn="ctr"/>
@@ -1662,11 +1822,18 @@
                 <a:solidFill>
                   <a:srgbClr val="FFFFFF"/>
                 </a:solidFill>
-                <a:latin typeface="Microsoft YaHei"/>
-                <a:ea typeface="Microsoft YaHei"/>
+                <a:latin typeface="微软雅黑" panose="020B0503020204020204" charset="-122"/>
+                <a:ea typeface="微软雅黑" panose="020B0503020204020204" charset="-122"/>
               </a:rPr>
               <a:t>记忆管理</a:t>
             </a:r>
+            <a:endParaRPr lang="zh-CN" sz="1200" b="1">
+              <a:solidFill>
+                <a:srgbClr val="FFFFFF"/>
+              </a:solidFill>
+              <a:latin typeface="微软雅黑" panose="020B0503020204020204" charset="-122"/>
+              <a:ea typeface="微软雅黑" panose="020B0503020204020204" charset="-122"/>
+            </a:endParaRPr>
           </a:p>
         </p:txBody>
       </p:sp>
@@ -1694,7 +1861,7 @@
           </a:ln>
         </p:spPr>
         <p:txBody>
-          <a:bodyPr wrap="square" anchor="mid" lIns="91440" rIns="91440" tIns="50292" bIns="50292"/>
+          <a:bodyPr wrap="square" lIns="91440" tIns="50292" rIns="91440" bIns="50292" anchor="ctr"/>
           <a:lstStyle/>
           <a:p>
             <a:pPr algn="ctr"/>
@@ -1703,11 +1870,18 @@
                 <a:solidFill>
                   <a:srgbClr val="FFFFFF"/>
                 </a:solidFill>
-                <a:latin typeface="Microsoft YaHei"/>
-                <a:ea typeface="Microsoft YaHei"/>
+                <a:latin typeface="微软雅黑" panose="020B0503020204020204" charset="-122"/>
+                <a:ea typeface="微软雅黑" panose="020B0503020204020204" charset="-122"/>
               </a:rPr>
               <a:t>工具执行</a:t>
             </a:r>
+            <a:endParaRPr lang="zh-CN" sz="1200" b="1">
+              <a:solidFill>
+                <a:srgbClr val="FFFFFF"/>
+              </a:solidFill>
+              <a:latin typeface="微软雅黑" panose="020B0503020204020204" charset="-122"/>
+              <a:ea typeface="微软雅黑" panose="020B0503020204020204" charset="-122"/>
+            </a:endParaRPr>
           </a:p>
         </p:txBody>
       </p:sp>
@@ -1719,7 +1893,7 @@
         </p:nvSpPr>
         <p:spPr>
           <a:xfrm>
-            <a:off x="4526280" y="3090672"/>
+            <a:off x="4425950" y="3337687"/>
             <a:ext cx="1298448" cy="530352"/>
           </a:xfrm>
           <a:prstGeom prst="roundRect">
@@ -1735,7 +1909,7 @@
           </a:ln>
         </p:spPr>
         <p:txBody>
-          <a:bodyPr wrap="square" anchor="mid" lIns="91440" rIns="91440" tIns="50292" bIns="50292"/>
+          <a:bodyPr wrap="square" lIns="91440" tIns="50292" rIns="91440" bIns="50292" anchor="ctr"/>
           <a:lstStyle/>
           <a:p>
             <a:pPr algn="ctr"/>
@@ -1744,11 +1918,18 @@
                 <a:solidFill>
                   <a:srgbClr val="FFFFFF"/>
                 </a:solidFill>
-                <a:latin typeface="Microsoft YaHei"/>
-                <a:ea typeface="Microsoft YaHei"/>
+                <a:latin typeface="微软雅黑" panose="020B0503020204020204" charset="-122"/>
+                <a:ea typeface="微软雅黑" panose="020B0503020204020204" charset="-122"/>
               </a:rPr>
               <a:t>工作流引擎</a:t>
             </a:r>
+            <a:endParaRPr lang="zh-CN" sz="1200" b="1">
+              <a:solidFill>
+                <a:srgbClr val="FFFFFF"/>
+              </a:solidFill>
+              <a:latin typeface="微软雅黑" panose="020B0503020204020204" charset="-122"/>
+              <a:ea typeface="微软雅黑" panose="020B0503020204020204" charset="-122"/>
+            </a:endParaRPr>
           </a:p>
         </p:txBody>
       </p:sp>
@@ -1760,7 +1941,7 @@
         </p:nvSpPr>
         <p:spPr>
           <a:xfrm>
-            <a:off x="6382512" y="3090672"/>
+            <a:off x="6527927" y="3357372"/>
             <a:ext cx="1298448" cy="530352"/>
           </a:xfrm>
           <a:prstGeom prst="roundRect">
@@ -1776,7 +1957,7 @@
           </a:ln>
         </p:spPr>
         <p:txBody>
-          <a:bodyPr wrap="square" anchor="mid" lIns="91440" rIns="91440" tIns="50292" bIns="50292"/>
+          <a:bodyPr wrap="square" lIns="91440" tIns="50292" rIns="91440" bIns="50292" anchor="ctr"/>
           <a:lstStyle/>
           <a:p>
             <a:pPr algn="ctr"/>
@@ -1785,11 +1966,18 @@
                 <a:solidFill>
                   <a:srgbClr val="FFFFFF"/>
                 </a:solidFill>
-                <a:latin typeface="Microsoft YaHei"/>
-                <a:ea typeface="Microsoft YaHei"/>
+                <a:latin typeface="微软雅黑" panose="020B0503020204020204" charset="-122"/>
+                <a:ea typeface="微软雅黑" panose="020B0503020204020204" charset="-122"/>
               </a:rPr>
               <a:t>数据库接入</a:t>
             </a:r>
+            <a:endParaRPr lang="zh-CN" sz="1200" b="1">
+              <a:solidFill>
+                <a:srgbClr val="FFFFFF"/>
+              </a:solidFill>
+              <a:latin typeface="微软雅黑" panose="020B0503020204020204" charset="-122"/>
+              <a:ea typeface="微软雅黑" panose="020B0503020204020204" charset="-122"/>
+            </a:endParaRPr>
           </a:p>
         </p:txBody>
       </p:sp>
@@ -1817,7 +2005,7 @@
           </a:ln>
         </p:spPr>
         <p:txBody>
-          <a:bodyPr wrap="square" anchor="mid" lIns="91440" rIns="91440" tIns="50292" bIns="50292"/>
+          <a:bodyPr wrap="square" lIns="91440" tIns="50292" rIns="91440" bIns="50292" anchor="ctr"/>
           <a:lstStyle/>
           <a:p>
             <a:pPr algn="ctr"/>
@@ -1826,11 +2014,18 @@
                 <a:solidFill>
                   <a:srgbClr val="D7E7FF"/>
                 </a:solidFill>
-                <a:latin typeface="Microsoft YaHei"/>
-                <a:ea typeface="Microsoft YaHei"/>
+                <a:latin typeface="微软雅黑" panose="020B0503020204020204" charset="-122"/>
+                <a:ea typeface="微软雅黑" panose="020B0503020204020204" charset="-122"/>
               </a:rPr>
               <a:t>贯穿治理：任务实例 · 权限校验 · 参数边界 · 追溯记录 · 经验回流</a:t>
             </a:r>
+            <a:endParaRPr lang="zh-CN" sz="900">
+              <a:solidFill>
+                <a:srgbClr val="D7E7FF"/>
+              </a:solidFill>
+              <a:latin typeface="微软雅黑" panose="020B0503020204020204" charset="-122"/>
+              <a:ea typeface="微软雅黑" panose="020B0503020204020204" charset="-122"/>
+            </a:endParaRPr>
           </a:p>
         </p:txBody>
       </p:sp>
@@ -1858,7 +2053,7 @@
           </a:ln>
         </p:spPr>
         <p:txBody>
-          <a:bodyPr wrap="square" anchor="mid" lIns="91440" rIns="91440" tIns="50292" bIns="50292"/>
+          <a:bodyPr wrap="square" lIns="91440" tIns="50292" rIns="91440" bIns="50292" anchor="ctr"/>
           <a:lstStyle/>
           <a:p>
             <a:pPr algn="ctr"/>
@@ -1867,11 +2062,18 @@
                 <a:solidFill>
                   <a:srgbClr val="172033"/>
                 </a:solidFill>
-                <a:latin typeface="Microsoft YaHei"/>
-                <a:ea typeface="Microsoft YaHei"/>
+                <a:latin typeface="微软雅黑" panose="020B0503020204020204" charset="-122"/>
+                <a:ea typeface="微软雅黑" panose="020B0503020204020204" charset="-122"/>
               </a:rPr>
               <a:t>研判结果与证据链</a:t>
             </a:r>
+            <a:endParaRPr lang="zh-CN" sz="1000" b="1">
+              <a:solidFill>
+                <a:srgbClr val="172033"/>
+              </a:solidFill>
+              <a:latin typeface="微软雅黑" panose="020B0503020204020204" charset="-122"/>
+              <a:ea typeface="微软雅黑" panose="020B0503020204020204" charset="-122"/>
+            </a:endParaRPr>
           </a:p>
           <a:p>
             <a:pPr algn="ctr"/>
@@ -1880,11 +2082,18 @@
                 <a:solidFill>
                   <a:srgbClr val="172033"/>
                 </a:solidFill>
-                <a:latin typeface="Microsoft YaHei"/>
-                <a:ea typeface="Microsoft YaHei"/>
+                <a:latin typeface="微软雅黑" panose="020B0503020204020204" charset="-122"/>
+                <a:ea typeface="微软雅黑" panose="020B0503020204020204" charset="-122"/>
               </a:rPr>
               <a:t>目标类别 / 行为 / 威胁等级</a:t>
             </a:r>
+            <a:endParaRPr lang="zh-CN" sz="800">
+              <a:solidFill>
+                <a:srgbClr val="172033"/>
+              </a:solidFill>
+              <a:latin typeface="微软雅黑" panose="020B0503020204020204" charset="-122"/>
+              <a:ea typeface="微软雅黑" panose="020B0503020204020204" charset="-122"/>
+            </a:endParaRPr>
           </a:p>
         </p:txBody>
       </p:sp>
@@ -1909,43 +2118,6 @@
             </a:solidFill>
           </a:ln>
         </p:spPr>
-      </p:sp>
-      <p:sp>
-        <p:nvSpPr>
-          <p:cNvPr id="33" name="Shape 33"/>
-          <p:cNvSpPr/>
-          <p:nvPr/>
-        </p:nvSpPr>
-        <p:spPr>
-          <a:xfrm>
-            <a:off x="9326880" y="1618488"/>
-            <a:ext cx="2148840" cy="256032"/>
-          </a:xfrm>
-          <a:prstGeom prst="rect">
-            <a:avLst/>
-          </a:prstGeom>
-          <a:noFill/>
-          <a:ln>
-            <a:noFill/>
-          </a:ln>
-        </p:spPr>
-        <p:txBody>
-          <a:bodyPr wrap="square" anchor="mid" lIns="0" rIns="0" tIns="0" bIns="0"/>
-          <a:lstStyle/>
-          <a:p>
-            <a:pPr algn="ctr"/>
-            <a:r>
-              <a:rPr lang="zh-CN" sz="1100" b="1">
-                <a:solidFill>
-                  <a:srgbClr val="172033"/>
-                </a:solidFill>
-                <a:latin typeface="Microsoft YaHei"/>
-                <a:ea typeface="Microsoft YaHei"/>
-              </a:rPr>
-              <a:t>研判结果与证据链</a:t>
-            </a:r>
-          </a:p>
-        </p:txBody>
       </p:sp>
       <p:sp>
         <p:nvSpPr>
@@ -1994,7 +2166,7 @@
           </a:ln>
         </p:spPr>
         <p:txBody>
-          <a:bodyPr wrap="square" anchor="mid" lIns="91440" rIns="91440" tIns="50292" bIns="50292"/>
+          <a:bodyPr wrap="square" lIns="91440" tIns="50292" rIns="91440" bIns="50292" anchor="ctr"/>
           <a:lstStyle/>
           <a:p>
             <a:pPr algn="ctr"/>
@@ -2003,11 +2175,18 @@
                 <a:solidFill>
                   <a:srgbClr val="172033"/>
                 </a:solidFill>
-                <a:latin typeface="Microsoft YaHei"/>
-                <a:ea typeface="Microsoft YaHei"/>
+                <a:latin typeface="微软雅黑" panose="020B0503020204020204" charset="-122"/>
+                <a:ea typeface="微软雅黑" panose="020B0503020204020204" charset="-122"/>
               </a:rPr>
               <a:t>候选参数方案</a:t>
             </a:r>
+            <a:endParaRPr lang="zh-CN" sz="1000" b="1">
+              <a:solidFill>
+                <a:srgbClr val="172033"/>
+              </a:solidFill>
+              <a:latin typeface="微软雅黑" panose="020B0503020204020204" charset="-122"/>
+              <a:ea typeface="微软雅黑" panose="020B0503020204020204" charset="-122"/>
+            </a:endParaRPr>
           </a:p>
           <a:p>
             <a:pPr algn="ctr"/>
@@ -2016,11 +2195,18 @@
                 <a:solidFill>
                   <a:srgbClr val="172033"/>
                 </a:solidFill>
-                <a:latin typeface="Microsoft YaHei"/>
-                <a:ea typeface="Microsoft YaHei"/>
+                <a:latin typeface="微软雅黑" panose="020B0503020204020204" charset="-122"/>
+                <a:ea typeface="微软雅黑" panose="020B0503020204020204" charset="-122"/>
               </a:rPr>
               <a:t>波形 / 波束 / 门限 / 跟踪参数</a:t>
             </a:r>
+            <a:endParaRPr lang="zh-CN" sz="800">
+              <a:solidFill>
+                <a:srgbClr val="172033"/>
+              </a:solidFill>
+              <a:latin typeface="微软雅黑" panose="020B0503020204020204" charset="-122"/>
+              <a:ea typeface="微软雅黑" panose="020B0503020204020204" charset="-122"/>
+            </a:endParaRPr>
           </a:p>
         </p:txBody>
       </p:sp>
@@ -2045,43 +2231,6 @@
             </a:solidFill>
           </a:ln>
         </p:spPr>
-      </p:sp>
-      <p:sp>
-        <p:nvSpPr>
-          <p:cNvPr id="37" name="Shape 37"/>
-          <p:cNvSpPr/>
-          <p:nvPr/>
-        </p:nvSpPr>
-        <p:spPr>
-          <a:xfrm>
-            <a:off x="9326880" y="2459736"/>
-            <a:ext cx="2148840" cy="256032"/>
-          </a:xfrm>
-          <a:prstGeom prst="rect">
-            <a:avLst/>
-          </a:prstGeom>
-          <a:noFill/>
-          <a:ln>
-            <a:noFill/>
-          </a:ln>
-        </p:spPr>
-        <p:txBody>
-          <a:bodyPr wrap="square" anchor="mid" lIns="0" rIns="0" tIns="0" bIns="0"/>
-          <a:lstStyle/>
-          <a:p>
-            <a:pPr algn="ctr"/>
-            <a:r>
-              <a:rPr lang="zh-CN" sz="1100" b="1">
-                <a:solidFill>
-                  <a:srgbClr val="172033"/>
-                </a:solidFill>
-                <a:latin typeface="Microsoft YaHei"/>
-                <a:ea typeface="Microsoft YaHei"/>
-              </a:rPr>
-              <a:t>候选参数方案</a:t>
-            </a:r>
-          </a:p>
-        </p:txBody>
       </p:sp>
       <p:sp>
         <p:nvSpPr>
@@ -2130,7 +2279,7 @@
           </a:ln>
         </p:spPr>
         <p:txBody>
-          <a:bodyPr wrap="square" anchor="mid" lIns="91440" rIns="91440" tIns="50292" bIns="50292"/>
+          <a:bodyPr wrap="square" lIns="91440" tIns="50292" rIns="91440" bIns="50292" anchor="ctr"/>
           <a:lstStyle/>
           <a:p>
             <a:pPr algn="ctr"/>
@@ -2139,11 +2288,18 @@
                 <a:solidFill>
                   <a:srgbClr val="172033"/>
                 </a:solidFill>
-                <a:latin typeface="Microsoft YaHei"/>
-                <a:ea typeface="Microsoft YaHei"/>
+                <a:latin typeface="微软雅黑" panose="020B0503020204020204" charset="-122"/>
+                <a:ea typeface="微软雅黑" panose="020B0503020204020204" charset="-122"/>
               </a:rPr>
               <a:t>工作流状态与审批</a:t>
             </a:r>
+            <a:endParaRPr lang="zh-CN" sz="1000" b="1">
+              <a:solidFill>
+                <a:srgbClr val="172033"/>
+              </a:solidFill>
+              <a:latin typeface="微软雅黑" panose="020B0503020204020204" charset="-122"/>
+              <a:ea typeface="微软雅黑" panose="020B0503020204020204" charset="-122"/>
+            </a:endParaRPr>
           </a:p>
           <a:p>
             <a:pPr algn="ctr"/>
@@ -2152,11 +2308,18 @@
                 <a:solidFill>
                   <a:srgbClr val="172033"/>
                 </a:solidFill>
-                <a:latin typeface="Microsoft YaHei"/>
-                <a:ea typeface="Microsoft YaHei"/>
+                <a:latin typeface="微软雅黑" panose="020B0503020204020204" charset="-122"/>
+                <a:ea typeface="微软雅黑" panose="020B0503020204020204" charset="-122"/>
               </a:rPr>
               <a:t>检查点 / 回滚 / 状态同步</a:t>
             </a:r>
+            <a:endParaRPr lang="zh-CN" sz="800">
+              <a:solidFill>
+                <a:srgbClr val="172033"/>
+              </a:solidFill>
+              <a:latin typeface="微软雅黑" panose="020B0503020204020204" charset="-122"/>
+              <a:ea typeface="微软雅黑" panose="020B0503020204020204" charset="-122"/>
+            </a:endParaRPr>
           </a:p>
         </p:txBody>
       </p:sp>
@@ -2181,43 +2344,6 @@
             </a:solidFill>
           </a:ln>
         </p:spPr>
-      </p:sp>
-      <p:sp>
-        <p:nvSpPr>
-          <p:cNvPr id="41" name="Shape 41"/>
-          <p:cNvSpPr/>
-          <p:nvPr/>
-        </p:nvSpPr>
-        <p:spPr>
-          <a:xfrm>
-            <a:off x="9326880" y="3300984"/>
-            <a:ext cx="2148840" cy="256032"/>
-          </a:xfrm>
-          <a:prstGeom prst="rect">
-            <a:avLst/>
-          </a:prstGeom>
-          <a:noFill/>
-          <a:ln>
-            <a:noFill/>
-          </a:ln>
-        </p:spPr>
-        <p:txBody>
-          <a:bodyPr wrap="square" anchor="mid" lIns="0" rIns="0" tIns="0" bIns="0"/>
-          <a:lstStyle/>
-          <a:p>
-            <a:pPr algn="ctr"/>
-            <a:r>
-              <a:rPr lang="zh-CN" sz="1100" b="1">
-                <a:solidFill>
-                  <a:srgbClr val="172033"/>
-                </a:solidFill>
-                <a:latin typeface="Microsoft YaHei"/>
-                <a:ea typeface="Microsoft YaHei"/>
-              </a:rPr>
-              <a:t>工作流状态与审批</a:t>
-            </a:r>
-          </a:p>
-        </p:txBody>
       </p:sp>
       <p:sp>
         <p:nvSpPr>
@@ -2266,7 +2392,7 @@
           </a:ln>
         </p:spPr>
         <p:txBody>
-          <a:bodyPr wrap="square" anchor="mid" lIns="91440" rIns="91440" tIns="50292" bIns="50292"/>
+          <a:bodyPr wrap="square" lIns="91440" tIns="50292" rIns="91440" bIns="50292" anchor="ctr"/>
           <a:lstStyle/>
           <a:p>
             <a:pPr algn="ctr"/>
@@ -2275,11 +2401,18 @@
                 <a:solidFill>
                   <a:srgbClr val="172033"/>
                 </a:solidFill>
-                <a:latin typeface="Microsoft YaHei"/>
-                <a:ea typeface="Microsoft YaHei"/>
+                <a:latin typeface="微软雅黑" panose="020B0503020204020204" charset="-122"/>
+                <a:ea typeface="微软雅黑" panose="020B0503020204020204" charset="-122"/>
               </a:rPr>
               <a:t>复盘报告与经验资产</a:t>
             </a:r>
+            <a:endParaRPr lang="zh-CN" sz="1000" b="1">
+              <a:solidFill>
+                <a:srgbClr val="172033"/>
+              </a:solidFill>
+              <a:latin typeface="微软雅黑" panose="020B0503020204020204" charset="-122"/>
+              <a:ea typeface="微软雅黑" panose="020B0503020204020204" charset="-122"/>
+            </a:endParaRPr>
           </a:p>
           <a:p>
             <a:pPr algn="ctr"/>
@@ -2288,11 +2421,18 @@
                 <a:solidFill>
                   <a:srgbClr val="172033"/>
                 </a:solidFill>
-                <a:latin typeface="Microsoft YaHei"/>
-                <a:ea typeface="Microsoft YaHei"/>
+                <a:latin typeface="微软雅黑" panose="020B0503020204020204" charset="-122"/>
+                <a:ea typeface="微软雅黑" panose="020B0503020204020204" charset="-122"/>
               </a:rPr>
               <a:t>短中长期记忆与经验候选</a:t>
             </a:r>
+            <a:endParaRPr lang="zh-CN" sz="800">
+              <a:solidFill>
+                <a:srgbClr val="172033"/>
+              </a:solidFill>
+              <a:latin typeface="微软雅黑" panose="020B0503020204020204" charset="-122"/>
+              <a:ea typeface="微软雅黑" panose="020B0503020204020204" charset="-122"/>
+            </a:endParaRPr>
           </a:p>
         </p:txBody>
       </p:sp>
@@ -2317,43 +2457,6 @@
             </a:solidFill>
           </a:ln>
         </p:spPr>
-      </p:sp>
-      <p:sp>
-        <p:nvSpPr>
-          <p:cNvPr id="45" name="Shape 45"/>
-          <p:cNvSpPr/>
-          <p:nvPr/>
-        </p:nvSpPr>
-        <p:spPr>
-          <a:xfrm>
-            <a:off x="9326880" y="4142232"/>
-            <a:ext cx="2148840" cy="256032"/>
-          </a:xfrm>
-          <a:prstGeom prst="rect">
-            <a:avLst/>
-          </a:prstGeom>
-          <a:noFill/>
-          <a:ln>
-            <a:noFill/>
-          </a:ln>
-        </p:spPr>
-        <p:txBody>
-          <a:bodyPr wrap="square" anchor="mid" lIns="0" rIns="0" tIns="0" bIns="0"/>
-          <a:lstStyle/>
-          <a:p>
-            <a:pPr algn="ctr"/>
-            <a:r>
-              <a:rPr lang="zh-CN" sz="1100" b="1">
-                <a:solidFill>
-                  <a:srgbClr val="172033"/>
-                </a:solidFill>
-                <a:latin typeface="Microsoft YaHei"/>
-                <a:ea typeface="Microsoft YaHei"/>
-              </a:rPr>
-              <a:t>复盘报告与经验资产</a:t>
-            </a:r>
-          </a:p>
-        </p:txBody>
       </p:sp>
       <p:sp>
         <p:nvSpPr>
@@ -2402,7 +2505,7 @@
           </a:ln>
         </p:spPr>
         <p:txBody>
-          <a:bodyPr wrap="square" anchor="mid" lIns="91440" rIns="91440" tIns="50292" bIns="50292"/>
+          <a:bodyPr wrap="square" lIns="91440" tIns="50292" rIns="91440" bIns="50292" anchor="ctr"/>
           <a:lstStyle/>
           <a:p>
             <a:pPr algn="ctr"/>
@@ -2411,11 +2514,18 @@
                 <a:solidFill>
                   <a:srgbClr val="172033"/>
                 </a:solidFill>
-                <a:latin typeface="Microsoft YaHei"/>
-                <a:ea typeface="Microsoft YaHei"/>
+                <a:latin typeface="微软雅黑" panose="020B0503020204020204" charset="-122"/>
+                <a:ea typeface="微软雅黑" panose="020B0503020204020204" charset="-122"/>
               </a:rPr>
               <a:t>数据知识底座</a:t>
             </a:r>
+            <a:endParaRPr lang="zh-CN" sz="1100" b="1">
+              <a:solidFill>
+                <a:srgbClr val="172033"/>
+              </a:solidFill>
+              <a:latin typeface="微软雅黑" panose="020B0503020204020204" charset="-122"/>
+              <a:ea typeface="微软雅黑" panose="020B0503020204020204" charset="-122"/>
+            </a:endParaRPr>
           </a:p>
           <a:p>
             <a:pPr algn="ctr"/>
@@ -2424,11 +2534,18 @@
                 <a:solidFill>
                   <a:srgbClr val="172033"/>
                 </a:solidFill>
-                <a:latin typeface="Microsoft YaHei"/>
-                <a:ea typeface="Microsoft YaHei"/>
+                <a:latin typeface="微软雅黑" panose="020B0503020204020204" charset="-122"/>
+                <a:ea typeface="微软雅黑" panose="020B0503020204020204" charset="-122"/>
               </a:rPr>
               <a:t>关系库 / 向量库 / 图数据库 / 时序库</a:t>
             </a:r>
+            <a:endParaRPr lang="zh-CN" sz="900">
+              <a:solidFill>
+                <a:srgbClr val="172033"/>
+              </a:solidFill>
+              <a:latin typeface="微软雅黑" panose="020B0503020204020204" charset="-122"/>
+              <a:ea typeface="微软雅黑" panose="020B0503020204020204" charset="-122"/>
+            </a:endParaRPr>
           </a:p>
         </p:txBody>
       </p:sp>
@@ -2453,43 +2570,6 @@
             </a:solidFill>
           </a:ln>
         </p:spPr>
-      </p:sp>
-      <p:sp>
-        <p:nvSpPr>
-          <p:cNvPr id="49" name="Shape 49"/>
-          <p:cNvSpPr/>
-          <p:nvPr/>
-        </p:nvSpPr>
-        <p:spPr>
-          <a:xfrm>
-            <a:off x="4453128" y="5212080"/>
-            <a:ext cx="3108960" cy="256032"/>
-          </a:xfrm>
-          <a:prstGeom prst="rect">
-            <a:avLst/>
-          </a:prstGeom>
-          <a:noFill/>
-          <a:ln>
-            <a:noFill/>
-          </a:ln>
-        </p:spPr>
-        <p:txBody>
-          <a:bodyPr wrap="square" anchor="mid" lIns="0" rIns="0" tIns="0" bIns="0"/>
-          <a:lstStyle/>
-          <a:p>
-            <a:pPr algn="ctr"/>
-            <a:r>
-              <a:rPr lang="zh-CN" sz="1200" b="1">
-                <a:solidFill>
-                  <a:srgbClr val="172033"/>
-                </a:solidFill>
-                <a:latin typeface="Microsoft YaHei"/>
-                <a:ea typeface="Microsoft YaHei"/>
-              </a:rPr>
-              <a:t>数据知识底座</a:t>
-            </a:r>
-          </a:p>
-        </p:txBody>
       </p:sp>
       <p:sp>
         <p:nvSpPr>
@@ -2538,7 +2618,7 @@
           </a:ln>
         </p:spPr>
         <p:txBody>
-          <a:bodyPr wrap="square" anchor="mid" lIns="91440" rIns="91440" tIns="50292" bIns="50292"/>
+          <a:bodyPr wrap="square" lIns="91440" tIns="50292" rIns="91440" bIns="50292" anchor="ctr"/>
           <a:lstStyle/>
           <a:p>
             <a:pPr algn="ctr"/>
@@ -2547,11 +2627,18 @@
                 <a:solidFill>
                   <a:srgbClr val="172033"/>
                 </a:solidFill>
-                <a:latin typeface="Microsoft YaHei"/>
-                <a:ea typeface="Microsoft YaHei"/>
+                <a:latin typeface="微软雅黑" panose="020B0503020204020204" charset="-122"/>
+                <a:ea typeface="微软雅黑" panose="020B0503020204020204" charset="-122"/>
               </a:rPr>
               <a:t>控制执行链路</a:t>
             </a:r>
+            <a:endParaRPr lang="zh-CN" sz="1100" b="1">
+              <a:solidFill>
+                <a:srgbClr val="172033"/>
+              </a:solidFill>
+              <a:latin typeface="微软雅黑" panose="020B0503020204020204" charset="-122"/>
+              <a:ea typeface="微软雅黑" panose="020B0503020204020204" charset="-122"/>
+            </a:endParaRPr>
           </a:p>
           <a:p>
             <a:pPr algn="ctr"/>
@@ -2560,11 +2647,18 @@
                 <a:solidFill>
                   <a:srgbClr val="172033"/>
                 </a:solidFill>
-                <a:latin typeface="Microsoft YaHei"/>
-                <a:ea typeface="Microsoft YaHei"/>
+                <a:latin typeface="微软雅黑" panose="020B0503020204020204" charset="-122"/>
+                <a:ea typeface="微软雅黑" panose="020B0503020204020204" charset="-122"/>
               </a:rPr>
               <a:t>真实控制下发由控制链路完成</a:t>
             </a:r>
+            <a:endParaRPr lang="zh-CN" sz="900">
+              <a:solidFill>
+                <a:srgbClr val="172033"/>
+              </a:solidFill>
+              <a:latin typeface="微软雅黑" panose="020B0503020204020204" charset="-122"/>
+              <a:ea typeface="微软雅黑" panose="020B0503020204020204" charset="-122"/>
+            </a:endParaRPr>
           </a:p>
         </p:txBody>
       </p:sp>
@@ -2592,16 +2686,61 @@
       </p:sp>
       <p:sp>
         <p:nvSpPr>
-          <p:cNvPr id="53" name="Shape 53"/>
-          <p:cNvSpPr/>
-          <p:nvPr/>
-        </p:nvSpPr>
-        <p:spPr>
-          <a:xfrm>
-            <a:off x="9171432" y="5148072"/>
-            <a:ext cx="2340864" cy="256032"/>
-          </a:xfrm>
-          <a:prstGeom prst="rect">
+          <p:cNvPr id="54" name="Line 54"/>
+          <p:cNvSpPr/>
+          <p:nvPr/>
+        </p:nvSpPr>
+        <p:spPr>
+          <a:xfrm>
+            <a:off x="7973568" y="3822192"/>
+            <a:ext cx="1060704" cy="1508760"/>
+          </a:xfrm>
+          <a:prstGeom prst="line">
+            <a:avLst/>
+          </a:prstGeom>
+          <a:noFill/>
+          <a:ln w="22860">
+            <a:solidFill>
+              <a:srgbClr val="B91C1C"/>
+            </a:solidFill>
+            <a:tailEnd type="triangle"/>
+          </a:ln>
+        </p:spPr>
+      </p:sp>
+      <p:sp>
+        <p:nvSpPr>
+          <p:cNvPr id="8" name="Line 8"/>
+          <p:cNvSpPr/>
+          <p:nvPr/>
+        </p:nvSpPr>
+        <p:spPr>
+          <a:xfrm>
+            <a:off x="384048" y="6455664"/>
+            <a:ext cx="11411712" cy="1"/>
+          </a:xfrm>
+          <a:prstGeom prst="line">
+            <a:avLst/>
+          </a:prstGeom>
+          <a:noFill/>
+          <a:ln w="10160">
+            <a:solidFill>
+              <a:srgbClr val="CBD5E1"/>
+            </a:solidFill>
+          </a:ln>
+        </p:spPr>
+      </p:sp>
+      <p:sp>
+        <p:nvSpPr>
+          <p:cNvPr id="9" name="Shape 9"/>
+          <p:cNvSpPr/>
+          <p:nvPr/>
+        </p:nvSpPr>
+        <p:spPr>
+          <a:xfrm>
+            <a:off x="384048" y="6510528"/>
+            <a:ext cx="11411712" cy="164592"/>
+          </a:xfrm>
+          <a:prstGeom prst="roundRect">
             <a:avLst/>
           </a:prstGeom>
           <a:noFill/>
@@ -2610,89 +2749,7 @@
           </a:ln>
         </p:spPr>
         <p:txBody>
-          <a:bodyPr wrap="square" anchor="mid" lIns="0" rIns="0" tIns="0" bIns="0"/>
-          <a:lstStyle/>
-          <a:p>
-            <a:pPr algn="ctr"/>
-            <a:r>
-              <a:rPr lang="zh-CN" sz="1200" b="1">
-                <a:solidFill>
-                  <a:srgbClr val="172033"/>
-                </a:solidFill>
-                <a:latin typeface="Microsoft YaHei"/>
-                <a:ea typeface="Microsoft YaHei"/>
-              </a:rPr>
-              <a:t>控制执行链路</a:t>
-            </a:r>
-          </a:p>
-        </p:txBody>
-      </p:sp>
-      <p:sp>
-        <p:nvSpPr>
-          <p:cNvPr id="54" name="Line 54"/>
-          <p:cNvSpPr/>
-          <p:nvPr/>
-        </p:nvSpPr>
-        <p:spPr>
-          <a:xfrm>
-            <a:off x="7973568" y="3822192"/>
-            <a:ext cx="1060704" cy="1508760"/>
-          </a:xfrm>
-          <a:prstGeom prst="line">
-            <a:avLst/>
-          </a:prstGeom>
-          <a:noFill/>
-          <a:ln w="22860">
-            <a:solidFill>
-              <a:srgbClr val="B91C1C"/>
-            </a:solidFill>
-            <a:tailEnd type="triangle"/>
-          </a:ln>
-        </p:spPr>
-      </p:sp>
-      <p:sp>
-        <p:nvSpPr>
-          <p:cNvPr id="8" name="Line 8"/>
-          <p:cNvSpPr/>
-          <p:nvPr/>
-        </p:nvSpPr>
-        <p:spPr>
-          <a:xfrm>
-            <a:off x="384048" y="6455664"/>
-            <a:ext cx="11411712" cy="1"/>
-          </a:xfrm>
-          <a:prstGeom prst="line">
-            <a:avLst/>
-          </a:prstGeom>
-          <a:noFill/>
-          <a:ln w="10160">
-            <a:solidFill>
-              <a:srgbClr val="CBD5E1"/>
-            </a:solidFill>
-          </a:ln>
-        </p:spPr>
-      </p:sp>
-      <p:sp>
-        <p:nvSpPr>
-          <p:cNvPr id="9" name="Shape 9"/>
-          <p:cNvSpPr/>
-          <p:nvPr/>
-        </p:nvSpPr>
-        <p:spPr>
-          <a:xfrm>
-            <a:off x="384048" y="6510528"/>
-            <a:ext cx="11411712" cy="164592"/>
-          </a:xfrm>
-          <a:prstGeom prst="roundRect">
-            <a:avLst/>
-          </a:prstGeom>
-          <a:noFill/>
-          <a:ln>
-            <a:noFill/>
-          </a:ln>
-        </p:spPr>
-        <p:txBody>
-          <a:bodyPr wrap="square" anchor="mid" lIns="0" rIns="0" tIns="0" bIns="0"/>
+          <a:bodyPr wrap="square" lIns="0" tIns="0" rIns="0" bIns="0" anchor="ctr"/>
           <a:lstStyle/>
           <a:p>
             <a:pPr algn="r"/>
@@ -2701,11 +2758,18 @@
                 <a:solidFill>
                   <a:srgbClr val="64748B"/>
                 </a:solidFill>
-                <a:latin typeface="Microsoft YaHei"/>
-                <a:ea typeface="Microsoft YaHei"/>
+                <a:latin typeface="微软雅黑" panose="020B0503020204020204" charset="-122"/>
+                <a:ea typeface="微软雅黑" panose="020B0503020204020204" charset="-122"/>
               </a:rPr>
               <a:t>Source: 4.3.3.2 雷达智能体子系统技术方案 · editable PowerPoint shapes</a:t>
             </a:r>
+            <a:endParaRPr lang="zh-CN" sz="700">
+              <a:solidFill>
+                <a:srgbClr val="64748B"/>
+              </a:solidFill>
+              <a:latin typeface="微软雅黑" panose="020B0503020204020204" charset="-122"/>
+              <a:ea typeface="微软雅黑" panose="020B0503020204020204" charset="-122"/>
+            </a:endParaRPr>
           </a:p>
         </p:txBody>
       </p:sp>
@@ -2776,7 +2840,7 @@
           </a:ln>
         </p:spPr>
         <p:txBody>
-          <a:bodyPr wrap="square" anchor="mid" lIns="0" rIns="0" tIns="0" bIns="0"/>
+          <a:bodyPr wrap="square" lIns="0" tIns="0" rIns="0" bIns="0" anchor="ctr"/>
           <a:lstStyle/>
           <a:p>
             <a:pPr algn="l"/>
@@ -2785,11 +2849,18 @@
                 <a:solidFill>
                   <a:srgbClr val="64748B"/>
                 </a:solidFill>
-                <a:latin typeface="Microsoft YaHei"/>
-                <a:ea typeface="Microsoft YaHei"/>
+                <a:latin typeface="微软雅黑" panose="020B0503020204020204" charset="-122"/>
+                <a:ea typeface="微软雅黑" panose="020B0503020204020204" charset="-122"/>
               </a:rPr>
               <a:t>FUNCTION COMPOSITION</a:t>
             </a:r>
+            <a:endParaRPr lang="zh-CN" sz="800" b="1">
+              <a:solidFill>
+                <a:srgbClr val="64748B"/>
+              </a:solidFill>
+              <a:latin typeface="微软雅黑" panose="020B0503020204020204" charset="-122"/>
+              <a:ea typeface="微软雅黑" panose="020B0503020204020204" charset="-122"/>
+            </a:endParaRPr>
           </a:p>
         </p:txBody>
       </p:sp>
@@ -2813,7 +2884,7 @@
           </a:ln>
         </p:spPr>
         <p:txBody>
-          <a:bodyPr wrap="square" anchor="mid" lIns="0" rIns="0" tIns="0" bIns="0"/>
+          <a:bodyPr wrap="square" lIns="0" tIns="0" rIns="0" bIns="0" anchor="ctr"/>
           <a:lstStyle/>
           <a:p>
             <a:pPr algn="l"/>
@@ -2822,11 +2893,18 @@
                 <a:solidFill>
                   <a:srgbClr val="172033"/>
                 </a:solidFill>
-                <a:latin typeface="Microsoft YaHei"/>
-                <a:ea typeface="Microsoft YaHei"/>
+                <a:latin typeface="微软雅黑" panose="020B0503020204020204" charset="-122"/>
+                <a:ea typeface="微软雅黑" panose="020B0503020204020204" charset="-122"/>
               </a:rPr>
               <a:t>功能组成图</a:t>
             </a:r>
+            <a:endParaRPr lang="zh-CN" sz="2400" b="1">
+              <a:solidFill>
+                <a:srgbClr val="172033"/>
+              </a:solidFill>
+              <a:latin typeface="微软雅黑" panose="020B0503020204020204" charset="-122"/>
+              <a:ea typeface="微软雅黑" panose="020B0503020204020204" charset="-122"/>
+            </a:endParaRPr>
           </a:p>
         </p:txBody>
       </p:sp>
@@ -2872,7 +2950,7 @@
           </a:ln>
         </p:spPr>
         <p:txBody>
-          <a:bodyPr wrap="square" anchor="mid" lIns="0" rIns="0" tIns="0" bIns="0"/>
+          <a:bodyPr wrap="square" lIns="0" tIns="0" rIns="0" bIns="0" anchor="ctr"/>
           <a:lstStyle/>
           <a:p>
             <a:pPr algn="r"/>
@@ -2881,11 +2959,18 @@
                 <a:solidFill>
                   <a:srgbClr val="64748B"/>
                 </a:solidFill>
-                <a:latin typeface="Microsoft YaHei"/>
-                <a:ea typeface="Microsoft YaHei"/>
+                <a:latin typeface="微软雅黑" panose="020B0503020204020204" charset="-122"/>
+                <a:ea typeface="微软雅黑" panose="020B0503020204020204" charset="-122"/>
               </a:rPr>
               <a:t>03 / 09</a:t>
             </a:r>
+            <a:endParaRPr lang="zh-CN" sz="900" b="1">
+              <a:solidFill>
+                <a:srgbClr val="64748B"/>
+              </a:solidFill>
+              <a:latin typeface="微软雅黑" panose="020B0503020204020204" charset="-122"/>
+              <a:ea typeface="微软雅黑" panose="020B0503020204020204" charset="-122"/>
+            </a:endParaRPr>
           </a:p>
         </p:txBody>
       </p:sp>
@@ -2909,7 +2994,7 @@
           </a:ln>
         </p:spPr>
         <p:txBody>
-          <a:bodyPr wrap="square" anchor="mid" lIns="0" rIns="0" tIns="0" bIns="0"/>
+          <a:bodyPr wrap="square" lIns="0" tIns="0" rIns="0" bIns="0" anchor="ctr"/>
           <a:lstStyle/>
           <a:p>
             <a:pPr algn="l"/>
@@ -2918,11 +3003,18 @@
                 <a:solidFill>
                   <a:srgbClr val="64748B"/>
                 </a:solidFill>
-                <a:latin typeface="Microsoft YaHei"/>
-                <a:ea typeface="Microsoft YaHei"/>
+                <a:latin typeface="微软雅黑" panose="020B0503020204020204" charset="-122"/>
+                <a:ea typeface="微软雅黑" panose="020B0503020204020204" charset="-122"/>
               </a:rPr>
               <a:t>五大核心功能模块支撑任务理解、智能研判、参数建议、流程执行和经验沉淀。</a:t>
             </a:r>
+            <a:endParaRPr lang="zh-CN" sz="1000">
+              <a:solidFill>
+                <a:srgbClr val="64748B"/>
+              </a:solidFill>
+              <a:latin typeface="微软雅黑" panose="020B0503020204020204" charset="-122"/>
+              <a:ea typeface="微软雅黑" panose="020B0503020204020204" charset="-122"/>
+            </a:endParaRPr>
           </a:p>
         </p:txBody>
       </p:sp>
@@ -2950,7 +3042,7 @@
           </a:ln>
         </p:spPr>
         <p:txBody>
-          <a:bodyPr wrap="square" anchor="mid" lIns="91440" rIns="91440" tIns="50292" bIns="50292"/>
+          <a:bodyPr wrap="square" lIns="91440" tIns="50292" rIns="91440" bIns="50292" anchor="ctr"/>
           <a:lstStyle/>
           <a:p>
             <a:pPr algn="ctr"/>
@@ -2959,11 +3051,18 @@
                 <a:solidFill>
                   <a:srgbClr val="FFFFFF"/>
                 </a:solidFill>
-                <a:latin typeface="Microsoft YaHei"/>
-                <a:ea typeface="Microsoft YaHei"/>
+                <a:latin typeface="微软雅黑" panose="020B0503020204020204" charset="-122"/>
+                <a:ea typeface="微软雅黑" panose="020B0503020204020204" charset="-122"/>
               </a:rPr>
               <a:t>贯穿式运行治理：任务实例管理 / 能力包调度 / 安全门控机制 / 追溯记录 / 运行观测</a:t>
             </a:r>
+            <a:endParaRPr lang="zh-CN" sz="1300" b="1">
+              <a:solidFill>
+                <a:srgbClr val="FFFFFF"/>
+              </a:solidFill>
+              <a:latin typeface="微软雅黑" panose="020B0503020204020204" charset="-122"/>
+              <a:ea typeface="微软雅黑" panose="020B0503020204020204" charset="-122"/>
+            </a:endParaRPr>
           </a:p>
         </p:txBody>
       </p:sp>
@@ -2991,21 +3090,8 @@
           </a:ln>
         </p:spPr>
         <p:txBody>
-          <a:bodyPr wrap="square" anchor="mid" lIns="91440" rIns="91440" tIns="50292" bIns="50292"/>
-          <a:lstStyle/>
-          <a:p>
-            <a:pPr algn="ctr"/>
-            <a:r>
-              <a:rPr lang="zh-CN" sz="1100" b="1">
-                <a:solidFill>
-                  <a:srgbClr val="172033"/>
-                </a:solidFill>
-                <a:latin typeface="Microsoft YaHei"/>
-                <a:ea typeface="Microsoft YaHei"/>
-              </a:rPr>
-              <a:t>认知核心模块</a:t>
-            </a:r>
-          </a:p>
+          <a:bodyPr wrap="square" lIns="91440" tIns="50292" rIns="91440" bIns="50292" anchor="ctr"/>
+          <a:lstStyle/>
           <a:p>
             <a:pPr algn="ctr"/>
             <a:r>
@@ -3013,11 +3099,18 @@
                 <a:solidFill>
                   <a:srgbClr val="172033"/>
                 </a:solidFill>
-                <a:latin typeface="Microsoft YaHei"/>
-                <a:ea typeface="Microsoft YaHei"/>
+                <a:latin typeface="微软雅黑" panose="020B0503020204020204" charset="-122"/>
+                <a:ea typeface="微软雅黑" panose="020B0503020204020204" charset="-122"/>
               </a:rPr>
               <a:t>意图理解、任务建模、上下文组织、执行路径规划、研判结论和候选方案生成</a:t>
             </a:r>
+            <a:endParaRPr lang="zh-CN" sz="900">
+              <a:solidFill>
+                <a:srgbClr val="172033"/>
+              </a:solidFill>
+              <a:latin typeface="微软雅黑" panose="020B0503020204020204" charset="-122"/>
+              <a:ea typeface="微软雅黑" panose="020B0503020204020204" charset="-122"/>
+            </a:endParaRPr>
           </a:p>
         </p:txBody>
       </p:sp>
@@ -3063,7 +3156,7 @@
           </a:ln>
         </p:spPr>
         <p:txBody>
-          <a:bodyPr wrap="square" anchor="mid" lIns="0" rIns="0" tIns="0" bIns="0"/>
+          <a:bodyPr wrap="square" lIns="0" tIns="0" rIns="0" bIns="0" anchor="ctr"/>
           <a:lstStyle/>
           <a:p>
             <a:pPr algn="ctr"/>
@@ -3072,11 +3165,18 @@
                 <a:solidFill>
                   <a:srgbClr val="172033"/>
                 </a:solidFill>
-                <a:latin typeface="Microsoft YaHei"/>
-                <a:ea typeface="Microsoft YaHei"/>
+                <a:latin typeface="微软雅黑" panose="020B0503020204020204" charset="-122"/>
+                <a:ea typeface="微软雅黑" panose="020B0503020204020204" charset="-122"/>
               </a:rPr>
               <a:t>认知核心模块</a:t>
             </a:r>
+            <a:endParaRPr lang="zh-CN" sz="1400" b="1">
+              <a:solidFill>
+                <a:srgbClr val="172033"/>
+              </a:solidFill>
+              <a:latin typeface="微软雅黑" panose="020B0503020204020204" charset="-122"/>
+              <a:ea typeface="微软雅黑" panose="020B0503020204020204" charset="-122"/>
+            </a:endParaRPr>
           </a:p>
         </p:txBody>
       </p:sp>
@@ -3104,21 +3204,8 @@
           </a:ln>
         </p:spPr>
         <p:txBody>
-          <a:bodyPr wrap="square" anchor="mid" lIns="91440" rIns="91440" tIns="50292" bIns="50292"/>
-          <a:lstStyle/>
-          <a:p>
-            <a:pPr algn="ctr"/>
-            <a:r>
-              <a:rPr lang="zh-CN" sz="1100" b="1">
-                <a:solidFill>
-                  <a:srgbClr val="172033"/>
-                </a:solidFill>
-                <a:latin typeface="Microsoft YaHei"/>
-                <a:ea typeface="Microsoft YaHei"/>
-              </a:rPr>
-              <a:t>记忆管理模块</a:t>
-            </a:r>
-          </a:p>
+          <a:bodyPr wrap="square" lIns="91440" tIns="50292" rIns="91440" bIns="50292" anchor="ctr"/>
+          <a:lstStyle/>
           <a:p>
             <a:pPr algn="ctr"/>
             <a:r>
@@ -3126,11 +3213,18 @@
                 <a:solidFill>
                   <a:srgbClr val="172033"/>
                 </a:solidFill>
-                <a:latin typeface="Microsoft YaHei"/>
-                <a:ea typeface="Microsoft YaHei"/>
+                <a:latin typeface="微软雅黑" panose="020B0503020204020204" charset="-122"/>
+                <a:ea typeface="微软雅黑" panose="020B0503020204020204" charset="-122"/>
               </a:rPr>
               <a:t>短期任务记忆、中期任务链、长期知识/案例/策略/经验与追溯回流</a:t>
             </a:r>
+            <a:endParaRPr lang="zh-CN" sz="900">
+              <a:solidFill>
+                <a:srgbClr val="172033"/>
+              </a:solidFill>
+              <a:latin typeface="微软雅黑" panose="020B0503020204020204" charset="-122"/>
+              <a:ea typeface="微软雅黑" panose="020B0503020204020204" charset="-122"/>
+            </a:endParaRPr>
           </a:p>
         </p:txBody>
       </p:sp>
@@ -3176,7 +3270,7 @@
           </a:ln>
         </p:spPr>
         <p:txBody>
-          <a:bodyPr wrap="square" anchor="mid" lIns="0" rIns="0" tIns="0" bIns="0"/>
+          <a:bodyPr wrap="square" lIns="0" tIns="0" rIns="0" bIns="0" anchor="ctr"/>
           <a:lstStyle/>
           <a:p>
             <a:pPr algn="ctr"/>
@@ -3185,11 +3279,18 @@
                 <a:solidFill>
                   <a:srgbClr val="172033"/>
                 </a:solidFill>
-                <a:latin typeface="Microsoft YaHei"/>
-                <a:ea typeface="Microsoft YaHei"/>
+                <a:latin typeface="微软雅黑" panose="020B0503020204020204" charset="-122"/>
+                <a:ea typeface="微软雅黑" panose="020B0503020204020204" charset="-122"/>
               </a:rPr>
               <a:t>记忆管理模块</a:t>
             </a:r>
+            <a:endParaRPr lang="zh-CN" sz="1400" b="1">
+              <a:solidFill>
+                <a:srgbClr val="172033"/>
+              </a:solidFill>
+              <a:latin typeface="微软雅黑" panose="020B0503020204020204" charset="-122"/>
+              <a:ea typeface="微软雅黑" panose="020B0503020204020204" charset="-122"/>
+            </a:endParaRPr>
           </a:p>
         </p:txBody>
       </p:sp>
@@ -3217,21 +3318,8 @@
           </a:ln>
         </p:spPr>
         <p:txBody>
-          <a:bodyPr wrap="square" anchor="mid" lIns="91440" rIns="91440" tIns="50292" bIns="50292"/>
-          <a:lstStyle/>
-          <a:p>
-            <a:pPr algn="ctr"/>
-            <a:r>
-              <a:rPr lang="zh-CN" sz="1100" b="1">
-                <a:solidFill>
-                  <a:srgbClr val="172033"/>
-                </a:solidFill>
-                <a:latin typeface="Microsoft YaHei"/>
-                <a:ea typeface="Microsoft YaHei"/>
-              </a:rPr>
-              <a:t>工具执行模块</a:t>
-            </a:r>
-          </a:p>
+          <a:bodyPr wrap="square" lIns="91440" tIns="50292" rIns="91440" bIns="50292" anchor="ctr"/>
+          <a:lstStyle/>
           <a:p>
             <a:pPr algn="ctr"/>
             <a:r>
@@ -3239,11 +3327,18 @@
                 <a:solidFill>
                   <a:srgbClr val="172033"/>
                 </a:solidFill>
-                <a:latin typeface="Microsoft YaHei"/>
-                <a:ea typeface="Microsoft YaHei"/>
+                <a:latin typeface="微软雅黑" panose="020B0503020204020204" charset="-122"/>
+                <a:ea typeface="微软雅黑" panose="020B0503020204020204" charset="-122"/>
               </a:rPr>
               <a:t>感知解释、数据查询、目标分析、参数仿真、控制请求适配和报告生成</a:t>
             </a:r>
+            <a:endParaRPr lang="zh-CN" sz="900">
+              <a:solidFill>
+                <a:srgbClr val="172033"/>
+              </a:solidFill>
+              <a:latin typeface="微软雅黑" panose="020B0503020204020204" charset="-122"/>
+              <a:ea typeface="微软雅黑" panose="020B0503020204020204" charset="-122"/>
+            </a:endParaRPr>
           </a:p>
         </p:txBody>
       </p:sp>
@@ -3289,7 +3384,7 @@
           </a:ln>
         </p:spPr>
         <p:txBody>
-          <a:bodyPr wrap="square" anchor="mid" lIns="0" rIns="0" tIns="0" bIns="0"/>
+          <a:bodyPr wrap="square" lIns="0" tIns="0" rIns="0" bIns="0" anchor="ctr"/>
           <a:lstStyle/>
           <a:p>
             <a:pPr algn="ctr"/>
@@ -3298,11 +3393,18 @@
                 <a:solidFill>
                   <a:srgbClr val="172033"/>
                 </a:solidFill>
-                <a:latin typeface="Microsoft YaHei"/>
-                <a:ea typeface="Microsoft YaHei"/>
+                <a:latin typeface="微软雅黑" panose="020B0503020204020204" charset="-122"/>
+                <a:ea typeface="微软雅黑" panose="020B0503020204020204" charset="-122"/>
               </a:rPr>
               <a:t>工具执行模块</a:t>
             </a:r>
+            <a:endParaRPr lang="zh-CN" sz="1400" b="1">
+              <a:solidFill>
+                <a:srgbClr val="172033"/>
+              </a:solidFill>
+              <a:latin typeface="微软雅黑" panose="020B0503020204020204" charset="-122"/>
+              <a:ea typeface="微软雅黑" panose="020B0503020204020204" charset="-122"/>
+            </a:endParaRPr>
           </a:p>
         </p:txBody>
       </p:sp>
@@ -3330,21 +3432,8 @@
           </a:ln>
         </p:spPr>
         <p:txBody>
-          <a:bodyPr wrap="square" anchor="mid" lIns="91440" rIns="91440" tIns="50292" bIns="50292"/>
-          <a:lstStyle/>
-          <a:p>
-            <a:pPr algn="ctr"/>
-            <a:r>
-              <a:rPr lang="zh-CN" sz="1100" b="1">
-                <a:solidFill>
-                  <a:srgbClr val="172033"/>
-                </a:solidFill>
-                <a:latin typeface="Microsoft YaHei"/>
-                <a:ea typeface="Microsoft YaHei"/>
-              </a:rPr>
-              <a:t>工作流引擎模块</a:t>
-            </a:r>
-          </a:p>
+          <a:bodyPr wrap="square" lIns="91440" tIns="50292" rIns="91440" bIns="50292" anchor="ctr"/>
+          <a:lstStyle/>
           <a:p>
             <a:pPr algn="ctr"/>
             <a:r>
@@ -3352,11 +3441,18 @@
                 <a:solidFill>
                   <a:srgbClr val="172033"/>
                 </a:solidFill>
-                <a:latin typeface="Microsoft YaHei"/>
-                <a:ea typeface="Microsoft YaHei"/>
+                <a:latin typeface="微软雅黑" panose="020B0503020204020204" charset="-122"/>
+                <a:ea typeface="微软雅黑" panose="020B0503020204020204" charset="-122"/>
               </a:rPr>
               <a:t>模板编排、节点执行、审批、检查点、回滚和流程追溯</a:t>
             </a:r>
+            <a:endParaRPr lang="zh-CN" sz="900">
+              <a:solidFill>
+                <a:srgbClr val="172033"/>
+              </a:solidFill>
+              <a:latin typeface="微软雅黑" panose="020B0503020204020204" charset="-122"/>
+              <a:ea typeface="微软雅黑" panose="020B0503020204020204" charset="-122"/>
+            </a:endParaRPr>
           </a:p>
         </p:txBody>
       </p:sp>
@@ -3402,7 +3498,7 @@
           </a:ln>
         </p:spPr>
         <p:txBody>
-          <a:bodyPr wrap="square" anchor="mid" lIns="0" rIns="0" tIns="0" bIns="0"/>
+          <a:bodyPr wrap="square" lIns="0" tIns="0" rIns="0" bIns="0" anchor="ctr"/>
           <a:lstStyle/>
           <a:p>
             <a:pPr algn="ctr"/>
@@ -3411,11 +3507,18 @@
                 <a:solidFill>
                   <a:srgbClr val="172033"/>
                 </a:solidFill>
-                <a:latin typeface="Microsoft YaHei"/>
-                <a:ea typeface="Microsoft YaHei"/>
+                <a:latin typeface="微软雅黑" panose="020B0503020204020204" charset="-122"/>
+                <a:ea typeface="微软雅黑" panose="020B0503020204020204" charset="-122"/>
               </a:rPr>
               <a:t>工作流引擎模块</a:t>
             </a:r>
+            <a:endParaRPr lang="zh-CN" sz="1400" b="1">
+              <a:solidFill>
+                <a:srgbClr val="172033"/>
+              </a:solidFill>
+              <a:latin typeface="微软雅黑" panose="020B0503020204020204" charset="-122"/>
+              <a:ea typeface="微软雅黑" panose="020B0503020204020204" charset="-122"/>
+            </a:endParaRPr>
           </a:p>
         </p:txBody>
       </p:sp>
@@ -3443,21 +3546,8 @@
           </a:ln>
         </p:spPr>
         <p:txBody>
-          <a:bodyPr wrap="square" anchor="mid" lIns="91440" rIns="91440" tIns="50292" bIns="50292"/>
-          <a:lstStyle/>
-          <a:p>
-            <a:pPr algn="ctr"/>
-            <a:r>
-              <a:rPr lang="zh-CN" sz="1100" b="1">
-                <a:solidFill>
-                  <a:srgbClr val="172033"/>
-                </a:solidFill>
-                <a:latin typeface="Microsoft YaHei"/>
-                <a:ea typeface="Microsoft YaHei"/>
-              </a:rPr>
-              <a:t>数据库管理与接入模块</a:t>
-            </a:r>
-          </a:p>
+          <a:bodyPr wrap="square" lIns="91440" tIns="50292" rIns="91440" bIns="50292" anchor="ctr"/>
+          <a:lstStyle/>
           <a:p>
             <a:pPr algn="ctr"/>
             <a:r>
@@ -3465,11 +3555,18 @@
                 <a:solidFill>
                   <a:srgbClr val="172033"/>
                 </a:solidFill>
-                <a:latin typeface="Microsoft YaHei"/>
-                <a:ea typeface="Microsoft YaHei"/>
+                <a:latin typeface="微软雅黑" panose="020B0503020204020204" charset="-122"/>
+                <a:ea typeface="微软雅黑" panose="020B0503020204020204" charset="-122"/>
               </a:rPr>
               <a:t>关系、向量、图关系、时序数据访问，检索路由、质量标识和追溯写入</a:t>
             </a:r>
+            <a:endParaRPr lang="zh-CN" sz="900">
+              <a:solidFill>
+                <a:srgbClr val="172033"/>
+              </a:solidFill>
+              <a:latin typeface="微软雅黑" panose="020B0503020204020204" charset="-122"/>
+              <a:ea typeface="微软雅黑" panose="020B0503020204020204" charset="-122"/>
+            </a:endParaRPr>
           </a:p>
         </p:txBody>
       </p:sp>
@@ -3515,7 +3612,7 @@
           </a:ln>
         </p:spPr>
         <p:txBody>
-          <a:bodyPr wrap="square" anchor="mid" lIns="0" rIns="0" tIns="0" bIns="0"/>
+          <a:bodyPr wrap="square" lIns="0" tIns="0" rIns="0" bIns="0" anchor="ctr"/>
           <a:lstStyle/>
           <a:p>
             <a:pPr algn="ctr"/>
@@ -3524,11 +3621,18 @@
                 <a:solidFill>
                   <a:srgbClr val="172033"/>
                 </a:solidFill>
-                <a:latin typeface="Microsoft YaHei"/>
-                <a:ea typeface="Microsoft YaHei"/>
+                <a:latin typeface="微软雅黑" panose="020B0503020204020204" charset="-122"/>
+                <a:ea typeface="微软雅黑" panose="020B0503020204020204" charset="-122"/>
               </a:rPr>
               <a:t>数据库管理与接入模块</a:t>
             </a:r>
+            <a:endParaRPr lang="zh-CN" sz="1400" b="1">
+              <a:solidFill>
+                <a:srgbClr val="172033"/>
+              </a:solidFill>
+              <a:latin typeface="微软雅黑" panose="020B0503020204020204" charset="-122"/>
+              <a:ea typeface="微软雅黑" panose="020B0503020204020204" charset="-122"/>
+            </a:endParaRPr>
           </a:p>
         </p:txBody>
       </p:sp>
@@ -3666,7 +3770,7 @@
           </a:ln>
         </p:spPr>
         <p:txBody>
-          <a:bodyPr wrap="square" anchor="mid" lIns="91440" rIns="91440" tIns="50292" bIns="50292"/>
+          <a:bodyPr wrap="square" lIns="91440" tIns="50292" rIns="91440" bIns="50292" anchor="ctr"/>
           <a:lstStyle/>
           <a:p>
             <a:pPr algn="ctr"/>
@@ -3675,11 +3779,18 @@
                 <a:solidFill>
                   <a:srgbClr val="FFFFFF"/>
                 </a:solidFill>
-                <a:latin typeface="Microsoft YaHei"/>
-                <a:ea typeface="Microsoft YaHei"/>
+                <a:latin typeface="微软雅黑" panose="020B0503020204020204" charset="-122"/>
+                <a:ea typeface="微软雅黑" panose="020B0503020204020204" charset="-122"/>
               </a:rPr>
               <a:t>统一任务实例</a:t>
             </a:r>
+            <a:endParaRPr lang="zh-CN" sz="1500" b="1">
+              <a:solidFill>
+                <a:srgbClr val="FFFFFF"/>
+              </a:solidFill>
+              <a:latin typeface="微软雅黑" panose="020B0503020204020204" charset="-122"/>
+              <a:ea typeface="微软雅黑" panose="020B0503020204020204" charset="-122"/>
+            </a:endParaRPr>
           </a:p>
           <a:p>
             <a:pPr algn="ctr"/>
@@ -3688,11 +3799,18 @@
                 <a:solidFill>
                   <a:srgbClr val="FFFFFF"/>
                 </a:solidFill>
-                <a:latin typeface="Microsoft YaHei"/>
-                <a:ea typeface="Microsoft YaHei"/>
+                <a:latin typeface="微软雅黑" panose="020B0503020204020204" charset="-122"/>
+                <a:ea typeface="微软雅黑" panose="020B0503020204020204" charset="-122"/>
               </a:rPr>
               <a:t>统一证据引用</a:t>
             </a:r>
+            <a:endParaRPr lang="zh-CN" sz="1300" b="1">
+              <a:solidFill>
+                <a:srgbClr val="FFFFFF"/>
+              </a:solidFill>
+              <a:latin typeface="微软雅黑" panose="020B0503020204020204" charset="-122"/>
+              <a:ea typeface="微软雅黑" panose="020B0503020204020204" charset="-122"/>
+            </a:endParaRPr>
           </a:p>
           <a:p>
             <a:pPr algn="ctr"/>
@@ -3701,11 +3819,18 @@
                 <a:solidFill>
                   <a:srgbClr val="FFFFFF"/>
                 </a:solidFill>
-                <a:latin typeface="Microsoft YaHei"/>
-                <a:ea typeface="Microsoft YaHei"/>
+                <a:latin typeface="微软雅黑" panose="020B0503020204020204" charset="-122"/>
+                <a:ea typeface="微软雅黑" panose="020B0503020204020204" charset="-122"/>
               </a:rPr>
               <a:t>统一追溯引用</a:t>
             </a:r>
+            <a:endParaRPr lang="zh-CN" sz="1300" b="1">
+              <a:solidFill>
+                <a:srgbClr val="FFFFFF"/>
+              </a:solidFill>
+              <a:latin typeface="微软雅黑" panose="020B0503020204020204" charset="-122"/>
+              <a:ea typeface="微软雅黑" panose="020B0503020204020204" charset="-122"/>
+            </a:endParaRPr>
           </a:p>
         </p:txBody>
       </p:sp>
@@ -3733,7 +3858,7 @@
           </a:ln>
         </p:spPr>
         <p:txBody>
-          <a:bodyPr wrap="square" anchor="mid" lIns="91440" rIns="91440" tIns="50292" bIns="50292"/>
+          <a:bodyPr wrap="square" lIns="91440" tIns="50292" rIns="91440" bIns="50292" anchor="ctr"/>
           <a:lstStyle/>
           <a:p>
             <a:pPr algn="ctr"/>
@@ -3742,11 +3867,18 @@
                 <a:solidFill>
                   <a:srgbClr val="172033"/>
                 </a:solidFill>
-                <a:latin typeface="Microsoft YaHei"/>
-                <a:ea typeface="Microsoft YaHei"/>
+                <a:latin typeface="微软雅黑" panose="020B0503020204020204" charset="-122"/>
+                <a:ea typeface="微软雅黑" panose="020B0503020204020204" charset="-122"/>
               </a:rPr>
               <a:t>设计要点：运行底座、安全门控和追溯记录是贯穿机制，不作为替代五大核心模块的独立业务孤岛。</a:t>
             </a:r>
+            <a:endParaRPr lang="zh-CN" sz="1200">
+              <a:solidFill>
+                <a:srgbClr val="172033"/>
+              </a:solidFill>
+              <a:latin typeface="微软雅黑" panose="020B0503020204020204" charset="-122"/>
+              <a:ea typeface="微软雅黑" panose="020B0503020204020204" charset="-122"/>
+            </a:endParaRPr>
           </a:p>
         </p:txBody>
       </p:sp>
@@ -3792,7 +3924,7 @@
           </a:ln>
         </p:spPr>
         <p:txBody>
-          <a:bodyPr wrap="square" anchor="mid" lIns="0" rIns="0" tIns="0" bIns="0"/>
+          <a:bodyPr wrap="square" lIns="0" tIns="0" rIns="0" bIns="0" anchor="ctr"/>
           <a:lstStyle/>
           <a:p>
             <a:pPr algn="r"/>
@@ -3801,11 +3933,18 @@
                 <a:solidFill>
                   <a:srgbClr val="64748B"/>
                 </a:solidFill>
-                <a:latin typeface="Microsoft YaHei"/>
-                <a:ea typeface="Microsoft YaHei"/>
+                <a:latin typeface="微软雅黑" panose="020B0503020204020204" charset="-122"/>
+                <a:ea typeface="微软雅黑" panose="020B0503020204020204" charset="-122"/>
               </a:rPr>
               <a:t>Source: 4.3.3.2 雷达智能体子系统技术方案 · editable PowerPoint shapes</a:t>
             </a:r>
+            <a:endParaRPr lang="zh-CN" sz="700">
+              <a:solidFill>
+                <a:srgbClr val="64748B"/>
+              </a:solidFill>
+              <a:latin typeface="微软雅黑" panose="020B0503020204020204" charset="-122"/>
+              <a:ea typeface="微软雅黑" panose="020B0503020204020204" charset="-122"/>
+            </a:endParaRPr>
           </a:p>
         </p:txBody>
       </p:sp>
@@ -3876,7 +4015,7 @@
           </a:ln>
         </p:spPr>
         <p:txBody>
-          <a:bodyPr wrap="square" anchor="mid" lIns="0" rIns="0" tIns="0" bIns="0"/>
+          <a:bodyPr wrap="square" lIns="0" tIns="0" rIns="0" bIns="0" anchor="ctr"/>
           <a:lstStyle/>
           <a:p>
             <a:pPr algn="l"/>
@@ -3885,11 +4024,18 @@
                 <a:solidFill>
                   <a:srgbClr val="64748B"/>
                 </a:solidFill>
-                <a:latin typeface="Microsoft YaHei"/>
-                <a:ea typeface="Microsoft YaHei"/>
+                <a:latin typeface="微软雅黑" panose="020B0503020204020204" charset="-122"/>
+                <a:ea typeface="微软雅黑" panose="020B0503020204020204" charset="-122"/>
               </a:rPr>
               <a:t>SOFTWARE LAYERING</a:t>
             </a:r>
+            <a:endParaRPr lang="zh-CN" sz="800" b="1">
+              <a:solidFill>
+                <a:srgbClr val="64748B"/>
+              </a:solidFill>
+              <a:latin typeface="微软雅黑" panose="020B0503020204020204" charset="-122"/>
+              <a:ea typeface="微软雅黑" panose="020B0503020204020204" charset="-122"/>
+            </a:endParaRPr>
           </a:p>
         </p:txBody>
       </p:sp>
@@ -3913,7 +4059,7 @@
           </a:ln>
         </p:spPr>
         <p:txBody>
-          <a:bodyPr wrap="square" anchor="mid" lIns="0" rIns="0" tIns="0" bIns="0"/>
+          <a:bodyPr wrap="square" lIns="0" tIns="0" rIns="0" bIns="0" anchor="ctr"/>
           <a:lstStyle/>
           <a:p>
             <a:pPr algn="l"/>
@@ -3922,11 +4068,18 @@
                 <a:solidFill>
                   <a:srgbClr val="172033"/>
                 </a:solidFill>
-                <a:latin typeface="Microsoft YaHei"/>
-                <a:ea typeface="Microsoft YaHei"/>
+                <a:latin typeface="微软雅黑" panose="020B0503020204020204" charset="-122"/>
+                <a:ea typeface="微软雅黑" panose="020B0503020204020204" charset="-122"/>
               </a:rPr>
               <a:t>软件分层架构图</a:t>
             </a:r>
+            <a:endParaRPr lang="zh-CN" sz="2400" b="1">
+              <a:solidFill>
+                <a:srgbClr val="172033"/>
+              </a:solidFill>
+              <a:latin typeface="微软雅黑" panose="020B0503020204020204" charset="-122"/>
+              <a:ea typeface="微软雅黑" panose="020B0503020204020204" charset="-122"/>
+            </a:endParaRPr>
           </a:p>
         </p:txBody>
       </p:sp>
@@ -3972,7 +4125,7 @@
           </a:ln>
         </p:spPr>
         <p:txBody>
-          <a:bodyPr wrap="square" anchor="mid" lIns="0" rIns="0" tIns="0" bIns="0"/>
+          <a:bodyPr wrap="square" lIns="0" tIns="0" rIns="0" bIns="0" anchor="ctr"/>
           <a:lstStyle/>
           <a:p>
             <a:pPr algn="r"/>
@@ -3981,11 +4134,18 @@
                 <a:solidFill>
                   <a:srgbClr val="64748B"/>
                 </a:solidFill>
-                <a:latin typeface="Microsoft YaHei"/>
-                <a:ea typeface="Microsoft YaHei"/>
+                <a:latin typeface="微软雅黑" panose="020B0503020204020204" charset="-122"/>
+                <a:ea typeface="微软雅黑" panose="020B0503020204020204" charset="-122"/>
               </a:rPr>
               <a:t>04 / 09</a:t>
             </a:r>
+            <a:endParaRPr lang="zh-CN" sz="900" b="1">
+              <a:solidFill>
+                <a:srgbClr val="64748B"/>
+              </a:solidFill>
+              <a:latin typeface="微软雅黑" panose="020B0503020204020204" charset="-122"/>
+              <a:ea typeface="微软雅黑" panose="020B0503020204020204" charset="-122"/>
+            </a:endParaRPr>
           </a:p>
         </p:txBody>
       </p:sp>
@@ -4009,7 +4169,7 @@
           </a:ln>
         </p:spPr>
         <p:txBody>
-          <a:bodyPr wrap="square" anchor="mid" lIns="0" rIns="0" tIns="0" bIns="0"/>
+          <a:bodyPr wrap="square" lIns="0" tIns="0" rIns="0" bIns="0" anchor="ctr"/>
           <a:lstStyle/>
           <a:p>
             <a:pPr algn="l"/>
@@ -4018,11 +4178,18 @@
                 <a:solidFill>
                   <a:srgbClr val="64748B"/>
                 </a:solidFill>
-                <a:latin typeface="Microsoft YaHei"/>
-                <a:ea typeface="Microsoft YaHei"/>
+                <a:latin typeface="微软雅黑" panose="020B0503020204020204" charset="-122"/>
+                <a:ea typeface="微软雅黑" panose="020B0503020204020204" charset="-122"/>
               </a:rPr>
               <a:t>同一套智能体能力可以从应用层、服务层、组件层和资源层四个实现视角组织。</a:t>
             </a:r>
+            <a:endParaRPr lang="zh-CN" sz="1000">
+              <a:solidFill>
+                <a:srgbClr val="64748B"/>
+              </a:solidFill>
+              <a:latin typeface="微软雅黑" panose="020B0503020204020204" charset="-122"/>
+              <a:ea typeface="微软雅黑" panose="020B0503020204020204" charset="-122"/>
+            </a:endParaRPr>
           </a:p>
         </p:txBody>
       </p:sp>
@@ -4050,7 +4217,7 @@
           </a:ln>
         </p:spPr>
         <p:txBody>
-          <a:bodyPr wrap="square" anchor="mid" lIns="91440" rIns="91440" tIns="50292" bIns="50292"/>
+          <a:bodyPr wrap="square" lIns="91440" tIns="50292" rIns="91440" bIns="50292" anchor="ctr"/>
           <a:lstStyle/>
           <a:p>
             <a:pPr algn="ctr"/>
@@ -4059,11 +4226,18 @@
                 <a:solidFill>
                   <a:srgbClr val="FFFFFF"/>
                 </a:solidFill>
-                <a:latin typeface="Microsoft YaHei"/>
-                <a:ea typeface="Microsoft YaHei"/>
+                <a:latin typeface="微软雅黑" panose="020B0503020204020204" charset="-122"/>
+                <a:ea typeface="微软雅黑" panose="020B0503020204020204" charset="-122"/>
               </a:rPr>
               <a:t>应用层</a:t>
             </a:r>
+            <a:endParaRPr lang="zh-CN" sz="1700" b="1">
+              <a:solidFill>
+                <a:srgbClr val="FFFFFF"/>
+              </a:solidFill>
+              <a:latin typeface="微软雅黑" panose="020B0503020204020204" charset="-122"/>
+              <a:ea typeface="微软雅黑" panose="020B0503020204020204" charset="-122"/>
+            </a:endParaRPr>
           </a:p>
         </p:txBody>
       </p:sp>
@@ -4091,7 +4265,7 @@
           </a:ln>
         </p:spPr>
         <p:txBody>
-          <a:bodyPr wrap="square" anchor="mid" lIns="91440" rIns="91440" tIns="50292" bIns="50292"/>
+          <a:bodyPr wrap="square" lIns="91440" tIns="50292" rIns="91440" bIns="50292" anchor="ctr"/>
           <a:lstStyle/>
           <a:p>
             <a:pPr algn="ctr"/>
@@ -4100,11 +4274,18 @@
                 <a:solidFill>
                   <a:srgbClr val="172033"/>
                 </a:solidFill>
-                <a:latin typeface="Microsoft YaHei"/>
-                <a:ea typeface="Microsoft YaHei"/>
+                <a:latin typeface="微软雅黑" panose="020B0503020204020204" charset="-122"/>
+                <a:ea typeface="微软雅黑" panose="020B0503020204020204" charset="-122"/>
               </a:rPr>
               <a:t>态势问答 | 目标研判 | 波形参数建议 | 流程状态展示 | 复盘报告生成</a:t>
             </a:r>
+            <a:endParaRPr lang="zh-CN" sz="1300">
+              <a:solidFill>
+                <a:srgbClr val="172033"/>
+              </a:solidFill>
+              <a:latin typeface="微软雅黑" panose="020B0503020204020204" charset="-122"/>
+              <a:ea typeface="微软雅黑" panose="020B0503020204020204" charset="-122"/>
+            </a:endParaRPr>
           </a:p>
         </p:txBody>
       </p:sp>
@@ -4155,7 +4336,7 @@
           </a:ln>
         </p:spPr>
         <p:txBody>
-          <a:bodyPr wrap="square" anchor="mid" lIns="91440" rIns="91440" tIns="50292" bIns="50292"/>
+          <a:bodyPr wrap="square" lIns="91440" tIns="50292" rIns="91440" bIns="50292" anchor="ctr"/>
           <a:lstStyle/>
           <a:p>
             <a:pPr algn="ctr"/>
@@ -4164,11 +4345,18 @@
                 <a:solidFill>
                   <a:srgbClr val="FFFFFF"/>
                 </a:solidFill>
-                <a:latin typeface="Microsoft YaHei"/>
-                <a:ea typeface="Microsoft YaHei"/>
+                <a:latin typeface="微软雅黑" panose="020B0503020204020204" charset="-122"/>
+                <a:ea typeface="微软雅黑" panose="020B0503020204020204" charset="-122"/>
               </a:rPr>
               <a:t>服务层</a:t>
             </a:r>
+            <a:endParaRPr lang="zh-CN" sz="1700" b="1">
+              <a:solidFill>
+                <a:srgbClr val="FFFFFF"/>
+              </a:solidFill>
+              <a:latin typeface="微软雅黑" panose="020B0503020204020204" charset="-122"/>
+              <a:ea typeface="微软雅黑" panose="020B0503020204020204" charset="-122"/>
+            </a:endParaRPr>
           </a:p>
         </p:txBody>
       </p:sp>
@@ -4196,7 +4384,7 @@
           </a:ln>
         </p:spPr>
         <p:txBody>
-          <a:bodyPr wrap="square" anchor="mid" lIns="91440" rIns="91440" tIns="50292" bIns="50292"/>
+          <a:bodyPr wrap="square" lIns="91440" tIns="50292" rIns="91440" bIns="50292" anchor="ctr"/>
           <a:lstStyle/>
           <a:p>
             <a:pPr algn="ctr"/>
@@ -4205,11 +4393,18 @@
                 <a:solidFill>
                   <a:srgbClr val="172033"/>
                 </a:solidFill>
-                <a:latin typeface="Microsoft YaHei"/>
-                <a:ea typeface="Microsoft YaHei"/>
+                <a:latin typeface="微软雅黑" panose="020B0503020204020204" charset="-122"/>
+                <a:ea typeface="微软雅黑" panose="020B0503020204020204" charset="-122"/>
               </a:rPr>
               <a:t>任务运行管理 | 认知推理 | 工作流编排 | 记忆管理 | 安全门控 | 追溯记录</a:t>
             </a:r>
+            <a:endParaRPr lang="zh-CN" sz="1300">
+              <a:solidFill>
+                <a:srgbClr val="172033"/>
+              </a:solidFill>
+              <a:latin typeface="微软雅黑" panose="020B0503020204020204" charset="-122"/>
+              <a:ea typeface="微软雅黑" panose="020B0503020204020204" charset="-122"/>
+            </a:endParaRPr>
           </a:p>
         </p:txBody>
       </p:sp>
@@ -4260,7 +4455,7 @@
           </a:ln>
         </p:spPr>
         <p:txBody>
-          <a:bodyPr wrap="square" anchor="mid" lIns="91440" rIns="91440" tIns="50292" bIns="50292"/>
+          <a:bodyPr wrap="square" lIns="91440" tIns="50292" rIns="91440" bIns="50292" anchor="ctr"/>
           <a:lstStyle/>
           <a:p>
             <a:pPr algn="ctr"/>
@@ -4269,11 +4464,18 @@
                 <a:solidFill>
                   <a:srgbClr val="FFFFFF"/>
                 </a:solidFill>
-                <a:latin typeface="Microsoft YaHei"/>
-                <a:ea typeface="Microsoft YaHei"/>
+                <a:latin typeface="微软雅黑" panose="020B0503020204020204" charset="-122"/>
+                <a:ea typeface="微软雅黑" panose="020B0503020204020204" charset="-122"/>
               </a:rPr>
               <a:t>组件层</a:t>
             </a:r>
+            <a:endParaRPr lang="zh-CN" sz="1700" b="1">
+              <a:solidFill>
+                <a:srgbClr val="FFFFFF"/>
+              </a:solidFill>
+              <a:latin typeface="微软雅黑" panose="020B0503020204020204" charset="-122"/>
+              <a:ea typeface="微软雅黑" panose="020B0503020204020204" charset="-122"/>
+            </a:endParaRPr>
           </a:p>
         </p:txBody>
       </p:sp>
@@ -4301,7 +4503,7 @@
           </a:ln>
         </p:spPr>
         <p:txBody>
-          <a:bodyPr wrap="square" anchor="mid" lIns="91440" rIns="91440" tIns="50292" bIns="50292"/>
+          <a:bodyPr wrap="square" lIns="91440" tIns="50292" rIns="91440" bIns="50292" anchor="ctr"/>
           <a:lstStyle/>
           <a:p>
             <a:pPr algn="ctr"/>
@@ -4310,11 +4512,18 @@
                 <a:solidFill>
                   <a:srgbClr val="172033"/>
                 </a:solidFill>
-                <a:latin typeface="Microsoft YaHei"/>
-                <a:ea typeface="Microsoft YaHei"/>
+                <a:latin typeface="微软雅黑" panose="020B0503020204020204" charset="-122"/>
+                <a:ea typeface="微软雅黑" panose="020B0503020204020204" charset="-122"/>
               </a:rPr>
               <a:t>大语言模型推理引擎 | 雷达专业能力包 | 工具执行适配 | 数据库访问适配 | 语义检索 | 图关系与时序查询</a:t>
             </a:r>
+            <a:endParaRPr lang="zh-CN" sz="1300">
+              <a:solidFill>
+                <a:srgbClr val="172033"/>
+              </a:solidFill>
+              <a:latin typeface="微软雅黑" panose="020B0503020204020204" charset="-122"/>
+              <a:ea typeface="微软雅黑" panose="020B0503020204020204" charset="-122"/>
+            </a:endParaRPr>
           </a:p>
         </p:txBody>
       </p:sp>
@@ -4365,7 +4574,7 @@
           </a:ln>
         </p:spPr>
         <p:txBody>
-          <a:bodyPr wrap="square" anchor="mid" lIns="91440" rIns="91440" tIns="50292" bIns="50292"/>
+          <a:bodyPr wrap="square" lIns="91440" tIns="50292" rIns="91440" bIns="50292" anchor="ctr"/>
           <a:lstStyle/>
           <a:p>
             <a:pPr algn="ctr"/>
@@ -4374,11 +4583,18 @@
                 <a:solidFill>
                   <a:srgbClr val="FFFFFF"/>
                 </a:solidFill>
-                <a:latin typeface="Microsoft YaHei"/>
-                <a:ea typeface="Microsoft YaHei"/>
+                <a:latin typeface="微软雅黑" panose="020B0503020204020204" charset="-122"/>
+                <a:ea typeface="微软雅黑" panose="020B0503020204020204" charset="-122"/>
               </a:rPr>
               <a:t>资源层</a:t>
             </a:r>
+            <a:endParaRPr lang="zh-CN" sz="1700" b="1">
+              <a:solidFill>
+                <a:srgbClr val="FFFFFF"/>
+              </a:solidFill>
+              <a:latin typeface="微软雅黑" panose="020B0503020204020204" charset="-122"/>
+              <a:ea typeface="微软雅黑" panose="020B0503020204020204" charset="-122"/>
+            </a:endParaRPr>
           </a:p>
         </p:txBody>
       </p:sp>
@@ -4406,7 +4622,7 @@
           </a:ln>
         </p:spPr>
         <p:txBody>
-          <a:bodyPr wrap="square" anchor="mid" lIns="91440" rIns="91440" tIns="50292" bIns="50292"/>
+          <a:bodyPr wrap="square" lIns="91440" tIns="50292" rIns="91440" bIns="50292" anchor="ctr"/>
           <a:lstStyle/>
           <a:p>
             <a:pPr algn="ctr"/>
@@ -4415,11 +4631,18 @@
                 <a:solidFill>
                   <a:srgbClr val="172033"/>
                 </a:solidFill>
-                <a:latin typeface="Microsoft YaHei"/>
-                <a:ea typeface="Microsoft YaHei"/>
+                <a:latin typeface="微软雅黑" panose="020B0503020204020204" charset="-122"/>
+                <a:ea typeface="微软雅黑" panose="020B0503020204020204" charset="-122"/>
               </a:rPr>
               <a:t>模型算力 | 关系/向量/图/时序数据 | 感知结果 | 雷达状态 | 控制执行接口 | 雷达知识与历史案例</a:t>
             </a:r>
+            <a:endParaRPr lang="zh-CN" sz="1300">
+              <a:solidFill>
+                <a:srgbClr val="172033"/>
+              </a:solidFill>
+              <a:latin typeface="微软雅黑" panose="020B0503020204020204" charset="-122"/>
+              <a:ea typeface="微软雅黑" panose="020B0503020204020204" charset="-122"/>
+            </a:endParaRPr>
           </a:p>
         </p:txBody>
       </p:sp>
@@ -4443,7 +4666,7 @@
           </a:ln>
         </p:spPr>
         <p:txBody>
-          <a:bodyPr wrap="square" anchor="mid" lIns="0" rIns="0" tIns="0" bIns="0"/>
+          <a:bodyPr wrap="square" lIns="0" tIns="0" rIns="0" bIns="0" anchor="ctr"/>
           <a:lstStyle/>
           <a:p>
             <a:pPr algn="ctr"/>
@@ -4452,11 +4675,18 @@
                 <a:solidFill>
                   <a:srgbClr val="64748B"/>
                 </a:solidFill>
-                <a:latin typeface="Microsoft YaHei"/>
-                <a:ea typeface="Microsoft YaHei"/>
+                <a:latin typeface="微软雅黑" panose="020B0503020204020204" charset="-122"/>
+                <a:ea typeface="微软雅黑" panose="020B0503020204020204" charset="-122"/>
               </a:rPr>
               <a:t>映射关系：认知核心主要承接应用层和服务层；记忆、工具、工作流位于服务层/组件层；数据库接入连接组件层和资源层。</a:t>
             </a:r>
+            <a:endParaRPr lang="zh-CN" sz="1000">
+              <a:solidFill>
+                <a:srgbClr val="64748B"/>
+              </a:solidFill>
+              <a:latin typeface="微软雅黑" panose="020B0503020204020204" charset="-122"/>
+              <a:ea typeface="微软雅黑" panose="020B0503020204020204" charset="-122"/>
+            </a:endParaRPr>
           </a:p>
         </p:txBody>
       </p:sp>
@@ -4502,7 +4732,7 @@
           </a:ln>
         </p:spPr>
         <p:txBody>
-          <a:bodyPr wrap="square" anchor="mid" lIns="0" rIns="0" tIns="0" bIns="0"/>
+          <a:bodyPr wrap="square" lIns="0" tIns="0" rIns="0" bIns="0" anchor="ctr"/>
           <a:lstStyle/>
           <a:p>
             <a:pPr algn="r"/>
@@ -4511,11 +4741,18 @@
                 <a:solidFill>
                   <a:srgbClr val="64748B"/>
                 </a:solidFill>
-                <a:latin typeface="Microsoft YaHei"/>
-                <a:ea typeface="Microsoft YaHei"/>
+                <a:latin typeface="微软雅黑" panose="020B0503020204020204" charset="-122"/>
+                <a:ea typeface="微软雅黑" panose="020B0503020204020204" charset="-122"/>
               </a:rPr>
               <a:t>Source: 4.3.3.2 雷达智能体子系统技术方案 · editable PowerPoint shapes</a:t>
             </a:r>
+            <a:endParaRPr lang="zh-CN" sz="700">
+              <a:solidFill>
+                <a:srgbClr val="64748B"/>
+              </a:solidFill>
+              <a:latin typeface="微软雅黑" panose="020B0503020204020204" charset="-122"/>
+              <a:ea typeface="微软雅黑" panose="020B0503020204020204" charset="-122"/>
+            </a:endParaRPr>
           </a:p>
         </p:txBody>
       </p:sp>
@@ -4586,7 +4823,7 @@
           </a:ln>
         </p:spPr>
         <p:txBody>
-          <a:bodyPr wrap="square" anchor="mid" lIns="0" rIns="0" tIns="0" bIns="0"/>
+          <a:bodyPr wrap="square" lIns="0" tIns="0" rIns="0" bIns="0" anchor="ctr"/>
           <a:lstStyle/>
           <a:p>
             <a:pPr algn="l"/>
@@ -4595,11 +4832,18 @@
                 <a:solidFill>
                   <a:srgbClr val="64748B"/>
                 </a:solidFill>
-                <a:latin typeface="Microsoft YaHei"/>
-                <a:ea typeface="Microsoft YaHei"/>
+                <a:latin typeface="微软雅黑" panose="020B0503020204020204" charset="-122"/>
+                <a:ea typeface="微软雅黑" panose="020B0503020204020204" charset="-122"/>
               </a:rPr>
               <a:t>TASK EXECUTION FLOW</a:t>
             </a:r>
+            <a:endParaRPr lang="zh-CN" sz="800" b="1">
+              <a:solidFill>
+                <a:srgbClr val="64748B"/>
+              </a:solidFill>
+              <a:latin typeface="微软雅黑" panose="020B0503020204020204" charset="-122"/>
+              <a:ea typeface="微软雅黑" panose="020B0503020204020204" charset="-122"/>
+            </a:endParaRPr>
           </a:p>
         </p:txBody>
       </p:sp>
@@ -4623,7 +4867,7 @@
           </a:ln>
         </p:spPr>
         <p:txBody>
-          <a:bodyPr wrap="square" anchor="mid" lIns="0" rIns="0" tIns="0" bIns="0"/>
+          <a:bodyPr wrap="square" lIns="0" tIns="0" rIns="0" bIns="0" anchor="ctr"/>
           <a:lstStyle/>
           <a:p>
             <a:pPr algn="l"/>
@@ -4632,11 +4876,18 @@
                 <a:solidFill>
                   <a:srgbClr val="172033"/>
                 </a:solidFill>
-                <a:latin typeface="Microsoft YaHei"/>
-                <a:ea typeface="Microsoft YaHei"/>
+                <a:latin typeface="微软雅黑" panose="020B0503020204020204" charset="-122"/>
+                <a:ea typeface="微软雅黑" panose="020B0503020204020204" charset="-122"/>
               </a:rPr>
               <a:t>系统执行信息流程图</a:t>
             </a:r>
+            <a:endParaRPr lang="zh-CN" sz="2400" b="1">
+              <a:solidFill>
+                <a:srgbClr val="172033"/>
+              </a:solidFill>
+              <a:latin typeface="微软雅黑" panose="020B0503020204020204" charset="-122"/>
+              <a:ea typeface="微软雅黑" panose="020B0503020204020204" charset="-122"/>
+            </a:endParaRPr>
           </a:p>
         </p:txBody>
       </p:sp>
@@ -4682,7 +4933,7 @@
           </a:ln>
         </p:spPr>
         <p:txBody>
-          <a:bodyPr wrap="square" anchor="mid" lIns="0" rIns="0" tIns="0" bIns="0"/>
+          <a:bodyPr wrap="square" lIns="0" tIns="0" rIns="0" bIns="0" anchor="ctr"/>
           <a:lstStyle/>
           <a:p>
             <a:pPr algn="r"/>
@@ -4691,11 +4942,18 @@
                 <a:solidFill>
                   <a:srgbClr val="64748B"/>
                 </a:solidFill>
-                <a:latin typeface="Microsoft YaHei"/>
-                <a:ea typeface="Microsoft YaHei"/>
+                <a:latin typeface="微软雅黑" panose="020B0503020204020204" charset="-122"/>
+                <a:ea typeface="微软雅黑" panose="020B0503020204020204" charset="-122"/>
               </a:rPr>
               <a:t>05 / 09</a:t>
             </a:r>
+            <a:endParaRPr lang="zh-CN" sz="900" b="1">
+              <a:solidFill>
+                <a:srgbClr val="64748B"/>
+              </a:solidFill>
+              <a:latin typeface="微软雅黑" panose="020B0503020204020204" charset="-122"/>
+              <a:ea typeface="微软雅黑" panose="020B0503020204020204" charset="-122"/>
+            </a:endParaRPr>
           </a:p>
         </p:txBody>
       </p:sp>
@@ -4719,7 +4977,7 @@
           </a:ln>
         </p:spPr>
         <p:txBody>
-          <a:bodyPr wrap="square" anchor="mid" lIns="0" rIns="0" tIns="0" bIns="0"/>
+          <a:bodyPr wrap="square" lIns="0" tIns="0" rIns="0" bIns="0" anchor="ctr"/>
           <a:lstStyle/>
           <a:p>
             <a:pPr algn="l"/>
@@ -4728,11 +4986,18 @@
                 <a:solidFill>
                   <a:srgbClr val="64748B"/>
                 </a:solidFill>
-                <a:latin typeface="Microsoft YaHei"/>
-                <a:ea typeface="Microsoft YaHei"/>
+                <a:latin typeface="微软雅黑" panose="020B0503020204020204" charset="-122"/>
+                <a:ea typeface="微软雅黑" panose="020B0503020204020204" charset="-122"/>
               </a:rPr>
               <a:t>任务实例贯穿显控请求、感知事件、上下文、推理、工具、工作流、追溯和记忆回流。</a:t>
             </a:r>
+            <a:endParaRPr lang="zh-CN" sz="1000">
+              <a:solidFill>
+                <a:srgbClr val="64748B"/>
+              </a:solidFill>
+              <a:latin typeface="微软雅黑" panose="020B0503020204020204" charset="-122"/>
+              <a:ea typeface="微软雅黑" panose="020B0503020204020204" charset="-122"/>
+            </a:endParaRPr>
           </a:p>
         </p:txBody>
       </p:sp>
@@ -4760,7 +5025,7 @@
           </a:ln>
         </p:spPr>
         <p:txBody>
-          <a:bodyPr wrap="square" anchor="mid" lIns="91440" rIns="91440" tIns="50292" bIns="50292"/>
+          <a:bodyPr wrap="square" lIns="91440" tIns="50292" rIns="91440" bIns="50292" anchor="ctr"/>
           <a:lstStyle/>
           <a:p>
             <a:pPr algn="ctr"/>
@@ -4769,11 +5034,18 @@
                 <a:solidFill>
                   <a:srgbClr val="172033"/>
                 </a:solidFill>
-                <a:latin typeface="Microsoft YaHei"/>
-                <a:ea typeface="Microsoft YaHei"/>
+                <a:latin typeface="微软雅黑" panose="020B0503020204020204" charset="-122"/>
+                <a:ea typeface="微软雅黑" panose="020B0503020204020204" charset="-122"/>
               </a:rPr>
               <a:t>任务触发</a:t>
             </a:r>
+            <a:endParaRPr lang="zh-CN" sz="1000" b="1">
+              <a:solidFill>
+                <a:srgbClr val="172033"/>
+              </a:solidFill>
+              <a:latin typeface="微软雅黑" panose="020B0503020204020204" charset="-122"/>
+              <a:ea typeface="微软雅黑" panose="020B0503020204020204" charset="-122"/>
+            </a:endParaRPr>
           </a:p>
           <a:p>
             <a:pPr algn="ctr"/>
@@ -4782,11 +5054,18 @@
                 <a:solidFill>
                   <a:srgbClr val="172033"/>
                 </a:solidFill>
-                <a:latin typeface="Microsoft YaHei"/>
-                <a:ea typeface="Microsoft YaHei"/>
+                <a:latin typeface="微软雅黑" panose="020B0503020204020204" charset="-122"/>
+                <a:ea typeface="微软雅黑" panose="020B0503020204020204" charset="-122"/>
               </a:rPr>
               <a:t>显控请求</a:t>
             </a:r>
+            <a:endParaRPr lang="zh-CN" sz="800">
+              <a:solidFill>
+                <a:srgbClr val="172033"/>
+              </a:solidFill>
+              <a:latin typeface="微软雅黑" panose="020B0503020204020204" charset="-122"/>
+              <a:ea typeface="微软雅黑" panose="020B0503020204020204" charset="-122"/>
+            </a:endParaRPr>
           </a:p>
           <a:p>
             <a:pPr algn="ctr"/>
@@ -4795,11 +5074,18 @@
                 <a:solidFill>
                   <a:srgbClr val="172033"/>
                 </a:solidFill>
-                <a:latin typeface="Microsoft YaHei"/>
-                <a:ea typeface="Microsoft YaHei"/>
+                <a:latin typeface="微软雅黑" panose="020B0503020204020204" charset="-122"/>
+                <a:ea typeface="微软雅黑" panose="020B0503020204020204" charset="-122"/>
               </a:rPr>
               <a:t>感知事件</a:t>
             </a:r>
+            <a:endParaRPr lang="zh-CN" sz="800">
+              <a:solidFill>
+                <a:srgbClr val="172033"/>
+              </a:solidFill>
+              <a:latin typeface="微软雅黑" panose="020B0503020204020204" charset="-122"/>
+              <a:ea typeface="微软雅黑" panose="020B0503020204020204" charset="-122"/>
+            </a:endParaRPr>
           </a:p>
           <a:p>
             <a:pPr algn="ctr"/>
@@ -4808,11 +5094,18 @@
                 <a:solidFill>
                   <a:srgbClr val="172033"/>
                 </a:solidFill>
-                <a:latin typeface="Microsoft YaHei"/>
-                <a:ea typeface="Microsoft YaHei"/>
+                <a:latin typeface="微软雅黑" panose="020B0503020204020204" charset="-122"/>
+                <a:ea typeface="微软雅黑" panose="020B0503020204020204" charset="-122"/>
               </a:rPr>
               <a:t>状态告警</a:t>
             </a:r>
+            <a:endParaRPr lang="zh-CN" sz="800">
+              <a:solidFill>
+                <a:srgbClr val="172033"/>
+              </a:solidFill>
+              <a:latin typeface="微软雅黑" panose="020B0503020204020204" charset="-122"/>
+              <a:ea typeface="微软雅黑" panose="020B0503020204020204" charset="-122"/>
+            </a:endParaRPr>
           </a:p>
         </p:txBody>
       </p:sp>
@@ -4858,20 +5151,17 @@
           </a:ln>
         </p:spPr>
         <p:txBody>
-          <a:bodyPr wrap="square" anchor="mid" lIns="0" rIns="0" tIns="0" bIns="0"/>
-          <a:lstStyle/>
-          <a:p>
-            <a:pPr algn="ctr"/>
-            <a:r>
-              <a:rPr lang="zh-CN" sz="1000" b="1">
-                <a:solidFill>
-                  <a:srgbClr val="172033"/>
-                </a:solidFill>
-                <a:latin typeface="Microsoft YaHei"/>
-                <a:ea typeface="Microsoft YaHei"/>
-              </a:rPr>
-              <a:t>任务触发</a:t>
-            </a:r>
+          <a:bodyPr wrap="square" lIns="0" tIns="0" rIns="0" bIns="0" anchor="ctr"/>
+          <a:lstStyle/>
+          <a:p>
+            <a:pPr algn="ctr"/>
+            <a:endParaRPr lang="zh-CN" sz="1000" b="1">
+              <a:solidFill>
+                <a:srgbClr val="172033"/>
+              </a:solidFill>
+              <a:latin typeface="微软雅黑" panose="020B0503020204020204" charset="-122"/>
+              <a:ea typeface="微软雅黑" panose="020B0503020204020204" charset="-122"/>
+            </a:endParaRPr>
           </a:p>
         </p:txBody>
       </p:sp>
@@ -4922,7 +5212,7 @@
           </a:ln>
         </p:spPr>
         <p:txBody>
-          <a:bodyPr wrap="square" anchor="mid" lIns="91440" rIns="91440" tIns="50292" bIns="50292"/>
+          <a:bodyPr wrap="square" lIns="91440" tIns="50292" rIns="91440" bIns="50292" anchor="ctr"/>
           <a:lstStyle/>
           <a:p>
             <a:pPr algn="ctr"/>
@@ -4931,11 +5221,18 @@
                 <a:solidFill>
                   <a:srgbClr val="172033"/>
                 </a:solidFill>
-                <a:latin typeface="Microsoft YaHei"/>
-                <a:ea typeface="Microsoft YaHei"/>
+                <a:latin typeface="微软雅黑" panose="020B0503020204020204" charset="-122"/>
+                <a:ea typeface="微软雅黑" panose="020B0503020204020204" charset="-122"/>
               </a:rPr>
               <a:t>创建任务实例</a:t>
             </a:r>
+            <a:endParaRPr lang="zh-CN" sz="1000" b="1">
+              <a:solidFill>
+                <a:srgbClr val="172033"/>
+              </a:solidFill>
+              <a:latin typeface="微软雅黑" panose="020B0503020204020204" charset="-122"/>
+              <a:ea typeface="微软雅黑" panose="020B0503020204020204" charset="-122"/>
+            </a:endParaRPr>
           </a:p>
           <a:p>
             <a:pPr algn="ctr"/>
@@ -4944,11 +5241,18 @@
                 <a:solidFill>
                   <a:srgbClr val="172033"/>
                 </a:solidFill>
-                <a:latin typeface="Microsoft YaHei"/>
-                <a:ea typeface="Microsoft YaHei"/>
+                <a:latin typeface="微软雅黑" panose="020B0503020204020204" charset="-122"/>
+                <a:ea typeface="微软雅黑" panose="020B0503020204020204" charset="-122"/>
               </a:rPr>
               <a:t>任务编号</a:t>
             </a:r>
+            <a:endParaRPr lang="zh-CN" sz="800">
+              <a:solidFill>
+                <a:srgbClr val="172033"/>
+              </a:solidFill>
+              <a:latin typeface="微软雅黑" panose="020B0503020204020204" charset="-122"/>
+              <a:ea typeface="微软雅黑" panose="020B0503020204020204" charset="-122"/>
+            </a:endParaRPr>
           </a:p>
           <a:p>
             <a:pPr algn="ctr"/>
@@ -4957,11 +5261,18 @@
                 <a:solidFill>
                   <a:srgbClr val="172033"/>
                 </a:solidFill>
-                <a:latin typeface="Microsoft YaHei"/>
-                <a:ea typeface="Microsoft YaHei"/>
+                <a:latin typeface="微软雅黑" panose="020B0503020204020204" charset="-122"/>
+                <a:ea typeface="微软雅黑" panose="020B0503020204020204" charset="-122"/>
               </a:rPr>
               <a:t>对象引用</a:t>
             </a:r>
+            <a:endParaRPr lang="zh-CN" sz="800">
+              <a:solidFill>
+                <a:srgbClr val="172033"/>
+              </a:solidFill>
+              <a:latin typeface="微软雅黑" panose="020B0503020204020204" charset="-122"/>
+              <a:ea typeface="微软雅黑" panose="020B0503020204020204" charset="-122"/>
+            </a:endParaRPr>
           </a:p>
           <a:p>
             <a:pPr algn="ctr"/>
@@ -4970,11 +5281,18 @@
                 <a:solidFill>
                   <a:srgbClr val="172033"/>
                 </a:solidFill>
-                <a:latin typeface="Microsoft YaHei"/>
-                <a:ea typeface="Microsoft YaHei"/>
+                <a:latin typeface="微软雅黑" panose="020B0503020204020204" charset="-122"/>
+                <a:ea typeface="微软雅黑" panose="020B0503020204020204" charset="-122"/>
               </a:rPr>
               <a:t>风险等级</a:t>
             </a:r>
+            <a:endParaRPr lang="zh-CN" sz="800">
+              <a:solidFill>
+                <a:srgbClr val="172033"/>
+              </a:solidFill>
+              <a:latin typeface="微软雅黑" panose="020B0503020204020204" charset="-122"/>
+              <a:ea typeface="微软雅黑" panose="020B0503020204020204" charset="-122"/>
+            </a:endParaRPr>
           </a:p>
         </p:txBody>
       </p:sp>
@@ -5020,20 +5338,17 @@
           </a:ln>
         </p:spPr>
         <p:txBody>
-          <a:bodyPr wrap="square" anchor="mid" lIns="0" rIns="0" tIns="0" bIns="0"/>
-          <a:lstStyle/>
-          <a:p>
-            <a:pPr algn="ctr"/>
-            <a:r>
-              <a:rPr lang="zh-CN" sz="1000" b="1">
-                <a:solidFill>
-                  <a:srgbClr val="172033"/>
-                </a:solidFill>
-                <a:latin typeface="Microsoft YaHei"/>
-                <a:ea typeface="Microsoft YaHei"/>
-              </a:rPr>
-              <a:t>创建任务实例</a:t>
-            </a:r>
+          <a:bodyPr wrap="square" lIns="0" tIns="0" rIns="0" bIns="0" anchor="ctr"/>
+          <a:lstStyle/>
+          <a:p>
+            <a:pPr algn="ctr"/>
+            <a:endParaRPr lang="zh-CN" sz="1000" b="1">
+              <a:solidFill>
+                <a:srgbClr val="172033"/>
+              </a:solidFill>
+              <a:latin typeface="微软雅黑" panose="020B0503020204020204" charset="-122"/>
+              <a:ea typeface="微软雅黑" panose="020B0503020204020204" charset="-122"/>
+            </a:endParaRPr>
           </a:p>
         </p:txBody>
       </p:sp>
@@ -5084,7 +5399,7 @@
           </a:ln>
         </p:spPr>
         <p:txBody>
-          <a:bodyPr wrap="square" anchor="mid" lIns="91440" rIns="91440" tIns="50292" bIns="50292"/>
+          <a:bodyPr wrap="square" lIns="91440" tIns="50292" rIns="91440" bIns="50292" anchor="ctr"/>
           <a:lstStyle/>
           <a:p>
             <a:pPr algn="ctr"/>
@@ -5093,11 +5408,18 @@
                 <a:solidFill>
                   <a:srgbClr val="172033"/>
                 </a:solidFill>
-                <a:latin typeface="Microsoft YaHei"/>
-                <a:ea typeface="Microsoft YaHei"/>
+                <a:latin typeface="微软雅黑" panose="020B0503020204020204" charset="-122"/>
+                <a:ea typeface="微软雅黑" panose="020B0503020204020204" charset="-122"/>
               </a:rPr>
               <a:t>上下文装载</a:t>
             </a:r>
+            <a:endParaRPr lang="zh-CN" sz="1000" b="1">
+              <a:solidFill>
+                <a:srgbClr val="172033"/>
+              </a:solidFill>
+              <a:latin typeface="微软雅黑" panose="020B0503020204020204" charset="-122"/>
+              <a:ea typeface="微软雅黑" panose="020B0503020204020204" charset="-122"/>
+            </a:endParaRPr>
           </a:p>
           <a:p>
             <a:pPr algn="ctr"/>
@@ -5106,11 +5428,18 @@
                 <a:solidFill>
                   <a:srgbClr val="172033"/>
                 </a:solidFill>
-                <a:latin typeface="Microsoft YaHei"/>
-                <a:ea typeface="Microsoft YaHei"/>
+                <a:latin typeface="微软雅黑" panose="020B0503020204020204" charset="-122"/>
+                <a:ea typeface="微软雅黑" panose="020B0503020204020204" charset="-122"/>
               </a:rPr>
               <a:t>感知证据</a:t>
             </a:r>
+            <a:endParaRPr lang="zh-CN" sz="800">
+              <a:solidFill>
+                <a:srgbClr val="172033"/>
+              </a:solidFill>
+              <a:latin typeface="微软雅黑" panose="020B0503020204020204" charset="-122"/>
+              <a:ea typeface="微软雅黑" panose="020B0503020204020204" charset="-122"/>
+            </a:endParaRPr>
           </a:p>
           <a:p>
             <a:pPr algn="ctr"/>
@@ -5119,11 +5448,18 @@
                 <a:solidFill>
                   <a:srgbClr val="172033"/>
                 </a:solidFill>
-                <a:latin typeface="Microsoft YaHei"/>
-                <a:ea typeface="Microsoft YaHei"/>
+                <a:latin typeface="微软雅黑" panose="020B0503020204020204" charset="-122"/>
+                <a:ea typeface="微软雅黑" panose="020B0503020204020204" charset="-122"/>
               </a:rPr>
               <a:t>雷达状态</a:t>
             </a:r>
+            <a:endParaRPr lang="zh-CN" sz="800">
+              <a:solidFill>
+                <a:srgbClr val="172033"/>
+              </a:solidFill>
+              <a:latin typeface="微软雅黑" panose="020B0503020204020204" charset="-122"/>
+              <a:ea typeface="微软雅黑" panose="020B0503020204020204" charset="-122"/>
+            </a:endParaRPr>
           </a:p>
           <a:p>
             <a:pPr algn="ctr"/>
@@ -5132,11 +5468,18 @@
                 <a:solidFill>
                   <a:srgbClr val="172033"/>
                 </a:solidFill>
-                <a:latin typeface="Microsoft YaHei"/>
-                <a:ea typeface="Microsoft YaHei"/>
+                <a:latin typeface="微软雅黑" panose="020B0503020204020204" charset="-122"/>
+                <a:ea typeface="微软雅黑" panose="020B0503020204020204" charset="-122"/>
               </a:rPr>
               <a:t>历史引用</a:t>
             </a:r>
+            <a:endParaRPr lang="zh-CN" sz="800">
+              <a:solidFill>
+                <a:srgbClr val="172033"/>
+              </a:solidFill>
+              <a:latin typeface="微软雅黑" panose="020B0503020204020204" charset="-122"/>
+              <a:ea typeface="微软雅黑" panose="020B0503020204020204" charset="-122"/>
+            </a:endParaRPr>
           </a:p>
         </p:txBody>
       </p:sp>
@@ -5182,20 +5525,17 @@
           </a:ln>
         </p:spPr>
         <p:txBody>
-          <a:bodyPr wrap="square" anchor="mid" lIns="0" rIns="0" tIns="0" bIns="0"/>
-          <a:lstStyle/>
-          <a:p>
-            <a:pPr algn="ctr"/>
-            <a:r>
-              <a:rPr lang="zh-CN" sz="1000" b="1">
-                <a:solidFill>
-                  <a:srgbClr val="172033"/>
-                </a:solidFill>
-                <a:latin typeface="Microsoft YaHei"/>
-                <a:ea typeface="Microsoft YaHei"/>
-              </a:rPr>
-              <a:t>上下文装载</a:t>
-            </a:r>
+          <a:bodyPr wrap="square" lIns="0" tIns="0" rIns="0" bIns="0" anchor="ctr"/>
+          <a:lstStyle/>
+          <a:p>
+            <a:pPr algn="ctr"/>
+            <a:endParaRPr lang="zh-CN" sz="1000" b="1">
+              <a:solidFill>
+                <a:srgbClr val="172033"/>
+              </a:solidFill>
+              <a:latin typeface="微软雅黑" panose="020B0503020204020204" charset="-122"/>
+              <a:ea typeface="微软雅黑" panose="020B0503020204020204" charset="-122"/>
+            </a:endParaRPr>
           </a:p>
         </p:txBody>
       </p:sp>
@@ -5246,7 +5586,7 @@
           </a:ln>
         </p:spPr>
         <p:txBody>
-          <a:bodyPr wrap="square" anchor="mid" lIns="91440" rIns="91440" tIns="50292" bIns="50292"/>
+          <a:bodyPr wrap="square" lIns="91440" tIns="50292" rIns="91440" bIns="50292" anchor="ctr"/>
           <a:lstStyle/>
           <a:p>
             <a:pPr algn="ctr"/>
@@ -5255,11 +5595,18 @@
                 <a:solidFill>
                   <a:srgbClr val="172033"/>
                 </a:solidFill>
-                <a:latin typeface="Microsoft YaHei"/>
-                <a:ea typeface="Microsoft YaHei"/>
+                <a:latin typeface="微软雅黑" panose="020B0503020204020204" charset="-122"/>
+                <a:ea typeface="微软雅黑" panose="020B0503020204020204" charset="-122"/>
               </a:rPr>
               <a:t>意图理解</a:t>
             </a:r>
+            <a:endParaRPr lang="zh-CN" sz="1000" b="1">
+              <a:solidFill>
+                <a:srgbClr val="172033"/>
+              </a:solidFill>
+              <a:latin typeface="微软雅黑" panose="020B0503020204020204" charset="-122"/>
+              <a:ea typeface="微软雅黑" panose="020B0503020204020204" charset="-122"/>
+            </a:endParaRPr>
           </a:p>
           <a:p>
             <a:pPr algn="ctr"/>
@@ -5268,11 +5615,18 @@
                 <a:solidFill>
                   <a:srgbClr val="172033"/>
                 </a:solidFill>
-                <a:latin typeface="Microsoft YaHei"/>
-                <a:ea typeface="Microsoft YaHei"/>
+                <a:latin typeface="微软雅黑" panose="020B0503020204020204" charset="-122"/>
+                <a:ea typeface="微软雅黑" panose="020B0503020204020204" charset="-122"/>
               </a:rPr>
               <a:t>任务目标</a:t>
             </a:r>
+            <a:endParaRPr lang="zh-CN" sz="800">
+              <a:solidFill>
+                <a:srgbClr val="172033"/>
+              </a:solidFill>
+              <a:latin typeface="微软雅黑" panose="020B0503020204020204" charset="-122"/>
+              <a:ea typeface="微软雅黑" panose="020B0503020204020204" charset="-122"/>
+            </a:endParaRPr>
           </a:p>
           <a:p>
             <a:pPr algn="ctr"/>
@@ -5281,11 +5635,18 @@
                 <a:solidFill>
                   <a:srgbClr val="172033"/>
                 </a:solidFill>
-                <a:latin typeface="Microsoft YaHei"/>
-                <a:ea typeface="Microsoft YaHei"/>
+                <a:latin typeface="微软雅黑" panose="020B0503020204020204" charset="-122"/>
+                <a:ea typeface="微软雅黑" panose="020B0503020204020204" charset="-122"/>
               </a:rPr>
               <a:t>约束条件</a:t>
             </a:r>
+            <a:endParaRPr lang="zh-CN" sz="800">
+              <a:solidFill>
+                <a:srgbClr val="172033"/>
+              </a:solidFill>
+              <a:latin typeface="微软雅黑" panose="020B0503020204020204" charset="-122"/>
+              <a:ea typeface="微软雅黑" panose="020B0503020204020204" charset="-122"/>
+            </a:endParaRPr>
           </a:p>
           <a:p>
             <a:pPr algn="ctr"/>
@@ -5294,11 +5655,18 @@
                 <a:solidFill>
                   <a:srgbClr val="172033"/>
                 </a:solidFill>
-                <a:latin typeface="Microsoft YaHei"/>
-                <a:ea typeface="Microsoft YaHei"/>
+                <a:latin typeface="微软雅黑" panose="020B0503020204020204" charset="-122"/>
+                <a:ea typeface="微软雅黑" panose="020B0503020204020204" charset="-122"/>
               </a:rPr>
               <a:t>输出要求</a:t>
             </a:r>
+            <a:endParaRPr lang="zh-CN" sz="800">
+              <a:solidFill>
+                <a:srgbClr val="172033"/>
+              </a:solidFill>
+              <a:latin typeface="微软雅黑" panose="020B0503020204020204" charset="-122"/>
+              <a:ea typeface="微软雅黑" panose="020B0503020204020204" charset="-122"/>
+            </a:endParaRPr>
           </a:p>
         </p:txBody>
       </p:sp>
@@ -5344,20 +5712,17 @@
           </a:ln>
         </p:spPr>
         <p:txBody>
-          <a:bodyPr wrap="square" anchor="mid" lIns="0" rIns="0" tIns="0" bIns="0"/>
-          <a:lstStyle/>
-          <a:p>
-            <a:pPr algn="ctr"/>
-            <a:r>
-              <a:rPr lang="zh-CN" sz="1000" b="1">
-                <a:solidFill>
-                  <a:srgbClr val="172033"/>
-                </a:solidFill>
-                <a:latin typeface="Microsoft YaHei"/>
-                <a:ea typeface="Microsoft YaHei"/>
-              </a:rPr>
-              <a:t>意图理解</a:t>
-            </a:r>
+          <a:bodyPr wrap="square" lIns="0" tIns="0" rIns="0" bIns="0" anchor="ctr"/>
+          <a:lstStyle/>
+          <a:p>
+            <a:pPr algn="ctr"/>
+            <a:endParaRPr lang="zh-CN" sz="1000" b="1">
+              <a:solidFill>
+                <a:srgbClr val="172033"/>
+              </a:solidFill>
+              <a:latin typeface="微软雅黑" panose="020B0503020204020204" charset="-122"/>
+              <a:ea typeface="微软雅黑" panose="020B0503020204020204" charset="-122"/>
+            </a:endParaRPr>
           </a:p>
         </p:txBody>
       </p:sp>
@@ -5408,7 +5773,7 @@
           </a:ln>
         </p:spPr>
         <p:txBody>
-          <a:bodyPr wrap="square" anchor="mid" lIns="91440" rIns="91440" tIns="50292" bIns="50292"/>
+          <a:bodyPr wrap="square" lIns="91440" tIns="50292" rIns="91440" bIns="50292" anchor="ctr"/>
           <a:lstStyle/>
           <a:p>
             <a:pPr algn="ctr"/>
@@ -5417,11 +5782,18 @@
                 <a:solidFill>
                   <a:srgbClr val="172033"/>
                 </a:solidFill>
-                <a:latin typeface="Microsoft YaHei"/>
-                <a:ea typeface="Microsoft YaHei"/>
+                <a:latin typeface="微软雅黑" panose="020B0503020204020204" charset="-122"/>
+                <a:ea typeface="微软雅黑" panose="020B0503020204020204" charset="-122"/>
               </a:rPr>
               <a:t>路径选择</a:t>
             </a:r>
+            <a:endParaRPr lang="zh-CN" sz="1000" b="1">
+              <a:solidFill>
+                <a:srgbClr val="172033"/>
+              </a:solidFill>
+              <a:latin typeface="微软雅黑" panose="020B0503020204020204" charset="-122"/>
+              <a:ea typeface="微软雅黑" panose="020B0503020204020204" charset="-122"/>
+            </a:endParaRPr>
           </a:p>
           <a:p>
             <a:pPr algn="ctr"/>
@@ -5430,11 +5802,18 @@
                 <a:solidFill>
                   <a:srgbClr val="172033"/>
                 </a:solidFill>
-                <a:latin typeface="Microsoft YaHei"/>
-                <a:ea typeface="Microsoft YaHei"/>
+                <a:latin typeface="微软雅黑" panose="020B0503020204020204" charset="-122"/>
+                <a:ea typeface="微软雅黑" panose="020B0503020204020204" charset="-122"/>
               </a:rPr>
               <a:t>能力包</a:t>
             </a:r>
+            <a:endParaRPr lang="zh-CN" sz="800">
+              <a:solidFill>
+                <a:srgbClr val="172033"/>
+              </a:solidFill>
+              <a:latin typeface="微软雅黑" panose="020B0503020204020204" charset="-122"/>
+              <a:ea typeface="微软雅黑" panose="020B0503020204020204" charset="-122"/>
+            </a:endParaRPr>
           </a:p>
           <a:p>
             <a:pPr algn="ctr"/>
@@ -5443,11 +5822,18 @@
                 <a:solidFill>
                   <a:srgbClr val="172033"/>
                 </a:solidFill>
-                <a:latin typeface="Microsoft YaHei"/>
-                <a:ea typeface="Microsoft YaHei"/>
+                <a:latin typeface="微软雅黑" panose="020B0503020204020204" charset="-122"/>
+                <a:ea typeface="微软雅黑" panose="020B0503020204020204" charset="-122"/>
               </a:rPr>
               <a:t>工具清单</a:t>
             </a:r>
+            <a:endParaRPr lang="zh-CN" sz="800">
+              <a:solidFill>
+                <a:srgbClr val="172033"/>
+              </a:solidFill>
+              <a:latin typeface="微软雅黑" panose="020B0503020204020204" charset="-122"/>
+              <a:ea typeface="微软雅黑" panose="020B0503020204020204" charset="-122"/>
+            </a:endParaRPr>
           </a:p>
           <a:p>
             <a:pPr algn="ctr"/>
@@ -5456,11 +5842,18 @@
                 <a:solidFill>
                   <a:srgbClr val="172033"/>
                 </a:solidFill>
-                <a:latin typeface="Microsoft YaHei"/>
-                <a:ea typeface="Microsoft YaHei"/>
+                <a:latin typeface="微软雅黑" panose="020B0503020204020204" charset="-122"/>
+                <a:ea typeface="微软雅黑" panose="020B0503020204020204" charset="-122"/>
               </a:rPr>
               <a:t>风险分级</a:t>
             </a:r>
+            <a:endParaRPr lang="zh-CN" sz="800">
+              <a:solidFill>
+                <a:srgbClr val="172033"/>
+              </a:solidFill>
+              <a:latin typeface="微软雅黑" panose="020B0503020204020204" charset="-122"/>
+              <a:ea typeface="微软雅黑" panose="020B0503020204020204" charset="-122"/>
+            </a:endParaRPr>
           </a:p>
         </p:txBody>
       </p:sp>
@@ -5506,20 +5899,17 @@
           </a:ln>
         </p:spPr>
         <p:txBody>
-          <a:bodyPr wrap="square" anchor="mid" lIns="0" rIns="0" tIns="0" bIns="0"/>
-          <a:lstStyle/>
-          <a:p>
-            <a:pPr algn="ctr"/>
-            <a:r>
-              <a:rPr lang="zh-CN" sz="1000" b="1">
-                <a:solidFill>
-                  <a:srgbClr val="172033"/>
-                </a:solidFill>
-                <a:latin typeface="Microsoft YaHei"/>
-                <a:ea typeface="Microsoft YaHei"/>
-              </a:rPr>
-              <a:t>路径选择</a:t>
-            </a:r>
+          <a:bodyPr wrap="square" lIns="0" tIns="0" rIns="0" bIns="0" anchor="ctr"/>
+          <a:lstStyle/>
+          <a:p>
+            <a:pPr algn="ctr"/>
+            <a:endParaRPr lang="zh-CN" sz="1000" b="1">
+              <a:solidFill>
+                <a:srgbClr val="172033"/>
+              </a:solidFill>
+              <a:latin typeface="微软雅黑" panose="020B0503020204020204" charset="-122"/>
+              <a:ea typeface="微软雅黑" panose="020B0503020204020204" charset="-122"/>
+            </a:endParaRPr>
           </a:p>
         </p:txBody>
       </p:sp>
@@ -5570,7 +5960,7 @@
           </a:ln>
         </p:spPr>
         <p:txBody>
-          <a:bodyPr wrap="square" anchor="mid" lIns="91440" rIns="91440" tIns="50292" bIns="50292"/>
+          <a:bodyPr wrap="square" lIns="91440" tIns="50292" rIns="91440" bIns="50292" anchor="ctr"/>
           <a:lstStyle/>
           <a:p>
             <a:pPr algn="ctr"/>
@@ -5579,11 +5969,18 @@
                 <a:solidFill>
                   <a:srgbClr val="172033"/>
                 </a:solidFill>
-                <a:latin typeface="Microsoft YaHei"/>
-                <a:ea typeface="Microsoft YaHei"/>
+                <a:latin typeface="微软雅黑" panose="020B0503020204020204" charset="-122"/>
+                <a:ea typeface="微软雅黑" panose="020B0503020204020204" charset="-122"/>
               </a:rPr>
               <a:t>结果发布</a:t>
             </a:r>
+            <a:endParaRPr lang="zh-CN" sz="1000" b="1">
+              <a:solidFill>
+                <a:srgbClr val="172033"/>
+              </a:solidFill>
+              <a:latin typeface="微软雅黑" panose="020B0503020204020204" charset="-122"/>
+              <a:ea typeface="微软雅黑" panose="020B0503020204020204" charset="-122"/>
+            </a:endParaRPr>
           </a:p>
           <a:p>
             <a:pPr algn="ctr"/>
@@ -5592,11 +5989,18 @@
                 <a:solidFill>
                   <a:srgbClr val="172033"/>
                 </a:solidFill>
-                <a:latin typeface="Microsoft YaHei"/>
-                <a:ea typeface="Microsoft YaHei"/>
+                <a:latin typeface="微软雅黑" panose="020B0503020204020204" charset="-122"/>
+                <a:ea typeface="微软雅黑" panose="020B0503020204020204" charset="-122"/>
               </a:rPr>
               <a:t>研判摘要</a:t>
             </a:r>
+            <a:endParaRPr lang="zh-CN" sz="800">
+              <a:solidFill>
+                <a:srgbClr val="172033"/>
+              </a:solidFill>
+              <a:latin typeface="微软雅黑" panose="020B0503020204020204" charset="-122"/>
+              <a:ea typeface="微软雅黑" panose="020B0503020204020204" charset="-122"/>
+            </a:endParaRPr>
           </a:p>
           <a:p>
             <a:pPr algn="ctr"/>
@@ -5605,11 +6009,18 @@
                 <a:solidFill>
                   <a:srgbClr val="172033"/>
                 </a:solidFill>
-                <a:latin typeface="Microsoft YaHei"/>
-                <a:ea typeface="Microsoft YaHei"/>
+                <a:latin typeface="微软雅黑" panose="020B0503020204020204" charset="-122"/>
+                <a:ea typeface="微软雅黑" panose="020B0503020204020204" charset="-122"/>
               </a:rPr>
               <a:t>证据链</a:t>
             </a:r>
+            <a:endParaRPr lang="zh-CN" sz="800">
+              <a:solidFill>
+                <a:srgbClr val="172033"/>
+              </a:solidFill>
+              <a:latin typeface="微软雅黑" panose="020B0503020204020204" charset="-122"/>
+              <a:ea typeface="微软雅黑" panose="020B0503020204020204" charset="-122"/>
+            </a:endParaRPr>
           </a:p>
           <a:p>
             <a:pPr algn="ctr"/>
@@ -5618,11 +6029,18 @@
                 <a:solidFill>
                   <a:srgbClr val="172033"/>
                 </a:solidFill>
-                <a:latin typeface="Microsoft YaHei"/>
-                <a:ea typeface="Microsoft YaHei"/>
+                <a:latin typeface="微软雅黑" panose="020B0503020204020204" charset="-122"/>
+                <a:ea typeface="微软雅黑" panose="020B0503020204020204" charset="-122"/>
               </a:rPr>
               <a:t>流程状态</a:t>
             </a:r>
+            <a:endParaRPr lang="zh-CN" sz="800">
+              <a:solidFill>
+                <a:srgbClr val="172033"/>
+              </a:solidFill>
+              <a:latin typeface="微软雅黑" panose="020B0503020204020204" charset="-122"/>
+              <a:ea typeface="微软雅黑" panose="020B0503020204020204" charset="-122"/>
+            </a:endParaRPr>
           </a:p>
         </p:txBody>
       </p:sp>
@@ -5668,20 +6086,17 @@
           </a:ln>
         </p:spPr>
         <p:txBody>
-          <a:bodyPr wrap="square" anchor="mid" lIns="0" rIns="0" tIns="0" bIns="0"/>
-          <a:lstStyle/>
-          <a:p>
-            <a:pPr algn="ctr"/>
-            <a:r>
-              <a:rPr lang="zh-CN" sz="1000" b="1">
-                <a:solidFill>
-                  <a:srgbClr val="172033"/>
-                </a:solidFill>
-                <a:latin typeface="Microsoft YaHei"/>
-                <a:ea typeface="Microsoft YaHei"/>
-              </a:rPr>
-              <a:t>结果发布</a:t>
-            </a:r>
+          <a:bodyPr wrap="square" lIns="0" tIns="0" rIns="0" bIns="0" anchor="ctr"/>
+          <a:lstStyle/>
+          <a:p>
+            <a:pPr algn="ctr"/>
+            <a:endParaRPr lang="zh-CN" sz="1000" b="1">
+              <a:solidFill>
+                <a:srgbClr val="172033"/>
+              </a:solidFill>
+              <a:latin typeface="微软雅黑" panose="020B0503020204020204" charset="-122"/>
+              <a:ea typeface="微软雅黑" panose="020B0503020204020204" charset="-122"/>
+            </a:endParaRPr>
           </a:p>
         </p:txBody>
       </p:sp>
@@ -5732,7 +6147,7 @@
           </a:ln>
         </p:spPr>
         <p:txBody>
-          <a:bodyPr wrap="square" anchor="mid" lIns="91440" rIns="91440" tIns="50292" bIns="50292"/>
+          <a:bodyPr wrap="square" lIns="91440" tIns="50292" rIns="91440" bIns="50292" anchor="ctr"/>
           <a:lstStyle/>
           <a:p>
             <a:pPr algn="ctr"/>
@@ -5741,11 +6156,18 @@
                 <a:solidFill>
                   <a:srgbClr val="172033"/>
                 </a:solidFill>
-                <a:latin typeface="Microsoft YaHei"/>
-                <a:ea typeface="Microsoft YaHei"/>
+                <a:latin typeface="微软雅黑" panose="020B0503020204020204" charset="-122"/>
+                <a:ea typeface="微软雅黑" panose="020B0503020204020204" charset="-122"/>
               </a:rPr>
               <a:t>追溯记忆</a:t>
             </a:r>
+            <a:endParaRPr lang="zh-CN" sz="1000" b="1">
+              <a:solidFill>
+                <a:srgbClr val="172033"/>
+              </a:solidFill>
+              <a:latin typeface="微软雅黑" panose="020B0503020204020204" charset="-122"/>
+              <a:ea typeface="微软雅黑" panose="020B0503020204020204" charset="-122"/>
+            </a:endParaRPr>
           </a:p>
           <a:p>
             <a:pPr algn="ctr"/>
@@ -5754,11 +6176,18 @@
                 <a:solidFill>
                   <a:srgbClr val="172033"/>
                 </a:solidFill>
-                <a:latin typeface="Microsoft YaHei"/>
-                <a:ea typeface="Microsoft YaHei"/>
+                <a:latin typeface="微软雅黑" panose="020B0503020204020204" charset="-122"/>
+                <a:ea typeface="微软雅黑" panose="020B0503020204020204" charset="-122"/>
               </a:rPr>
               <a:t>上下文快照</a:t>
             </a:r>
+            <a:endParaRPr lang="zh-CN" sz="800">
+              <a:solidFill>
+                <a:srgbClr val="172033"/>
+              </a:solidFill>
+              <a:latin typeface="微软雅黑" panose="020B0503020204020204" charset="-122"/>
+              <a:ea typeface="微软雅黑" panose="020B0503020204020204" charset="-122"/>
+            </a:endParaRPr>
           </a:p>
           <a:p>
             <a:pPr algn="ctr"/>
@@ -5767,11 +6196,18 @@
                 <a:solidFill>
                   <a:srgbClr val="172033"/>
                 </a:solidFill>
-                <a:latin typeface="Microsoft YaHei"/>
-                <a:ea typeface="Microsoft YaHei"/>
+                <a:latin typeface="微软雅黑" panose="020B0503020204020204" charset="-122"/>
+                <a:ea typeface="微软雅黑" panose="020B0503020204020204" charset="-122"/>
               </a:rPr>
               <a:t>工具/审批</a:t>
             </a:r>
+            <a:endParaRPr lang="zh-CN" sz="800">
+              <a:solidFill>
+                <a:srgbClr val="172033"/>
+              </a:solidFill>
+              <a:latin typeface="微软雅黑" panose="020B0503020204020204" charset="-122"/>
+              <a:ea typeface="微软雅黑" panose="020B0503020204020204" charset="-122"/>
+            </a:endParaRPr>
           </a:p>
           <a:p>
             <a:pPr algn="ctr"/>
@@ -5780,11 +6216,18 @@
                 <a:solidFill>
                   <a:srgbClr val="172033"/>
                 </a:solidFill>
-                <a:latin typeface="Microsoft YaHei"/>
-                <a:ea typeface="Microsoft YaHei"/>
+                <a:latin typeface="微软雅黑" panose="020B0503020204020204" charset="-122"/>
+                <a:ea typeface="微软雅黑" panose="020B0503020204020204" charset="-122"/>
               </a:rPr>
               <a:t>经验候选</a:t>
             </a:r>
+            <a:endParaRPr lang="zh-CN" sz="800">
+              <a:solidFill>
+                <a:srgbClr val="172033"/>
+              </a:solidFill>
+              <a:latin typeface="微软雅黑" panose="020B0503020204020204" charset="-122"/>
+              <a:ea typeface="微软雅黑" panose="020B0503020204020204" charset="-122"/>
+            </a:endParaRPr>
           </a:p>
         </p:txBody>
       </p:sp>
@@ -5818,7 +6261,7 @@
         </p:nvSpPr>
         <p:spPr>
           <a:xfrm>
-            <a:off x="10881360" y="2240280"/>
+            <a:off x="10881360" y="2221865"/>
             <a:ext cx="932688" cy="256032"/>
           </a:xfrm>
           <a:prstGeom prst="rect">
@@ -5830,20 +6273,17 @@
           </a:ln>
         </p:spPr>
         <p:txBody>
-          <a:bodyPr wrap="square" anchor="mid" lIns="0" rIns="0" tIns="0" bIns="0"/>
-          <a:lstStyle/>
-          <a:p>
-            <a:pPr algn="ctr"/>
-            <a:r>
-              <a:rPr lang="zh-CN" sz="1000" b="1">
-                <a:solidFill>
-                  <a:srgbClr val="172033"/>
-                </a:solidFill>
-                <a:latin typeface="Microsoft YaHei"/>
-                <a:ea typeface="Microsoft YaHei"/>
-              </a:rPr>
-              <a:t>追溯记忆</a:t>
-            </a:r>
+          <a:bodyPr wrap="square" lIns="0" tIns="0" rIns="0" bIns="0" anchor="ctr"/>
+          <a:lstStyle/>
+          <a:p>
+            <a:pPr algn="ctr"/>
+            <a:endParaRPr lang="zh-CN" sz="1000" b="1">
+              <a:solidFill>
+                <a:srgbClr val="172033"/>
+              </a:solidFill>
+              <a:latin typeface="微软雅黑" panose="020B0503020204020204" charset="-122"/>
+              <a:ea typeface="微软雅黑" panose="020B0503020204020204" charset="-122"/>
+            </a:endParaRPr>
           </a:p>
         </p:txBody>
       </p:sp>
@@ -5855,7 +6295,7 @@
         </p:nvSpPr>
         <p:spPr>
           <a:xfrm>
-            <a:off x="6903720" y="4498848"/>
+            <a:off x="7543800" y="3931793"/>
             <a:ext cx="1874520" cy="621792"/>
           </a:xfrm>
           <a:prstGeom prst="roundRect">
@@ -5871,7 +6311,7 @@
           </a:ln>
         </p:spPr>
         <p:txBody>
-          <a:bodyPr wrap="square" anchor="mid" lIns="91440" rIns="91440" tIns="50292" bIns="50292"/>
+          <a:bodyPr wrap="square" lIns="91440" tIns="50292" rIns="91440" bIns="50292" anchor="ctr"/>
           <a:lstStyle/>
           <a:p>
             <a:pPr algn="ctr"/>
@@ -5880,11 +6320,18 @@
                 <a:solidFill>
                   <a:srgbClr val="172033"/>
                 </a:solidFill>
-                <a:latin typeface="Microsoft YaHei"/>
-                <a:ea typeface="Microsoft YaHei"/>
+                <a:latin typeface="微软雅黑" panose="020B0503020204020204" charset="-122"/>
+                <a:ea typeface="微软雅黑" panose="020B0503020204020204" charset="-122"/>
               </a:rPr>
               <a:t>低风险路径</a:t>
             </a:r>
+            <a:endParaRPr lang="zh-CN" sz="1300" b="1">
+              <a:solidFill>
+                <a:srgbClr val="172033"/>
+              </a:solidFill>
+              <a:latin typeface="微软雅黑" panose="020B0503020204020204" charset="-122"/>
+              <a:ea typeface="微软雅黑" panose="020B0503020204020204" charset="-122"/>
+            </a:endParaRPr>
           </a:p>
           <a:p>
             <a:pPr algn="ctr"/>
@@ -5893,11 +6340,18 @@
                 <a:solidFill>
                   <a:srgbClr val="172033"/>
                 </a:solidFill>
-                <a:latin typeface="Microsoft YaHei"/>
-                <a:ea typeface="Microsoft YaHei"/>
+                <a:latin typeface="微软雅黑" panose="020B0503020204020204" charset="-122"/>
+                <a:ea typeface="微软雅黑" panose="020B0503020204020204" charset="-122"/>
               </a:rPr>
               <a:t>ReAct 工具调用</a:t>
             </a:r>
+            <a:endParaRPr lang="zh-CN" sz="1100">
+              <a:solidFill>
+                <a:srgbClr val="172033"/>
+              </a:solidFill>
+              <a:latin typeface="微软雅黑" panose="020B0503020204020204" charset="-122"/>
+              <a:ea typeface="微软雅黑" panose="020B0503020204020204" charset="-122"/>
+            </a:endParaRPr>
           </a:p>
         </p:txBody>
       </p:sp>
@@ -5925,7 +6379,7 @@
           </a:ln>
         </p:spPr>
         <p:txBody>
-          <a:bodyPr wrap="square" anchor="mid" lIns="91440" rIns="91440" tIns="50292" bIns="50292"/>
+          <a:bodyPr wrap="square" lIns="91440" tIns="50292" rIns="91440" bIns="50292" anchor="ctr"/>
           <a:lstStyle/>
           <a:p>
             <a:pPr algn="ctr"/>
@@ -5934,11 +6388,18 @@
                 <a:solidFill>
                   <a:srgbClr val="172033"/>
                 </a:solidFill>
-                <a:latin typeface="Microsoft YaHei"/>
-                <a:ea typeface="Microsoft YaHei"/>
+                <a:latin typeface="微软雅黑" panose="020B0503020204020204" charset="-122"/>
+                <a:ea typeface="微软雅黑" panose="020B0503020204020204" charset="-122"/>
               </a:rPr>
               <a:t>高风险路径</a:t>
             </a:r>
+            <a:endParaRPr lang="zh-CN" sz="1300" b="1">
+              <a:solidFill>
+                <a:srgbClr val="172033"/>
+              </a:solidFill>
+              <a:latin typeface="微软雅黑" panose="020B0503020204020204" charset="-122"/>
+              <a:ea typeface="微软雅黑" panose="020B0503020204020204" charset="-122"/>
+            </a:endParaRPr>
           </a:p>
           <a:p>
             <a:pPr algn="ctr"/>
@@ -5947,11 +6408,18 @@
                 <a:solidFill>
                   <a:srgbClr val="172033"/>
                 </a:solidFill>
-                <a:latin typeface="Microsoft YaHei"/>
-                <a:ea typeface="Microsoft YaHei"/>
+                <a:latin typeface="微软雅黑" panose="020B0503020204020204" charset="-122"/>
+                <a:ea typeface="微软雅黑" panose="020B0503020204020204" charset="-122"/>
               </a:rPr>
               <a:t>受控工作流编排</a:t>
             </a:r>
+            <a:endParaRPr lang="zh-CN" sz="1100">
+              <a:solidFill>
+                <a:srgbClr val="172033"/>
+              </a:solidFill>
+              <a:latin typeface="微软雅黑" panose="020B0503020204020204" charset="-122"/>
+              <a:ea typeface="微软雅黑" panose="020B0503020204020204" charset="-122"/>
+            </a:endParaRPr>
           </a:p>
         </p:txBody>
       </p:sp>
@@ -5963,8 +6431,8 @@
         </p:nvSpPr>
         <p:spPr>
           <a:xfrm>
-            <a:off x="7708392" y="3941064"/>
-            <a:ext cx="137160" cy="557784"/>
+            <a:off x="7982585" y="2887345"/>
+            <a:ext cx="412115" cy="1083310"/>
           </a:xfrm>
           <a:prstGeom prst="line">
             <a:avLst/>
@@ -5986,8 +6454,8 @@
         </p:nvSpPr>
         <p:spPr>
           <a:xfrm>
-            <a:off x="7708392" y="3941064"/>
-            <a:ext cx="137160" cy="1380744"/>
+            <a:off x="7463790" y="2882900"/>
+            <a:ext cx="129540" cy="2439035"/>
           </a:xfrm>
           <a:prstGeom prst="line">
             <a:avLst/>
@@ -6025,7 +6493,7 @@
           </a:ln>
         </p:spPr>
         <p:txBody>
-          <a:bodyPr wrap="square" anchor="mid" lIns="91440" rIns="91440" tIns="50292" bIns="50292"/>
+          <a:bodyPr wrap="square" lIns="91440" tIns="50292" rIns="91440" bIns="50292" anchor="ctr"/>
           <a:lstStyle/>
           <a:p>
             <a:pPr algn="l"/>
@@ -6034,11 +6502,18 @@
                 <a:solidFill>
                   <a:srgbClr val="172033"/>
                 </a:solidFill>
-                <a:latin typeface="Microsoft YaHei"/>
-                <a:ea typeface="Microsoft YaHei"/>
+                <a:latin typeface="微软雅黑" panose="020B0503020204020204" charset="-122"/>
+                <a:ea typeface="微软雅黑" panose="020B0503020204020204" charset="-122"/>
               </a:rPr>
               <a:t>核心分流规则：目标解释、异常归因、报告生成等只读任务可动态调用工具；波形参数设置、工作模式切换、回滚恢复进入工作流模板。</a:t>
             </a:r>
+            <a:endParaRPr lang="zh-CN" sz="1200">
+              <a:solidFill>
+                <a:srgbClr val="172033"/>
+              </a:solidFill>
+              <a:latin typeface="微软雅黑" panose="020B0503020204020204" charset="-122"/>
+              <a:ea typeface="微软雅黑" panose="020B0503020204020204" charset="-122"/>
+            </a:endParaRPr>
           </a:p>
         </p:txBody>
       </p:sp>
@@ -6084,7 +6559,7 @@
           </a:ln>
         </p:spPr>
         <p:txBody>
-          <a:bodyPr wrap="square" anchor="mid" lIns="0" rIns="0" tIns="0" bIns="0"/>
+          <a:bodyPr wrap="square" lIns="0" tIns="0" rIns="0" bIns="0" anchor="ctr"/>
           <a:lstStyle/>
           <a:p>
             <a:pPr algn="r"/>
@@ -6093,11 +6568,18 @@
                 <a:solidFill>
                   <a:srgbClr val="64748B"/>
                 </a:solidFill>
-                <a:latin typeface="Microsoft YaHei"/>
-                <a:ea typeface="Microsoft YaHei"/>
+                <a:latin typeface="微软雅黑" panose="020B0503020204020204" charset="-122"/>
+                <a:ea typeface="微软雅黑" panose="020B0503020204020204" charset="-122"/>
               </a:rPr>
               <a:t>Source: 4.3.3.2 雷达智能体子系统技术方案 · editable PowerPoint shapes</a:t>
             </a:r>
+            <a:endParaRPr lang="zh-CN" sz="700">
+              <a:solidFill>
+                <a:srgbClr val="64748B"/>
+              </a:solidFill>
+              <a:latin typeface="微软雅黑" panose="020B0503020204020204" charset="-122"/>
+              <a:ea typeface="微软雅黑" panose="020B0503020204020204" charset="-122"/>
+            </a:endParaRPr>
           </a:p>
         </p:txBody>
       </p:sp>
@@ -6168,7 +6650,7 @@
           </a:ln>
         </p:spPr>
         <p:txBody>
-          <a:bodyPr wrap="square" anchor="mid" lIns="0" rIns="0" tIns="0" bIns="0"/>
+          <a:bodyPr wrap="square" lIns="0" tIns="0" rIns="0" bIns="0" anchor="ctr"/>
           <a:lstStyle/>
           <a:p>
             <a:pPr algn="l"/>
@@ -6177,11 +6659,18 @@
                 <a:solidFill>
                   <a:srgbClr val="64748B"/>
                 </a:solidFill>
-                <a:latin typeface="Microsoft YaHei"/>
-                <a:ea typeface="Microsoft YaHei"/>
+                <a:latin typeface="微软雅黑" panose="020B0503020204020204" charset="-122"/>
+                <a:ea typeface="微软雅黑" panose="020B0503020204020204" charset="-122"/>
               </a:rPr>
               <a:t>CONTROLLED WAVEFORM WORKFLOW</a:t>
             </a:r>
+            <a:endParaRPr lang="zh-CN" sz="800" b="1">
+              <a:solidFill>
+                <a:srgbClr val="64748B"/>
+              </a:solidFill>
+              <a:latin typeface="微软雅黑" panose="020B0503020204020204" charset="-122"/>
+              <a:ea typeface="微软雅黑" panose="020B0503020204020204" charset="-122"/>
+            </a:endParaRPr>
           </a:p>
         </p:txBody>
       </p:sp>
@@ -6205,7 +6694,7 @@
           </a:ln>
         </p:spPr>
         <p:txBody>
-          <a:bodyPr wrap="square" anchor="mid" lIns="0" rIns="0" tIns="0" bIns="0"/>
+          <a:bodyPr wrap="square" lIns="0" tIns="0" rIns="0" bIns="0" anchor="ctr"/>
           <a:lstStyle/>
           <a:p>
             <a:pPr algn="l"/>
@@ -6214,11 +6703,18 @@
                 <a:solidFill>
                   <a:srgbClr val="172033"/>
                 </a:solidFill>
-                <a:latin typeface="Microsoft YaHei"/>
-                <a:ea typeface="Microsoft YaHei"/>
+                <a:latin typeface="微软雅黑" panose="020B0503020204020204" charset="-122"/>
+                <a:ea typeface="微软雅黑" panose="020B0503020204020204" charset="-122"/>
               </a:rPr>
               <a:t>波形参数设置受控流程图</a:t>
             </a:r>
+            <a:endParaRPr lang="zh-CN" sz="2400" b="1">
+              <a:solidFill>
+                <a:srgbClr val="172033"/>
+              </a:solidFill>
+              <a:latin typeface="微软雅黑" panose="020B0503020204020204" charset="-122"/>
+              <a:ea typeface="微软雅黑" panose="020B0503020204020204" charset="-122"/>
+            </a:endParaRPr>
           </a:p>
         </p:txBody>
       </p:sp>
@@ -6264,7 +6760,7 @@
           </a:ln>
         </p:spPr>
         <p:txBody>
-          <a:bodyPr wrap="square" anchor="mid" lIns="0" rIns="0" tIns="0" bIns="0"/>
+          <a:bodyPr wrap="square" lIns="0" tIns="0" rIns="0" bIns="0" anchor="ctr"/>
           <a:lstStyle/>
           <a:p>
             <a:pPr algn="r"/>
@@ -6273,11 +6769,18 @@
                 <a:solidFill>
                   <a:srgbClr val="64748B"/>
                 </a:solidFill>
-                <a:latin typeface="Microsoft YaHei"/>
-                <a:ea typeface="Microsoft YaHei"/>
+                <a:latin typeface="微软雅黑" panose="020B0503020204020204" charset="-122"/>
+                <a:ea typeface="微软雅黑" panose="020B0503020204020204" charset="-122"/>
               </a:rPr>
               <a:t>06 / 09</a:t>
             </a:r>
+            <a:endParaRPr lang="zh-CN" sz="900" b="1">
+              <a:solidFill>
+                <a:srgbClr val="64748B"/>
+              </a:solidFill>
+              <a:latin typeface="微软雅黑" panose="020B0503020204020204" charset="-122"/>
+              <a:ea typeface="微软雅黑" panose="020B0503020204020204" charset="-122"/>
+            </a:endParaRPr>
           </a:p>
         </p:txBody>
       </p:sp>
@@ -6301,7 +6804,7 @@
           </a:ln>
         </p:spPr>
         <p:txBody>
-          <a:bodyPr wrap="square" anchor="mid" lIns="0" rIns="0" tIns="0" bIns="0"/>
+          <a:bodyPr wrap="square" lIns="0" tIns="0" rIns="0" bIns="0" anchor="ctr"/>
           <a:lstStyle/>
           <a:p>
             <a:pPr algn="l"/>
@@ -6310,11 +6813,18 @@
                 <a:solidFill>
                   <a:srgbClr val="64748B"/>
                 </a:solidFill>
-                <a:latin typeface="Microsoft YaHei"/>
-                <a:ea typeface="Microsoft YaHei"/>
+                <a:latin typeface="微软雅黑" panose="020B0503020204020204" charset="-122"/>
+                <a:ea typeface="微软雅黑" panose="020B0503020204020204" charset="-122"/>
               </a:rPr>
               <a:t>候选参数方案不直接下发，需经过校验、仿真、审批、控制请求适配、状态跟踪和回滚检查点。</a:t>
             </a:r>
+            <a:endParaRPr lang="zh-CN" sz="1000">
+              <a:solidFill>
+                <a:srgbClr val="64748B"/>
+              </a:solidFill>
+              <a:latin typeface="微软雅黑" panose="020B0503020204020204" charset="-122"/>
+              <a:ea typeface="微软雅黑" panose="020B0503020204020204" charset="-122"/>
+            </a:endParaRPr>
           </a:p>
         </p:txBody>
       </p:sp>
@@ -6342,7 +6852,7 @@
           </a:ln>
         </p:spPr>
         <p:txBody>
-          <a:bodyPr wrap="square" anchor="mid" lIns="91440" rIns="91440" tIns="50292" bIns="50292"/>
+          <a:bodyPr wrap="square" lIns="91440" tIns="50292" rIns="91440" bIns="50292" anchor="ctr"/>
           <a:lstStyle/>
           <a:p>
             <a:pPr algn="ctr"/>
@@ -6351,11 +6861,18 @@
                 <a:solidFill>
                   <a:srgbClr val="172033"/>
                 </a:solidFill>
-                <a:latin typeface="Microsoft YaHei"/>
-                <a:ea typeface="Microsoft YaHei"/>
+                <a:latin typeface="微软雅黑" panose="020B0503020204020204" charset="-122"/>
+                <a:ea typeface="微软雅黑" panose="020B0503020204020204" charset="-122"/>
               </a:rPr>
               <a:t>1. 候选方案生成</a:t>
             </a:r>
+            <a:endParaRPr lang="zh-CN" sz="1100" b="1">
+              <a:solidFill>
+                <a:srgbClr val="172033"/>
+              </a:solidFill>
+              <a:latin typeface="微软雅黑" panose="020B0503020204020204" charset="-122"/>
+              <a:ea typeface="微软雅黑" panose="020B0503020204020204" charset="-122"/>
+            </a:endParaRPr>
           </a:p>
           <a:p>
             <a:pPr algn="ctr"/>
@@ -6364,11 +6881,18 @@
                 <a:solidFill>
                   <a:srgbClr val="172033"/>
                 </a:solidFill>
-                <a:latin typeface="Microsoft YaHei"/>
-                <a:ea typeface="Microsoft YaHei"/>
+                <a:latin typeface="微软雅黑" panose="020B0503020204020204" charset="-122"/>
+                <a:ea typeface="微软雅黑" panose="020B0503020204020204" charset="-122"/>
               </a:rPr>
               <a:t>任务目标、目标状态、资源约束、历史效果</a:t>
             </a:r>
+            <a:endParaRPr lang="zh-CN" sz="900">
+              <a:solidFill>
+                <a:srgbClr val="172033"/>
+              </a:solidFill>
+              <a:latin typeface="微软雅黑" panose="020B0503020204020204" charset="-122"/>
+              <a:ea typeface="微软雅黑" panose="020B0503020204020204" charset="-122"/>
+            </a:endParaRPr>
           </a:p>
         </p:txBody>
       </p:sp>
@@ -6414,7 +6938,7 @@
           </a:ln>
         </p:spPr>
         <p:txBody>
-          <a:bodyPr wrap="square" anchor="mid" lIns="0" rIns="0" tIns="0" bIns="0"/>
+          <a:bodyPr wrap="square" lIns="0" tIns="0" rIns="0" bIns="0" anchor="ctr"/>
           <a:lstStyle/>
           <a:p>
             <a:pPr algn="ctr"/>
@@ -6423,11 +6947,18 @@
                 <a:solidFill>
                   <a:srgbClr val="172033"/>
                 </a:solidFill>
-                <a:latin typeface="Microsoft YaHei"/>
-                <a:ea typeface="Microsoft YaHei"/>
+                <a:latin typeface="微软雅黑" panose="020B0503020204020204" charset="-122"/>
+                <a:ea typeface="微软雅黑" panose="020B0503020204020204" charset="-122"/>
               </a:rPr>
               <a:t>1. 候选方案生成</a:t>
             </a:r>
+            <a:endParaRPr lang="zh-CN" sz="1200" b="1">
+              <a:solidFill>
+                <a:srgbClr val="172033"/>
+              </a:solidFill>
+              <a:latin typeface="微软雅黑" panose="020B0503020204020204" charset="-122"/>
+              <a:ea typeface="微软雅黑" panose="020B0503020204020204" charset="-122"/>
+            </a:endParaRPr>
           </a:p>
         </p:txBody>
       </p:sp>
@@ -6478,7 +7009,7 @@
           </a:ln>
         </p:spPr>
         <p:txBody>
-          <a:bodyPr wrap="square" anchor="mid" lIns="91440" rIns="91440" tIns="50292" bIns="50292"/>
+          <a:bodyPr wrap="square" lIns="91440" tIns="50292" rIns="91440" bIns="50292" anchor="ctr"/>
           <a:lstStyle/>
           <a:p>
             <a:pPr algn="ctr"/>
@@ -6487,11 +7018,18 @@
                 <a:solidFill>
                   <a:srgbClr val="172033"/>
                 </a:solidFill>
-                <a:latin typeface="Microsoft YaHei"/>
-                <a:ea typeface="Microsoft YaHei"/>
+                <a:latin typeface="微软雅黑" panose="020B0503020204020204" charset="-122"/>
+                <a:ea typeface="微软雅黑" panose="020B0503020204020204" charset="-122"/>
               </a:rPr>
               <a:t>2. 参数边界校验</a:t>
             </a:r>
+            <a:endParaRPr lang="zh-CN" sz="1100" b="1">
+              <a:solidFill>
+                <a:srgbClr val="172033"/>
+              </a:solidFill>
+              <a:latin typeface="微软雅黑" panose="020B0503020204020204" charset="-122"/>
+              <a:ea typeface="微软雅黑" panose="020B0503020204020204" charset="-122"/>
+            </a:endParaRPr>
           </a:p>
           <a:p>
             <a:pPr algn="ctr"/>
@@ -6500,11 +7038,18 @@
                 <a:solidFill>
                   <a:srgbClr val="172033"/>
                 </a:solidFill>
-                <a:latin typeface="Microsoft YaHei"/>
-                <a:ea typeface="Microsoft YaHei"/>
+                <a:latin typeface="微软雅黑" panose="020B0503020204020204" charset="-122"/>
+                <a:ea typeface="微软雅黑" panose="020B0503020204020204" charset="-122"/>
               </a:rPr>
               <a:t>频段、功率、波束、门限、跟踪参数</a:t>
             </a:r>
+            <a:endParaRPr lang="zh-CN" sz="900">
+              <a:solidFill>
+                <a:srgbClr val="172033"/>
+              </a:solidFill>
+              <a:latin typeface="微软雅黑" panose="020B0503020204020204" charset="-122"/>
+              <a:ea typeface="微软雅黑" panose="020B0503020204020204" charset="-122"/>
+            </a:endParaRPr>
           </a:p>
         </p:txBody>
       </p:sp>
@@ -6550,7 +7095,7 @@
           </a:ln>
         </p:spPr>
         <p:txBody>
-          <a:bodyPr wrap="square" anchor="mid" lIns="0" rIns="0" tIns="0" bIns="0"/>
+          <a:bodyPr wrap="square" lIns="0" tIns="0" rIns="0" bIns="0" anchor="ctr"/>
           <a:lstStyle/>
           <a:p>
             <a:pPr algn="ctr"/>
@@ -6559,11 +7104,18 @@
                 <a:solidFill>
                   <a:srgbClr val="172033"/>
                 </a:solidFill>
-                <a:latin typeface="Microsoft YaHei"/>
-                <a:ea typeface="Microsoft YaHei"/>
+                <a:latin typeface="微软雅黑" panose="020B0503020204020204" charset="-122"/>
+                <a:ea typeface="微软雅黑" panose="020B0503020204020204" charset="-122"/>
               </a:rPr>
               <a:t>2. 参数边界校验</a:t>
             </a:r>
+            <a:endParaRPr lang="zh-CN" sz="1200" b="1">
+              <a:solidFill>
+                <a:srgbClr val="172033"/>
+              </a:solidFill>
+              <a:latin typeface="微软雅黑" panose="020B0503020204020204" charset="-122"/>
+              <a:ea typeface="微软雅黑" panose="020B0503020204020204" charset="-122"/>
+            </a:endParaRPr>
           </a:p>
         </p:txBody>
       </p:sp>
@@ -6614,7 +7166,7 @@
           </a:ln>
         </p:spPr>
         <p:txBody>
-          <a:bodyPr wrap="square" anchor="mid" lIns="91440" rIns="91440" tIns="50292" bIns="50292"/>
+          <a:bodyPr wrap="square" lIns="91440" tIns="50292" rIns="91440" bIns="50292" anchor="ctr"/>
           <a:lstStyle/>
           <a:p>
             <a:pPr algn="ctr"/>
@@ -6623,11 +7175,18 @@
                 <a:solidFill>
                   <a:srgbClr val="172033"/>
                 </a:solidFill>
-                <a:latin typeface="Microsoft YaHei"/>
-                <a:ea typeface="Microsoft YaHei"/>
+                <a:latin typeface="微软雅黑" panose="020B0503020204020204" charset="-122"/>
+                <a:ea typeface="微软雅黑" panose="020B0503020204020204" charset="-122"/>
               </a:rPr>
               <a:t>3. 仿真评估</a:t>
             </a:r>
+            <a:endParaRPr lang="zh-CN" sz="1100" b="1">
+              <a:solidFill>
+                <a:srgbClr val="172033"/>
+              </a:solidFill>
+              <a:latin typeface="微软雅黑" panose="020B0503020204020204" charset="-122"/>
+              <a:ea typeface="微软雅黑" panose="020B0503020204020204" charset="-122"/>
+            </a:endParaRPr>
           </a:p>
           <a:p>
             <a:pPr algn="ctr"/>
@@ -6636,11 +7195,18 @@
                 <a:solidFill>
                   <a:srgbClr val="172033"/>
                 </a:solidFill>
-                <a:latin typeface="Microsoft YaHei"/>
-                <a:ea typeface="Microsoft YaHei"/>
+                <a:latin typeface="微软雅黑" panose="020B0503020204020204" charset="-122"/>
+                <a:ea typeface="微软雅黑" panose="020B0503020204020204" charset="-122"/>
               </a:rPr>
               <a:t>预期效果、风险点、适用条件、回滚条件</a:t>
             </a:r>
+            <a:endParaRPr lang="zh-CN" sz="900">
+              <a:solidFill>
+                <a:srgbClr val="172033"/>
+              </a:solidFill>
+              <a:latin typeface="微软雅黑" panose="020B0503020204020204" charset="-122"/>
+              <a:ea typeface="微软雅黑" panose="020B0503020204020204" charset="-122"/>
+            </a:endParaRPr>
           </a:p>
         </p:txBody>
       </p:sp>
@@ -6686,7 +7252,7 @@
           </a:ln>
         </p:spPr>
         <p:txBody>
-          <a:bodyPr wrap="square" anchor="mid" lIns="0" rIns="0" tIns="0" bIns="0"/>
+          <a:bodyPr wrap="square" lIns="0" tIns="0" rIns="0" bIns="0" anchor="ctr"/>
           <a:lstStyle/>
           <a:p>
             <a:pPr algn="ctr"/>
@@ -6695,11 +7261,18 @@
                 <a:solidFill>
                   <a:srgbClr val="172033"/>
                 </a:solidFill>
-                <a:latin typeface="Microsoft YaHei"/>
-                <a:ea typeface="Microsoft YaHei"/>
+                <a:latin typeface="微软雅黑" panose="020B0503020204020204" charset="-122"/>
+                <a:ea typeface="微软雅黑" panose="020B0503020204020204" charset="-122"/>
               </a:rPr>
               <a:t>3. 仿真评估</a:t>
             </a:r>
+            <a:endParaRPr lang="zh-CN" sz="1200" b="1">
+              <a:solidFill>
+                <a:srgbClr val="172033"/>
+              </a:solidFill>
+              <a:latin typeface="微软雅黑" panose="020B0503020204020204" charset="-122"/>
+              <a:ea typeface="微软雅黑" panose="020B0503020204020204" charset="-122"/>
+            </a:endParaRPr>
           </a:p>
         </p:txBody>
       </p:sp>
@@ -6773,7 +7346,7 @@
           </a:ln>
         </p:spPr>
         <p:txBody>
-          <a:bodyPr wrap="square" anchor="mid" lIns="91440" rIns="91440" tIns="50292" bIns="50292"/>
+          <a:bodyPr wrap="square" lIns="91440" tIns="50292" rIns="91440" bIns="50292" anchor="ctr"/>
           <a:lstStyle/>
           <a:p>
             <a:pPr algn="ctr"/>
@@ -6782,11 +7355,18 @@
                 <a:solidFill>
                   <a:srgbClr val="172033"/>
                 </a:solidFill>
-                <a:latin typeface="Microsoft YaHei"/>
-                <a:ea typeface="Microsoft YaHei"/>
+                <a:latin typeface="微软雅黑" panose="020B0503020204020204" charset="-122"/>
+                <a:ea typeface="微软雅黑" panose="020B0503020204020204" charset="-122"/>
               </a:rPr>
               <a:t>4. 人工确认</a:t>
             </a:r>
+            <a:endParaRPr lang="zh-CN" sz="1100" b="1">
+              <a:solidFill>
+                <a:srgbClr val="172033"/>
+              </a:solidFill>
+              <a:latin typeface="微软雅黑" panose="020B0503020204020204" charset="-122"/>
+              <a:ea typeface="微软雅黑" panose="020B0503020204020204" charset="-122"/>
+            </a:endParaRPr>
           </a:p>
           <a:p>
             <a:pPr algn="ctr"/>
@@ -6795,11 +7375,18 @@
                 <a:solidFill>
                   <a:srgbClr val="172033"/>
                 </a:solidFill>
-                <a:latin typeface="Microsoft YaHei"/>
-                <a:ea typeface="Microsoft YaHei"/>
+                <a:latin typeface="微软雅黑" panose="020B0503020204020204" charset="-122"/>
+                <a:ea typeface="微软雅黑" panose="020B0503020204020204" charset="-122"/>
               </a:rPr>
               <a:t>显控审批、待确认事项、风险提示</a:t>
             </a:r>
+            <a:endParaRPr lang="zh-CN" sz="900">
+              <a:solidFill>
+                <a:srgbClr val="172033"/>
+              </a:solidFill>
+              <a:latin typeface="微软雅黑" panose="020B0503020204020204" charset="-122"/>
+              <a:ea typeface="微软雅黑" panose="020B0503020204020204" charset="-122"/>
+            </a:endParaRPr>
           </a:p>
         </p:txBody>
       </p:sp>
@@ -6845,7 +7432,7 @@
           </a:ln>
         </p:spPr>
         <p:txBody>
-          <a:bodyPr wrap="square" anchor="mid" lIns="0" rIns="0" tIns="0" bIns="0"/>
+          <a:bodyPr wrap="square" lIns="0" tIns="0" rIns="0" bIns="0" anchor="ctr"/>
           <a:lstStyle/>
           <a:p>
             <a:pPr algn="ctr"/>
@@ -6854,11 +7441,18 @@
                 <a:solidFill>
                   <a:srgbClr val="172033"/>
                 </a:solidFill>
-                <a:latin typeface="Microsoft YaHei"/>
-                <a:ea typeface="Microsoft YaHei"/>
+                <a:latin typeface="微软雅黑" panose="020B0503020204020204" charset="-122"/>
+                <a:ea typeface="微软雅黑" panose="020B0503020204020204" charset="-122"/>
               </a:rPr>
               <a:t>4. 人工确认</a:t>
             </a:r>
+            <a:endParaRPr lang="zh-CN" sz="1200" b="1">
+              <a:solidFill>
+                <a:srgbClr val="172033"/>
+              </a:solidFill>
+              <a:latin typeface="微软雅黑" panose="020B0503020204020204" charset="-122"/>
+              <a:ea typeface="微软雅黑" panose="020B0503020204020204" charset="-122"/>
+            </a:endParaRPr>
           </a:p>
         </p:txBody>
       </p:sp>
@@ -6909,7 +7503,7 @@
           </a:ln>
         </p:spPr>
         <p:txBody>
-          <a:bodyPr wrap="square" anchor="mid" lIns="91440" rIns="91440" tIns="50292" bIns="50292"/>
+          <a:bodyPr wrap="square" lIns="91440" tIns="50292" rIns="91440" bIns="50292" anchor="ctr"/>
           <a:lstStyle/>
           <a:p>
             <a:pPr algn="ctr"/>
@@ -6918,11 +7512,18 @@
                 <a:solidFill>
                   <a:srgbClr val="172033"/>
                 </a:solidFill>
-                <a:latin typeface="Microsoft YaHei"/>
-                <a:ea typeface="Microsoft YaHei"/>
+                <a:latin typeface="微软雅黑" panose="020B0503020204020204" charset="-122"/>
+                <a:ea typeface="微软雅黑" panose="020B0503020204020204" charset="-122"/>
               </a:rPr>
               <a:t>5. 控制请求适配</a:t>
             </a:r>
+            <a:endParaRPr lang="zh-CN" sz="1100" b="1">
+              <a:solidFill>
+                <a:srgbClr val="172033"/>
+              </a:solidFill>
+              <a:latin typeface="微软雅黑" panose="020B0503020204020204" charset="-122"/>
+              <a:ea typeface="微软雅黑" panose="020B0503020204020204" charset="-122"/>
+            </a:endParaRPr>
           </a:p>
           <a:p>
             <a:pPr algn="ctr"/>
@@ -6931,11 +7532,18 @@
                 <a:solidFill>
                   <a:srgbClr val="172033"/>
                 </a:solidFill>
-                <a:latin typeface="Microsoft YaHei"/>
-                <a:ea typeface="Microsoft YaHei"/>
+                <a:latin typeface="微软雅黑" panose="020B0503020204020204" charset="-122"/>
+                <a:ea typeface="微软雅黑" panose="020B0503020204020204" charset="-122"/>
               </a:rPr>
               <a:t>按控制链路协议组织经审批请求</a:t>
             </a:r>
+            <a:endParaRPr lang="zh-CN" sz="900">
+              <a:solidFill>
+                <a:srgbClr val="172033"/>
+              </a:solidFill>
+              <a:latin typeface="微软雅黑" panose="020B0503020204020204" charset="-122"/>
+              <a:ea typeface="微软雅黑" panose="020B0503020204020204" charset="-122"/>
+            </a:endParaRPr>
           </a:p>
         </p:txBody>
       </p:sp>
@@ -6981,7 +7589,7 @@
           </a:ln>
         </p:spPr>
         <p:txBody>
-          <a:bodyPr wrap="square" anchor="mid" lIns="0" rIns="0" tIns="0" bIns="0"/>
+          <a:bodyPr wrap="square" lIns="0" tIns="0" rIns="0" bIns="0" anchor="ctr"/>
           <a:lstStyle/>
           <a:p>
             <a:pPr algn="ctr"/>
@@ -6990,11 +7598,18 @@
                 <a:solidFill>
                   <a:srgbClr val="172033"/>
                 </a:solidFill>
-                <a:latin typeface="Microsoft YaHei"/>
-                <a:ea typeface="Microsoft YaHei"/>
+                <a:latin typeface="微软雅黑" panose="020B0503020204020204" charset="-122"/>
+                <a:ea typeface="微软雅黑" panose="020B0503020204020204" charset="-122"/>
               </a:rPr>
               <a:t>5. 控制请求适配</a:t>
             </a:r>
+            <a:endParaRPr lang="zh-CN" sz="1200" b="1">
+              <a:solidFill>
+                <a:srgbClr val="172033"/>
+              </a:solidFill>
+              <a:latin typeface="微软雅黑" panose="020B0503020204020204" charset="-122"/>
+              <a:ea typeface="微软雅黑" panose="020B0503020204020204" charset="-122"/>
+            </a:endParaRPr>
           </a:p>
         </p:txBody>
       </p:sp>
@@ -7045,7 +7660,7 @@
           </a:ln>
         </p:spPr>
         <p:txBody>
-          <a:bodyPr wrap="square" anchor="mid" lIns="91440" rIns="91440" tIns="50292" bIns="50292"/>
+          <a:bodyPr wrap="square" lIns="91440" tIns="50292" rIns="91440" bIns="50292" anchor="ctr"/>
           <a:lstStyle/>
           <a:p>
             <a:pPr algn="ctr"/>
@@ -7054,11 +7669,18 @@
                 <a:solidFill>
                   <a:srgbClr val="172033"/>
                 </a:solidFill>
-                <a:latin typeface="Microsoft YaHei"/>
-                <a:ea typeface="Microsoft YaHei"/>
+                <a:latin typeface="微软雅黑" panose="020B0503020204020204" charset="-122"/>
+                <a:ea typeface="微软雅黑" panose="020B0503020204020204" charset="-122"/>
               </a:rPr>
               <a:t>6. 状态跟踪与回滚</a:t>
             </a:r>
+            <a:endParaRPr lang="zh-CN" sz="1100" b="1">
+              <a:solidFill>
+                <a:srgbClr val="172033"/>
+              </a:solidFill>
+              <a:latin typeface="微软雅黑" panose="020B0503020204020204" charset="-122"/>
+              <a:ea typeface="微软雅黑" panose="020B0503020204020204" charset="-122"/>
+            </a:endParaRPr>
           </a:p>
           <a:p>
             <a:pPr algn="ctr"/>
@@ -7067,11 +7689,18 @@
                 <a:solidFill>
                   <a:srgbClr val="172033"/>
                 </a:solidFill>
-                <a:latin typeface="Microsoft YaHei"/>
-                <a:ea typeface="Microsoft YaHei"/>
+                <a:latin typeface="微软雅黑" panose="020B0503020204020204" charset="-122"/>
+                <a:ea typeface="微软雅黑" panose="020B0503020204020204" charset="-122"/>
               </a:rPr>
               <a:t>受理、执行、异常、效果指标、回滚结果</a:t>
             </a:r>
+            <a:endParaRPr lang="zh-CN" sz="900">
+              <a:solidFill>
+                <a:srgbClr val="172033"/>
+              </a:solidFill>
+              <a:latin typeface="微软雅黑" panose="020B0503020204020204" charset="-122"/>
+              <a:ea typeface="微软雅黑" panose="020B0503020204020204" charset="-122"/>
+            </a:endParaRPr>
           </a:p>
         </p:txBody>
       </p:sp>
@@ -7117,7 +7746,7 @@
           </a:ln>
         </p:spPr>
         <p:txBody>
-          <a:bodyPr wrap="square" anchor="mid" lIns="0" rIns="0" tIns="0" bIns="0"/>
+          <a:bodyPr wrap="square" lIns="0" tIns="0" rIns="0" bIns="0" anchor="ctr"/>
           <a:lstStyle/>
           <a:p>
             <a:pPr algn="ctr"/>
@@ -7126,11 +7755,18 @@
                 <a:solidFill>
                   <a:srgbClr val="172033"/>
                 </a:solidFill>
-                <a:latin typeface="Microsoft YaHei"/>
-                <a:ea typeface="Microsoft YaHei"/>
+                <a:latin typeface="微软雅黑" panose="020B0503020204020204" charset="-122"/>
+                <a:ea typeface="微软雅黑" panose="020B0503020204020204" charset="-122"/>
               </a:rPr>
               <a:t>6. 状态跟踪与回滚</a:t>
             </a:r>
+            <a:endParaRPr lang="zh-CN" sz="1200" b="1">
+              <a:solidFill>
+                <a:srgbClr val="172033"/>
+              </a:solidFill>
+              <a:latin typeface="微软雅黑" panose="020B0503020204020204" charset="-122"/>
+              <a:ea typeface="微软雅黑" panose="020B0503020204020204" charset="-122"/>
+            </a:endParaRPr>
           </a:p>
         </p:txBody>
       </p:sp>
@@ -7182,7 +7818,7 @@
           </a:ln>
         </p:spPr>
         <p:txBody>
-          <a:bodyPr wrap="square" anchor="mid" lIns="91440" rIns="91440" tIns="50292" bIns="50292"/>
+          <a:bodyPr wrap="square" lIns="91440" tIns="50292" rIns="91440" bIns="50292" anchor="ctr"/>
           <a:lstStyle/>
           <a:p>
             <a:pPr algn="ctr"/>
@@ -7191,11 +7827,18 @@
                 <a:solidFill>
                   <a:srgbClr val="172033"/>
                 </a:solidFill>
-                <a:latin typeface="Microsoft YaHei"/>
-                <a:ea typeface="Microsoft YaHei"/>
+                <a:latin typeface="微软雅黑" panose="020B0503020204020204" charset="-122"/>
+                <a:ea typeface="微软雅黑" panose="020B0503020204020204" charset="-122"/>
               </a:rPr>
               <a:t>效果指标、异常信息和操作员反馈进入追溯记录与记忆回流</a:t>
             </a:r>
+            <a:endParaRPr lang="zh-CN" sz="1100">
+              <a:solidFill>
+                <a:srgbClr val="172033"/>
+              </a:solidFill>
+              <a:latin typeface="微软雅黑" panose="020B0503020204020204" charset="-122"/>
+              <a:ea typeface="微软雅黑" panose="020B0503020204020204" charset="-122"/>
+            </a:endParaRPr>
           </a:p>
         </p:txBody>
       </p:sp>
@@ -7223,7 +7866,7 @@
           </a:ln>
         </p:spPr>
         <p:txBody>
-          <a:bodyPr wrap="square" anchor="mid" lIns="91440" rIns="91440" tIns="50292" bIns="50292"/>
+          <a:bodyPr wrap="square" lIns="91440" tIns="50292" rIns="91440" bIns="50292" anchor="ctr"/>
           <a:lstStyle/>
           <a:p>
             <a:pPr algn="ctr"/>
@@ -7232,11 +7875,18 @@
                 <a:solidFill>
                   <a:srgbClr val="172033"/>
                 </a:solidFill>
-                <a:latin typeface="Microsoft YaHei"/>
-                <a:ea typeface="Microsoft YaHei"/>
+                <a:latin typeface="微软雅黑" panose="020B0503020204020204" charset="-122"/>
+                <a:ea typeface="微软雅黑" panose="020B0503020204020204" charset="-122"/>
               </a:rPr>
               <a:t>控制请求由控制执行链路真实下发，智能体保留建议、流程状态和追溯引用</a:t>
             </a:r>
+            <a:endParaRPr lang="zh-CN" sz="1100">
+              <a:solidFill>
+                <a:srgbClr val="172033"/>
+              </a:solidFill>
+              <a:latin typeface="微软雅黑" panose="020B0503020204020204" charset="-122"/>
+              <a:ea typeface="微软雅黑" panose="020B0503020204020204" charset="-122"/>
+            </a:endParaRPr>
           </a:p>
         </p:txBody>
       </p:sp>
@@ -7282,7 +7932,7 @@
           </a:ln>
         </p:spPr>
         <p:txBody>
-          <a:bodyPr wrap="square" anchor="mid" lIns="0" rIns="0" tIns="0" bIns="0"/>
+          <a:bodyPr wrap="square" lIns="0" tIns="0" rIns="0" bIns="0" anchor="ctr"/>
           <a:lstStyle/>
           <a:p>
             <a:pPr algn="r"/>
@@ -7291,11 +7941,18 @@
                 <a:solidFill>
                   <a:srgbClr val="64748B"/>
                 </a:solidFill>
-                <a:latin typeface="Microsoft YaHei"/>
-                <a:ea typeface="Microsoft YaHei"/>
+                <a:latin typeface="微软雅黑" panose="020B0503020204020204" charset="-122"/>
+                <a:ea typeface="微软雅黑" panose="020B0503020204020204" charset="-122"/>
               </a:rPr>
               <a:t>Source: 4.3.3.2 雷达智能体子系统技术方案 · editable PowerPoint shapes</a:t>
             </a:r>
+            <a:endParaRPr lang="zh-CN" sz="700">
+              <a:solidFill>
+                <a:srgbClr val="64748B"/>
+              </a:solidFill>
+              <a:latin typeface="微软雅黑" panose="020B0503020204020204" charset="-122"/>
+              <a:ea typeface="微软雅黑" panose="020B0503020204020204" charset="-122"/>
+            </a:endParaRPr>
           </a:p>
         </p:txBody>
       </p:sp>
@@ -7366,7 +8023,7 @@
           </a:ln>
         </p:spPr>
         <p:txBody>
-          <a:bodyPr wrap="square" anchor="mid" lIns="0" rIns="0" tIns="0" bIns="0"/>
+          <a:bodyPr wrap="square" lIns="0" tIns="0" rIns="0" bIns="0" anchor="ctr"/>
           <a:lstStyle/>
           <a:p>
             <a:pPr algn="l"/>
@@ -7375,11 +8032,18 @@
                 <a:solidFill>
                   <a:srgbClr val="64748B"/>
                 </a:solidFill>
-                <a:latin typeface="Microsoft YaHei"/>
-                <a:ea typeface="Microsoft YaHei"/>
+                <a:latin typeface="微软雅黑" panose="020B0503020204020204" charset="-122"/>
+                <a:ea typeface="微软雅黑" panose="020B0503020204020204" charset="-122"/>
               </a:rPr>
               <a:t>SEQUENCE DIAGRAM</a:t>
             </a:r>
+            <a:endParaRPr lang="zh-CN" sz="800" b="1">
+              <a:solidFill>
+                <a:srgbClr val="64748B"/>
+              </a:solidFill>
+              <a:latin typeface="微软雅黑" panose="020B0503020204020204" charset="-122"/>
+              <a:ea typeface="微软雅黑" panose="020B0503020204020204" charset="-122"/>
+            </a:endParaRPr>
           </a:p>
         </p:txBody>
       </p:sp>
@@ -7403,7 +8067,7 @@
           </a:ln>
         </p:spPr>
         <p:txBody>
-          <a:bodyPr wrap="square" anchor="mid" lIns="0" rIns="0" tIns="0" bIns="0"/>
+          <a:bodyPr wrap="square" lIns="0" tIns="0" rIns="0" bIns="0" anchor="ctr"/>
           <a:lstStyle/>
           <a:p>
             <a:pPr algn="l"/>
@@ -7412,11 +8076,18 @@
                 <a:solidFill>
                   <a:srgbClr val="172033"/>
                 </a:solidFill>
-                <a:latin typeface="Microsoft YaHei"/>
-                <a:ea typeface="Microsoft YaHei"/>
+                <a:latin typeface="微软雅黑" panose="020B0503020204020204" charset="-122"/>
+                <a:ea typeface="微软雅黑" panose="020B0503020204020204" charset="-122"/>
               </a:rPr>
               <a:t>高风险任务时序交互图</a:t>
             </a:r>
+            <a:endParaRPr lang="zh-CN" sz="2400" b="1">
+              <a:solidFill>
+                <a:srgbClr val="172033"/>
+              </a:solidFill>
+              <a:latin typeface="微软雅黑" panose="020B0503020204020204" charset="-122"/>
+              <a:ea typeface="微软雅黑" panose="020B0503020204020204" charset="-122"/>
+            </a:endParaRPr>
           </a:p>
         </p:txBody>
       </p:sp>
@@ -7462,7 +8133,7 @@
           </a:ln>
         </p:spPr>
         <p:txBody>
-          <a:bodyPr wrap="square" anchor="mid" lIns="0" rIns="0" tIns="0" bIns="0"/>
+          <a:bodyPr wrap="square" lIns="0" tIns="0" rIns="0" bIns="0" anchor="ctr"/>
           <a:lstStyle/>
           <a:p>
             <a:pPr algn="r"/>
@@ -7471,11 +8142,18 @@
                 <a:solidFill>
                   <a:srgbClr val="64748B"/>
                 </a:solidFill>
-                <a:latin typeface="Microsoft YaHei"/>
-                <a:ea typeface="Microsoft YaHei"/>
+                <a:latin typeface="微软雅黑" panose="020B0503020204020204" charset="-122"/>
+                <a:ea typeface="微软雅黑" panose="020B0503020204020204" charset="-122"/>
               </a:rPr>
               <a:t>07 / 09</a:t>
             </a:r>
+            <a:endParaRPr lang="zh-CN" sz="900" b="1">
+              <a:solidFill>
+                <a:srgbClr val="64748B"/>
+              </a:solidFill>
+              <a:latin typeface="微软雅黑" panose="020B0503020204020204" charset="-122"/>
+              <a:ea typeface="微软雅黑" panose="020B0503020204020204" charset="-122"/>
+            </a:endParaRPr>
           </a:p>
         </p:txBody>
       </p:sp>
@@ -7499,7 +8177,7 @@
           </a:ln>
         </p:spPr>
         <p:txBody>
-          <a:bodyPr wrap="square" anchor="mid" lIns="0" rIns="0" tIns="0" bIns="0"/>
+          <a:bodyPr wrap="square" lIns="0" tIns="0" rIns="0" bIns="0" anchor="ctr"/>
           <a:lstStyle/>
           <a:p>
             <a:pPr algn="l"/>
@@ -7508,11 +8186,18 @@
                 <a:solidFill>
                   <a:srgbClr val="64748B"/>
                 </a:solidFill>
-                <a:latin typeface="Microsoft YaHei"/>
-                <a:ea typeface="Microsoft YaHei"/>
+                <a:latin typeface="微软雅黑" panose="020B0503020204020204" charset="-122"/>
+                <a:ea typeface="微软雅黑" panose="020B0503020204020204" charset="-122"/>
               </a:rPr>
               <a:t>展示认知核心提交方案后，任务运行管理、安全门控、工作流、工具执行和外部控制链路之间的关键交互。</a:t>
             </a:r>
+            <a:endParaRPr lang="zh-CN" sz="1000">
+              <a:solidFill>
+                <a:srgbClr val="64748B"/>
+              </a:solidFill>
+              <a:latin typeface="微软雅黑" panose="020B0503020204020204" charset="-122"/>
+              <a:ea typeface="微软雅黑" panose="020B0503020204020204" charset="-122"/>
+            </a:endParaRPr>
           </a:p>
         </p:txBody>
       </p:sp>
@@ -7540,7 +8225,7 @@
           </a:ln>
         </p:spPr>
         <p:txBody>
-          <a:bodyPr wrap="square" anchor="mid" lIns="91440" rIns="91440" tIns="50292" bIns="50292"/>
+          <a:bodyPr wrap="square" lIns="91440" tIns="50292" rIns="91440" bIns="50292" anchor="ctr"/>
           <a:lstStyle/>
           <a:p>
             <a:pPr algn="ctr"/>
@@ -7549,11 +8234,18 @@
                 <a:solidFill>
                   <a:srgbClr val="FFFFFF"/>
                 </a:solidFill>
-                <a:latin typeface="Microsoft YaHei"/>
-                <a:ea typeface="Microsoft YaHei"/>
+                <a:latin typeface="微软雅黑" panose="020B0503020204020204" charset="-122"/>
+                <a:ea typeface="微软雅黑" panose="020B0503020204020204" charset="-122"/>
               </a:rPr>
               <a:t>认知核心</a:t>
             </a:r>
+            <a:endParaRPr lang="zh-CN" sz="1000" b="1">
+              <a:solidFill>
+                <a:srgbClr val="FFFFFF"/>
+              </a:solidFill>
+              <a:latin typeface="微软雅黑" panose="020B0503020204020204" charset="-122"/>
+              <a:ea typeface="微软雅黑" panose="020B0503020204020204" charset="-122"/>
+            </a:endParaRPr>
           </a:p>
         </p:txBody>
       </p:sp>
@@ -7604,7 +8296,7 @@
           </a:ln>
         </p:spPr>
         <p:txBody>
-          <a:bodyPr wrap="square" anchor="mid" lIns="91440" rIns="91440" tIns="50292" bIns="50292"/>
+          <a:bodyPr wrap="square" lIns="91440" tIns="50292" rIns="91440" bIns="50292" anchor="ctr"/>
           <a:lstStyle/>
           <a:p>
             <a:pPr algn="ctr"/>
@@ -7613,11 +8305,18 @@
                 <a:solidFill>
                   <a:srgbClr val="FFFFFF"/>
                 </a:solidFill>
-                <a:latin typeface="Microsoft YaHei"/>
-                <a:ea typeface="Microsoft YaHei"/>
+                <a:latin typeface="微软雅黑" panose="020B0503020204020204" charset="-122"/>
+                <a:ea typeface="微软雅黑" panose="020B0503020204020204" charset="-122"/>
               </a:rPr>
               <a:t>任务运行管理</a:t>
             </a:r>
+            <a:endParaRPr lang="zh-CN" sz="1000" b="1">
+              <a:solidFill>
+                <a:srgbClr val="FFFFFF"/>
+              </a:solidFill>
+              <a:latin typeface="微软雅黑" panose="020B0503020204020204" charset="-122"/>
+              <a:ea typeface="微软雅黑" panose="020B0503020204020204" charset="-122"/>
+            </a:endParaRPr>
           </a:p>
         </p:txBody>
       </p:sp>
@@ -7668,7 +8367,7 @@
           </a:ln>
         </p:spPr>
         <p:txBody>
-          <a:bodyPr wrap="square" anchor="mid" lIns="91440" rIns="91440" tIns="50292" bIns="50292"/>
+          <a:bodyPr wrap="square" lIns="91440" tIns="50292" rIns="91440" bIns="50292" anchor="ctr"/>
           <a:lstStyle/>
           <a:p>
             <a:pPr algn="ctr"/>
@@ -7677,11 +8376,18 @@
                 <a:solidFill>
                   <a:srgbClr val="FFFFFF"/>
                 </a:solidFill>
-                <a:latin typeface="Microsoft YaHei"/>
-                <a:ea typeface="Microsoft YaHei"/>
+                <a:latin typeface="微软雅黑" panose="020B0503020204020204" charset="-122"/>
+                <a:ea typeface="微软雅黑" panose="020B0503020204020204" charset="-122"/>
               </a:rPr>
               <a:t>安全门控</a:t>
             </a:r>
+            <a:endParaRPr lang="zh-CN" sz="1000" b="1">
+              <a:solidFill>
+                <a:srgbClr val="FFFFFF"/>
+              </a:solidFill>
+              <a:latin typeface="微软雅黑" panose="020B0503020204020204" charset="-122"/>
+              <a:ea typeface="微软雅黑" panose="020B0503020204020204" charset="-122"/>
+            </a:endParaRPr>
           </a:p>
         </p:txBody>
       </p:sp>
@@ -7732,7 +8438,7 @@
           </a:ln>
         </p:spPr>
         <p:txBody>
-          <a:bodyPr wrap="square" anchor="mid" lIns="91440" rIns="91440" tIns="50292" bIns="50292"/>
+          <a:bodyPr wrap="square" lIns="91440" tIns="50292" rIns="91440" bIns="50292" anchor="ctr"/>
           <a:lstStyle/>
           <a:p>
             <a:pPr algn="ctr"/>
@@ -7741,11 +8447,18 @@
                 <a:solidFill>
                   <a:srgbClr val="FFFFFF"/>
                 </a:solidFill>
-                <a:latin typeface="Microsoft YaHei"/>
-                <a:ea typeface="Microsoft YaHei"/>
+                <a:latin typeface="微软雅黑" panose="020B0503020204020204" charset="-122"/>
+                <a:ea typeface="微软雅黑" panose="020B0503020204020204" charset="-122"/>
               </a:rPr>
               <a:t>工作流引擎</a:t>
             </a:r>
+            <a:endParaRPr lang="zh-CN" sz="1000" b="1">
+              <a:solidFill>
+                <a:srgbClr val="FFFFFF"/>
+              </a:solidFill>
+              <a:latin typeface="微软雅黑" panose="020B0503020204020204" charset="-122"/>
+              <a:ea typeface="微软雅黑" panose="020B0503020204020204" charset="-122"/>
+            </a:endParaRPr>
           </a:p>
         </p:txBody>
       </p:sp>
@@ -7796,7 +8509,7 @@
           </a:ln>
         </p:spPr>
         <p:txBody>
-          <a:bodyPr wrap="square" anchor="mid" lIns="91440" rIns="91440" tIns="50292" bIns="50292"/>
+          <a:bodyPr wrap="square" lIns="91440" tIns="50292" rIns="91440" bIns="50292" anchor="ctr"/>
           <a:lstStyle/>
           <a:p>
             <a:pPr algn="ctr"/>
@@ -7805,11 +8518,18 @@
                 <a:solidFill>
                   <a:srgbClr val="FFFFFF"/>
                 </a:solidFill>
-                <a:latin typeface="Microsoft YaHei"/>
-                <a:ea typeface="Microsoft YaHei"/>
+                <a:latin typeface="微软雅黑" panose="020B0503020204020204" charset="-122"/>
+                <a:ea typeface="微软雅黑" panose="020B0503020204020204" charset="-122"/>
               </a:rPr>
               <a:t>工具执行</a:t>
             </a:r>
+            <a:endParaRPr lang="zh-CN" sz="1000" b="1">
+              <a:solidFill>
+                <a:srgbClr val="FFFFFF"/>
+              </a:solidFill>
+              <a:latin typeface="微软雅黑" panose="020B0503020204020204" charset="-122"/>
+              <a:ea typeface="微软雅黑" panose="020B0503020204020204" charset="-122"/>
+            </a:endParaRPr>
           </a:p>
         </p:txBody>
       </p:sp>
@@ -7860,7 +8580,7 @@
           </a:ln>
         </p:spPr>
         <p:txBody>
-          <a:bodyPr wrap="square" anchor="mid" lIns="91440" rIns="91440" tIns="50292" bIns="50292"/>
+          <a:bodyPr wrap="square" lIns="91440" tIns="50292" rIns="91440" bIns="50292" anchor="ctr"/>
           <a:lstStyle/>
           <a:p>
             <a:pPr algn="ctr"/>
@@ -7869,11 +8589,18 @@
                 <a:solidFill>
                   <a:srgbClr val="FFFFFF"/>
                 </a:solidFill>
-                <a:latin typeface="Microsoft YaHei"/>
-                <a:ea typeface="Microsoft YaHei"/>
+                <a:latin typeface="微软雅黑" panose="020B0503020204020204" charset="-122"/>
+                <a:ea typeface="微软雅黑" panose="020B0503020204020204" charset="-122"/>
               </a:rPr>
               <a:t>外部服务/控制链路</a:t>
             </a:r>
+            <a:endParaRPr lang="zh-CN" sz="1000" b="1">
+              <a:solidFill>
+                <a:srgbClr val="FFFFFF"/>
+              </a:solidFill>
+              <a:latin typeface="微软雅黑" panose="020B0503020204020204" charset="-122"/>
+              <a:ea typeface="微软雅黑" panose="020B0503020204020204" charset="-122"/>
+            </a:endParaRPr>
           </a:p>
         </p:txBody>
       </p:sp>
@@ -7945,7 +8672,7 @@
           </a:ln>
         </p:spPr>
         <p:txBody>
-          <a:bodyPr wrap="square" anchor="mid" lIns="0" rIns="0" tIns="0" bIns="0"/>
+          <a:bodyPr wrap="square" lIns="0" tIns="0" rIns="0" bIns="0" anchor="ctr"/>
           <a:lstStyle/>
           <a:p>
             <a:pPr algn="ctr"/>
@@ -7954,11 +8681,18 @@
                 <a:solidFill>
                   <a:srgbClr val="64748B"/>
                 </a:solidFill>
-                <a:latin typeface="Microsoft YaHei"/>
-                <a:ea typeface="Microsoft YaHei"/>
+                <a:latin typeface="微软雅黑" panose="020B0503020204020204" charset="-122"/>
+                <a:ea typeface="微软雅黑" panose="020B0503020204020204" charset="-122"/>
               </a:rPr>
               <a:t>提交执行计划/工具建议/流程触发建议</a:t>
             </a:r>
+            <a:endParaRPr lang="zh-CN" sz="700">
+              <a:solidFill>
+                <a:srgbClr val="64748B"/>
+              </a:solidFill>
+              <a:latin typeface="微软雅黑" panose="020B0503020204020204" charset="-122"/>
+              <a:ea typeface="微软雅黑" panose="020B0503020204020204" charset="-122"/>
+            </a:endParaRPr>
           </a:p>
         </p:txBody>
       </p:sp>
@@ -8007,7 +8741,7 @@
           </a:ln>
         </p:spPr>
         <p:txBody>
-          <a:bodyPr wrap="square" anchor="mid" lIns="0" rIns="0" tIns="0" bIns="0"/>
+          <a:bodyPr wrap="square" lIns="0" tIns="0" rIns="0" bIns="0" anchor="ctr"/>
           <a:lstStyle/>
           <a:p>
             <a:pPr algn="ctr"/>
@@ -8016,11 +8750,18 @@
                 <a:solidFill>
                   <a:srgbClr val="64748B"/>
                 </a:solidFill>
-                <a:latin typeface="Microsoft YaHei"/>
-                <a:ea typeface="Microsoft YaHei"/>
+                <a:latin typeface="微软雅黑" panose="020B0503020204020204" charset="-122"/>
+                <a:ea typeface="微软雅黑" panose="020B0503020204020204" charset="-122"/>
               </a:rPr>
               <a:t>组织风险分级并提交门控校验</a:t>
             </a:r>
+            <a:endParaRPr lang="zh-CN" sz="700">
+              <a:solidFill>
+                <a:srgbClr val="64748B"/>
+              </a:solidFill>
+              <a:latin typeface="微软雅黑" panose="020B0503020204020204" charset="-122"/>
+              <a:ea typeface="微软雅黑" panose="020B0503020204020204" charset="-122"/>
+            </a:endParaRPr>
           </a:p>
         </p:txBody>
       </p:sp>
@@ -8070,7 +8811,7 @@
           </a:ln>
         </p:spPr>
         <p:txBody>
-          <a:bodyPr wrap="square" anchor="mid" lIns="0" rIns="0" tIns="0" bIns="0"/>
+          <a:bodyPr wrap="square" lIns="0" tIns="0" rIns="0" bIns="0" anchor="ctr"/>
           <a:lstStyle/>
           <a:p>
             <a:pPr algn="l"/>
@@ -8079,11 +8820,18 @@
                 <a:solidFill>
                   <a:srgbClr val="64748B"/>
                 </a:solidFill>
-                <a:latin typeface="Microsoft YaHei"/>
-                <a:ea typeface="Microsoft YaHei"/>
+                <a:latin typeface="微软雅黑" panose="020B0503020204020204" charset="-122"/>
+                <a:ea typeface="微软雅黑" panose="020B0503020204020204" charset="-122"/>
               </a:rPr>
               <a:t>权限、参数边界、雷达状态、审批状态校验</a:t>
             </a:r>
+            <a:endParaRPr lang="zh-CN" sz="700">
+              <a:solidFill>
+                <a:srgbClr val="64748B"/>
+              </a:solidFill>
+              <a:latin typeface="微软雅黑" panose="020B0503020204020204" charset="-122"/>
+              <a:ea typeface="微软雅黑" panose="020B0503020204020204" charset="-122"/>
+            </a:endParaRPr>
           </a:p>
         </p:txBody>
       </p:sp>
@@ -8132,7 +8880,7 @@
           </a:ln>
         </p:spPr>
         <p:txBody>
-          <a:bodyPr wrap="square" anchor="mid" lIns="0" rIns="0" tIns="0" bIns="0"/>
+          <a:bodyPr wrap="square" lIns="0" tIns="0" rIns="0" bIns="0" anchor="ctr"/>
           <a:lstStyle/>
           <a:p>
             <a:pPr algn="ctr"/>
@@ -8141,11 +8889,18 @@
                 <a:solidFill>
                   <a:srgbClr val="64748B"/>
                 </a:solidFill>
-                <a:latin typeface="Microsoft YaHei"/>
-                <a:ea typeface="Microsoft YaHei"/>
+                <a:latin typeface="微软雅黑" panose="020B0503020204020204" charset="-122"/>
+                <a:ea typeface="微软雅黑" panose="020B0503020204020204" charset="-122"/>
               </a:rPr>
               <a:t>要求进入受控工作流</a:t>
             </a:r>
+            <a:endParaRPr lang="zh-CN" sz="700">
+              <a:solidFill>
+                <a:srgbClr val="64748B"/>
+              </a:solidFill>
+              <a:latin typeface="微软雅黑" panose="020B0503020204020204" charset="-122"/>
+              <a:ea typeface="微软雅黑" panose="020B0503020204020204" charset="-122"/>
+            </a:endParaRPr>
           </a:p>
         </p:txBody>
       </p:sp>
@@ -8194,7 +8949,7 @@
           </a:ln>
         </p:spPr>
         <p:txBody>
-          <a:bodyPr wrap="square" anchor="mid" lIns="0" rIns="0" tIns="0" bIns="0"/>
+          <a:bodyPr wrap="square" lIns="0" tIns="0" rIns="0" bIns="0" anchor="ctr"/>
           <a:lstStyle/>
           <a:p>
             <a:pPr algn="ctr"/>
@@ -8203,11 +8958,18 @@
                 <a:solidFill>
                   <a:srgbClr val="64748B"/>
                 </a:solidFill>
-                <a:latin typeface="Microsoft YaHei"/>
-                <a:ea typeface="Microsoft YaHei"/>
+                <a:latin typeface="微软雅黑" panose="020B0503020204020204" charset="-122"/>
+                <a:ea typeface="微软雅黑" panose="020B0503020204020204" charset="-122"/>
               </a:rPr>
               <a:t>触发工作流实例</a:t>
             </a:r>
+            <a:endParaRPr lang="zh-CN" sz="700">
+              <a:solidFill>
+                <a:srgbClr val="64748B"/>
+              </a:solidFill>
+              <a:latin typeface="微软雅黑" panose="020B0503020204020204" charset="-122"/>
+              <a:ea typeface="微软雅黑" panose="020B0503020204020204" charset="-122"/>
+            </a:endParaRPr>
           </a:p>
         </p:txBody>
       </p:sp>
@@ -8256,7 +9018,7 @@
           </a:ln>
         </p:spPr>
         <p:txBody>
-          <a:bodyPr wrap="square" anchor="mid" lIns="0" rIns="0" tIns="0" bIns="0"/>
+          <a:bodyPr wrap="square" lIns="0" tIns="0" rIns="0" bIns="0" anchor="ctr"/>
           <a:lstStyle/>
           <a:p>
             <a:pPr algn="ctr"/>
@@ -8265,11 +9027,18 @@
                 <a:solidFill>
                   <a:srgbClr val="64748B"/>
                 </a:solidFill>
-                <a:latin typeface="Microsoft YaHei"/>
-                <a:ea typeface="Microsoft YaHei"/>
+                <a:latin typeface="微软雅黑" panose="020B0503020204020204" charset="-122"/>
+                <a:ea typeface="微软雅黑" panose="020B0503020204020204" charset="-122"/>
               </a:rPr>
               <a:t>参数边界/审批/检查点</a:t>
             </a:r>
+            <a:endParaRPr lang="zh-CN" sz="700">
+              <a:solidFill>
+                <a:srgbClr val="64748B"/>
+              </a:solidFill>
+              <a:latin typeface="微软雅黑" panose="020B0503020204020204" charset="-122"/>
+              <a:ea typeface="微软雅黑" panose="020B0503020204020204" charset="-122"/>
+            </a:endParaRPr>
           </a:p>
         </p:txBody>
       </p:sp>
@@ -8318,7 +9087,7 @@
           </a:ln>
         </p:spPr>
         <p:txBody>
-          <a:bodyPr wrap="square" anchor="mid" lIns="0" rIns="0" tIns="0" bIns="0"/>
+          <a:bodyPr wrap="square" lIns="0" tIns="0" rIns="0" bIns="0" anchor="ctr"/>
           <a:lstStyle/>
           <a:p>
             <a:pPr algn="ctr"/>
@@ -8327,11 +9096,18 @@
                 <a:solidFill>
                   <a:srgbClr val="64748B"/>
                 </a:solidFill>
-                <a:latin typeface="Microsoft YaHei"/>
-                <a:ea typeface="Microsoft YaHei"/>
+                <a:latin typeface="微软雅黑" panose="020B0503020204020204" charset="-122"/>
+                <a:ea typeface="微软雅黑" panose="020B0503020204020204" charset="-122"/>
               </a:rPr>
               <a:t>调用控制请求适配工具</a:t>
             </a:r>
+            <a:endParaRPr lang="zh-CN" sz="700">
+              <a:solidFill>
+                <a:srgbClr val="64748B"/>
+              </a:solidFill>
+              <a:latin typeface="微软雅黑" panose="020B0503020204020204" charset="-122"/>
+              <a:ea typeface="微软雅黑" panose="020B0503020204020204" charset="-122"/>
+            </a:endParaRPr>
           </a:p>
         </p:txBody>
       </p:sp>
@@ -8380,7 +9156,7 @@
           </a:ln>
         </p:spPr>
         <p:txBody>
-          <a:bodyPr wrap="square" anchor="mid" lIns="0" rIns="0" tIns="0" bIns="0"/>
+          <a:bodyPr wrap="square" lIns="0" tIns="0" rIns="0" bIns="0" anchor="ctr"/>
           <a:lstStyle/>
           <a:p>
             <a:pPr algn="ctr"/>
@@ -8389,11 +9165,18 @@
                 <a:solidFill>
                   <a:srgbClr val="64748B"/>
                 </a:solidFill>
-                <a:latin typeface="Microsoft YaHei"/>
-                <a:ea typeface="Microsoft YaHei"/>
+                <a:latin typeface="微软雅黑" panose="020B0503020204020204" charset="-122"/>
+                <a:ea typeface="微软雅黑" panose="020B0503020204020204" charset="-122"/>
               </a:rPr>
               <a:t>发送经审批的控制请求</a:t>
             </a:r>
+            <a:endParaRPr lang="zh-CN" sz="700">
+              <a:solidFill>
+                <a:srgbClr val="64748B"/>
+              </a:solidFill>
+              <a:latin typeface="微软雅黑" panose="020B0503020204020204" charset="-122"/>
+              <a:ea typeface="微软雅黑" panose="020B0503020204020204" charset="-122"/>
+            </a:endParaRPr>
           </a:p>
         </p:txBody>
       </p:sp>
@@ -8442,7 +9225,7 @@
           </a:ln>
         </p:spPr>
         <p:txBody>
-          <a:bodyPr wrap="square" anchor="mid" lIns="0" rIns="0" tIns="0" bIns="0"/>
+          <a:bodyPr wrap="square" lIns="0" tIns="0" rIns="0" bIns="0" anchor="ctr"/>
           <a:lstStyle/>
           <a:p>
             <a:pPr algn="ctr"/>
@@ -8451,11 +9234,18 @@
                 <a:solidFill>
                   <a:srgbClr val="64748B"/>
                 </a:solidFill>
-                <a:latin typeface="Microsoft YaHei"/>
-                <a:ea typeface="Microsoft YaHei"/>
+                <a:latin typeface="微软雅黑" panose="020B0503020204020204" charset="-122"/>
+                <a:ea typeface="微软雅黑" panose="020B0503020204020204" charset="-122"/>
               </a:rPr>
               <a:t>返回受理与执行状态</a:t>
             </a:r>
+            <a:endParaRPr lang="zh-CN" sz="700">
+              <a:solidFill>
+                <a:srgbClr val="64748B"/>
+              </a:solidFill>
+              <a:latin typeface="微软雅黑" panose="020B0503020204020204" charset="-122"/>
+              <a:ea typeface="微软雅黑" panose="020B0503020204020204" charset="-122"/>
+            </a:endParaRPr>
           </a:p>
         </p:txBody>
       </p:sp>
@@ -8479,7 +9269,7 @@
           </a:ln>
         </p:spPr>
         <p:txBody>
-          <a:bodyPr wrap="square" anchor="mid" lIns="0" rIns="0" tIns="0" bIns="0"/>
+          <a:bodyPr wrap="square" lIns="0" tIns="0" rIns="0" bIns="0" anchor="ctr"/>
           <a:lstStyle/>
           <a:p>
             <a:pPr algn="ctr"/>
@@ -8488,11 +9278,18 @@
                 <a:solidFill>
                   <a:srgbClr val="64748B"/>
                 </a:solidFill>
-                <a:latin typeface="Microsoft YaHei"/>
-                <a:ea typeface="Microsoft YaHei"/>
+                <a:latin typeface="微软雅黑" panose="020B0503020204020204" charset="-122"/>
+                <a:ea typeface="微软雅黑" panose="020B0503020204020204" charset="-122"/>
               </a:rPr>
               <a:t>只读或低风险任务可由安全门控放行动态工具调用；高风险或控制请求进入工作流模板并绑定追溯引用。</a:t>
             </a:r>
+            <a:endParaRPr lang="zh-CN" sz="900">
+              <a:solidFill>
+                <a:srgbClr val="64748B"/>
+              </a:solidFill>
+              <a:latin typeface="微软雅黑" panose="020B0503020204020204" charset="-122"/>
+              <a:ea typeface="微软雅黑" panose="020B0503020204020204" charset="-122"/>
+            </a:endParaRPr>
           </a:p>
         </p:txBody>
       </p:sp>
@@ -8538,7 +9335,7 @@
           </a:ln>
         </p:spPr>
         <p:txBody>
-          <a:bodyPr wrap="square" anchor="mid" lIns="0" rIns="0" tIns="0" bIns="0"/>
+          <a:bodyPr wrap="square" lIns="0" tIns="0" rIns="0" bIns="0" anchor="ctr"/>
           <a:lstStyle/>
           <a:p>
             <a:pPr algn="r"/>
@@ -8547,11 +9344,18 @@
                 <a:solidFill>
                   <a:srgbClr val="64748B"/>
                 </a:solidFill>
-                <a:latin typeface="Microsoft YaHei"/>
-                <a:ea typeface="Microsoft YaHei"/>
+                <a:latin typeface="微软雅黑" panose="020B0503020204020204" charset="-122"/>
+                <a:ea typeface="微软雅黑" panose="020B0503020204020204" charset="-122"/>
               </a:rPr>
               <a:t>Source: 4.3.3.2 雷达智能体子系统技术方案 · editable PowerPoint shapes</a:t>
             </a:r>
+            <a:endParaRPr lang="zh-CN" sz="700">
+              <a:solidFill>
+                <a:srgbClr val="64748B"/>
+              </a:solidFill>
+              <a:latin typeface="微软雅黑" panose="020B0503020204020204" charset="-122"/>
+              <a:ea typeface="微软雅黑" panose="020B0503020204020204" charset="-122"/>
+            </a:endParaRPr>
           </a:p>
         </p:txBody>
       </p:sp>
@@ -8622,7 +9426,7 @@
           </a:ln>
         </p:spPr>
         <p:txBody>
-          <a:bodyPr wrap="square" anchor="mid" lIns="0" rIns="0" tIns="0" bIns="0"/>
+          <a:bodyPr wrap="square" lIns="0" tIns="0" rIns="0" bIns="0" anchor="ctr"/>
           <a:lstStyle/>
           <a:p>
             <a:pPr algn="l"/>
@@ -8631,11 +9435,18 @@
                 <a:solidFill>
                   <a:srgbClr val="64748B"/>
                 </a:solidFill>
-                <a:latin typeface="Microsoft YaHei"/>
-                <a:ea typeface="Microsoft YaHei"/>
+                <a:latin typeface="微软雅黑" panose="020B0503020204020204" charset="-122"/>
+                <a:ea typeface="微软雅黑" panose="020B0503020204020204" charset="-122"/>
               </a:rPr>
               <a:t>THREE-TIER MEMORY LOOP</a:t>
             </a:r>
+            <a:endParaRPr lang="zh-CN" sz="800" b="1">
+              <a:solidFill>
+                <a:srgbClr val="64748B"/>
+              </a:solidFill>
+              <a:latin typeface="微软雅黑" panose="020B0503020204020204" charset="-122"/>
+              <a:ea typeface="微软雅黑" panose="020B0503020204020204" charset="-122"/>
+            </a:endParaRPr>
           </a:p>
         </p:txBody>
       </p:sp>
@@ -8659,7 +9470,7 @@
           </a:ln>
         </p:spPr>
         <p:txBody>
-          <a:bodyPr wrap="square" anchor="mid" lIns="0" rIns="0" tIns="0" bIns="0"/>
+          <a:bodyPr wrap="square" lIns="0" tIns="0" rIns="0" bIns="0" anchor="ctr"/>
           <a:lstStyle/>
           <a:p>
             <a:pPr algn="l"/>
@@ -8668,11 +9479,18 @@
                 <a:solidFill>
                   <a:srgbClr val="172033"/>
                 </a:solidFill>
-                <a:latin typeface="Microsoft YaHei"/>
-                <a:ea typeface="Microsoft YaHei"/>
+                <a:latin typeface="微软雅黑" panose="020B0503020204020204" charset="-122"/>
+                <a:ea typeface="微软雅黑" panose="020B0503020204020204" charset="-122"/>
               </a:rPr>
               <a:t>三阶分层记忆闭环图</a:t>
             </a:r>
+            <a:endParaRPr lang="zh-CN" sz="2400" b="1">
+              <a:solidFill>
+                <a:srgbClr val="172033"/>
+              </a:solidFill>
+              <a:latin typeface="微软雅黑" panose="020B0503020204020204" charset="-122"/>
+              <a:ea typeface="微软雅黑" panose="020B0503020204020204" charset="-122"/>
+            </a:endParaRPr>
           </a:p>
         </p:txBody>
       </p:sp>
@@ -8718,7 +9536,7 @@
           </a:ln>
         </p:spPr>
         <p:txBody>
-          <a:bodyPr wrap="square" anchor="mid" lIns="0" rIns="0" tIns="0" bIns="0"/>
+          <a:bodyPr wrap="square" lIns="0" tIns="0" rIns="0" bIns="0" anchor="ctr"/>
           <a:lstStyle/>
           <a:p>
             <a:pPr algn="r"/>
@@ -8727,11 +9545,18 @@
                 <a:solidFill>
                   <a:srgbClr val="64748B"/>
                 </a:solidFill>
-                <a:latin typeface="Microsoft YaHei"/>
-                <a:ea typeface="Microsoft YaHei"/>
+                <a:latin typeface="微软雅黑" panose="020B0503020204020204" charset="-122"/>
+                <a:ea typeface="微软雅黑" panose="020B0503020204020204" charset="-122"/>
               </a:rPr>
               <a:t>08 / 09</a:t>
             </a:r>
+            <a:endParaRPr lang="zh-CN" sz="900" b="1">
+              <a:solidFill>
+                <a:srgbClr val="64748B"/>
+              </a:solidFill>
+              <a:latin typeface="微软雅黑" panose="020B0503020204020204" charset="-122"/>
+              <a:ea typeface="微软雅黑" panose="020B0503020204020204" charset="-122"/>
+            </a:endParaRPr>
           </a:p>
         </p:txBody>
       </p:sp>
@@ -8755,7 +9580,7 @@
           </a:ln>
         </p:spPr>
         <p:txBody>
-          <a:bodyPr wrap="square" anchor="mid" lIns="0" rIns="0" tIns="0" bIns="0"/>
+          <a:bodyPr wrap="square" lIns="0" tIns="0" rIns="0" bIns="0" anchor="ctr"/>
           <a:lstStyle/>
           <a:p>
             <a:pPr algn="l"/>
@@ -8764,11 +9589,18 @@
                 <a:solidFill>
                   <a:srgbClr val="64748B"/>
                 </a:solidFill>
-                <a:latin typeface="Microsoft YaHei"/>
-                <a:ea typeface="Microsoft YaHei"/>
+                <a:latin typeface="微软雅黑" panose="020B0503020204020204" charset="-122"/>
+                <a:ea typeface="微软雅黑" panose="020B0503020204020204" charset="-122"/>
               </a:rPr>
               <a:t>短期记忆支撑当前任务，中期记忆组织近期任务链，长期记忆沉淀知识、案例、策略和经验资产。</a:t>
             </a:r>
+            <a:endParaRPr lang="zh-CN" sz="1000">
+              <a:solidFill>
+                <a:srgbClr val="64748B"/>
+              </a:solidFill>
+              <a:latin typeface="微软雅黑" panose="020B0503020204020204" charset="-122"/>
+              <a:ea typeface="微软雅黑" panose="020B0503020204020204" charset="-122"/>
+            </a:endParaRPr>
           </a:p>
         </p:txBody>
       </p:sp>
@@ -8796,21 +9628,8 @@
           </a:ln>
         </p:spPr>
         <p:txBody>
-          <a:bodyPr wrap="square" anchor="mid" lIns="91440" rIns="91440" tIns="50292" bIns="50292"/>
-          <a:lstStyle/>
-          <a:p>
-            <a:pPr algn="ctr"/>
-            <a:r>
-              <a:rPr lang="zh-CN" sz="1100" b="1">
-                <a:solidFill>
-                  <a:srgbClr val="172033"/>
-                </a:solidFill>
-                <a:latin typeface="Microsoft YaHei"/>
-                <a:ea typeface="Microsoft YaHei"/>
-              </a:rPr>
-              <a:t>当前任务上下文</a:t>
-            </a:r>
-          </a:p>
+          <a:bodyPr wrap="square" lIns="91440" tIns="50292" rIns="91440" bIns="50292" anchor="ctr"/>
+          <a:lstStyle/>
           <a:p>
             <a:pPr algn="ctr"/>
             <a:r>
@@ -8818,11 +9637,18 @@
                 <a:solidFill>
                   <a:srgbClr val="172033"/>
                 </a:solidFill>
-                <a:latin typeface="Microsoft YaHei"/>
-                <a:ea typeface="Microsoft YaHei"/>
+                <a:latin typeface="微软雅黑" panose="020B0503020204020204" charset="-122"/>
+                <a:ea typeface="微软雅黑" panose="020B0503020204020204" charset="-122"/>
               </a:rPr>
               <a:t>任务目标 / 感知证据</a:t>
             </a:r>
+            <a:endParaRPr lang="zh-CN" sz="900">
+              <a:solidFill>
+                <a:srgbClr val="172033"/>
+              </a:solidFill>
+              <a:latin typeface="微软雅黑" panose="020B0503020204020204" charset="-122"/>
+              <a:ea typeface="微软雅黑" panose="020B0503020204020204" charset="-122"/>
+            </a:endParaRPr>
           </a:p>
           <a:p>
             <a:pPr algn="ctr"/>
@@ -8831,11 +9657,18 @@
                 <a:solidFill>
                   <a:srgbClr val="172033"/>
                 </a:solidFill>
-                <a:latin typeface="Microsoft YaHei"/>
-                <a:ea typeface="Microsoft YaHei"/>
+                <a:latin typeface="微软雅黑" panose="020B0503020204020204" charset="-122"/>
+                <a:ea typeface="微软雅黑" panose="020B0503020204020204" charset="-122"/>
               </a:rPr>
               <a:t>雷达状态 / 工具结果</a:t>
             </a:r>
+            <a:endParaRPr lang="zh-CN" sz="900">
+              <a:solidFill>
+                <a:srgbClr val="172033"/>
+              </a:solidFill>
+              <a:latin typeface="微软雅黑" panose="020B0503020204020204" charset="-122"/>
+              <a:ea typeface="微软雅黑" panose="020B0503020204020204" charset="-122"/>
+            </a:endParaRPr>
           </a:p>
         </p:txBody>
       </p:sp>
@@ -8881,7 +9714,7 @@
           </a:ln>
         </p:spPr>
         <p:txBody>
-          <a:bodyPr wrap="square" anchor="mid" lIns="0" rIns="0" tIns="0" bIns="0"/>
+          <a:bodyPr wrap="square" lIns="0" tIns="0" rIns="0" bIns="0" anchor="ctr"/>
           <a:lstStyle/>
           <a:p>
             <a:pPr algn="ctr"/>
@@ -8890,11 +9723,18 @@
                 <a:solidFill>
                   <a:srgbClr val="172033"/>
                 </a:solidFill>
-                <a:latin typeface="Microsoft YaHei"/>
-                <a:ea typeface="Microsoft YaHei"/>
+                <a:latin typeface="微软雅黑" panose="020B0503020204020204" charset="-122"/>
+                <a:ea typeface="微软雅黑" panose="020B0503020204020204" charset="-122"/>
               </a:rPr>
               <a:t>当前任务上下文</a:t>
             </a:r>
+            <a:endParaRPr lang="zh-CN" sz="1200" b="1">
+              <a:solidFill>
+                <a:srgbClr val="172033"/>
+              </a:solidFill>
+              <a:latin typeface="微软雅黑" panose="020B0503020204020204" charset="-122"/>
+              <a:ea typeface="微软雅黑" panose="020B0503020204020204" charset="-122"/>
+            </a:endParaRPr>
           </a:p>
         </p:txBody>
       </p:sp>
@@ -8922,7 +9762,7 @@
           </a:ln>
         </p:spPr>
         <p:txBody>
-          <a:bodyPr wrap="square" anchor="mid" lIns="91440" rIns="91440" tIns="50292" bIns="50292"/>
+          <a:bodyPr wrap="square" lIns="91440" tIns="50292" rIns="91440" bIns="50292" anchor="ctr"/>
           <a:lstStyle/>
           <a:p>
             <a:pPr algn="ctr"/>
@@ -8931,11 +9771,18 @@
                 <a:solidFill>
                   <a:srgbClr val="172033"/>
                 </a:solidFill>
-                <a:latin typeface="Microsoft YaHei"/>
-                <a:ea typeface="Microsoft YaHei"/>
+                <a:latin typeface="微软雅黑" panose="020B0503020204020204" charset="-122"/>
+                <a:ea typeface="微软雅黑" panose="020B0503020204020204" charset="-122"/>
               </a:rPr>
               <a:t>短期记忆</a:t>
             </a:r>
+            <a:endParaRPr lang="zh-CN" sz="1100" b="1">
+              <a:solidFill>
+                <a:srgbClr val="172033"/>
+              </a:solidFill>
+              <a:latin typeface="微软雅黑" panose="020B0503020204020204" charset="-122"/>
+              <a:ea typeface="微软雅黑" panose="020B0503020204020204" charset="-122"/>
+            </a:endParaRPr>
           </a:p>
           <a:p>
             <a:pPr algn="ctr"/>
@@ -8944,11 +9791,18 @@
                 <a:solidFill>
                   <a:srgbClr val="172033"/>
                 </a:solidFill>
-                <a:latin typeface="Microsoft YaHei"/>
-                <a:ea typeface="Microsoft YaHei"/>
+                <a:latin typeface="微软雅黑" panose="020B0503020204020204" charset="-122"/>
+                <a:ea typeface="微软雅黑" panose="020B0503020204020204" charset="-122"/>
               </a:rPr>
               <a:t>上下文版本</a:t>
             </a:r>
+            <a:endParaRPr lang="zh-CN" sz="900">
+              <a:solidFill>
+                <a:srgbClr val="172033"/>
+              </a:solidFill>
+              <a:latin typeface="微软雅黑" panose="020B0503020204020204" charset="-122"/>
+              <a:ea typeface="微软雅黑" panose="020B0503020204020204" charset="-122"/>
+            </a:endParaRPr>
           </a:p>
           <a:p>
             <a:pPr algn="ctr"/>
@@ -8957,11 +9811,18 @@
                 <a:solidFill>
                   <a:srgbClr val="172033"/>
                 </a:solidFill>
-                <a:latin typeface="Microsoft YaHei"/>
-                <a:ea typeface="Microsoft YaHei"/>
+                <a:latin typeface="微软雅黑" panose="020B0503020204020204" charset="-122"/>
+                <a:ea typeface="微软雅黑" panose="020B0503020204020204" charset="-122"/>
               </a:rPr>
               <a:t>证据编号</a:t>
             </a:r>
+            <a:endParaRPr lang="zh-CN" sz="900">
+              <a:solidFill>
+                <a:srgbClr val="172033"/>
+              </a:solidFill>
+              <a:latin typeface="微软雅黑" panose="020B0503020204020204" charset="-122"/>
+              <a:ea typeface="微软雅黑" panose="020B0503020204020204" charset="-122"/>
+            </a:endParaRPr>
           </a:p>
           <a:p>
             <a:pPr algn="ctr"/>
@@ -8970,11 +9831,18 @@
                 <a:solidFill>
                   <a:srgbClr val="172033"/>
                 </a:solidFill>
-                <a:latin typeface="Microsoft YaHei"/>
-                <a:ea typeface="Microsoft YaHei"/>
+                <a:latin typeface="微软雅黑" panose="020B0503020204020204" charset="-122"/>
+                <a:ea typeface="微软雅黑" panose="020B0503020204020204" charset="-122"/>
               </a:rPr>
               <a:t>任务状态</a:t>
             </a:r>
+            <a:endParaRPr lang="zh-CN" sz="900">
+              <a:solidFill>
+                <a:srgbClr val="172033"/>
+              </a:solidFill>
+              <a:latin typeface="微软雅黑" panose="020B0503020204020204" charset="-122"/>
+              <a:ea typeface="微软雅黑" panose="020B0503020204020204" charset="-122"/>
+            </a:endParaRPr>
           </a:p>
         </p:txBody>
       </p:sp>
@@ -9020,20 +9888,17 @@
           </a:ln>
         </p:spPr>
         <p:txBody>
-          <a:bodyPr wrap="square" anchor="mid" lIns="0" rIns="0" tIns="0" bIns="0"/>
-          <a:lstStyle/>
-          <a:p>
-            <a:pPr algn="ctr"/>
-            <a:r>
-              <a:rPr lang="zh-CN" sz="1200" b="1">
-                <a:solidFill>
-                  <a:srgbClr val="172033"/>
-                </a:solidFill>
-                <a:latin typeface="Microsoft YaHei"/>
-                <a:ea typeface="Microsoft YaHei"/>
-              </a:rPr>
-              <a:t>短期记忆</a:t>
-            </a:r>
+          <a:bodyPr wrap="square" lIns="0" tIns="0" rIns="0" bIns="0" anchor="ctr"/>
+          <a:lstStyle/>
+          <a:p>
+            <a:pPr algn="ctr"/>
+            <a:endParaRPr lang="zh-CN" sz="1200" b="1">
+              <a:solidFill>
+                <a:srgbClr val="172033"/>
+              </a:solidFill>
+              <a:latin typeface="微软雅黑" panose="020B0503020204020204" charset="-122"/>
+              <a:ea typeface="微软雅黑" panose="020B0503020204020204" charset="-122"/>
+            </a:endParaRPr>
           </a:p>
         </p:txBody>
       </p:sp>
@@ -9061,7 +9926,7 @@
           </a:ln>
         </p:spPr>
         <p:txBody>
-          <a:bodyPr wrap="square" anchor="mid" lIns="91440" rIns="91440" tIns="50292" bIns="50292"/>
+          <a:bodyPr wrap="square" lIns="91440" tIns="50292" rIns="91440" bIns="50292" anchor="ctr"/>
           <a:lstStyle/>
           <a:p>
             <a:pPr algn="ctr"/>
@@ -9070,11 +9935,18 @@
                 <a:solidFill>
                   <a:srgbClr val="172033"/>
                 </a:solidFill>
-                <a:latin typeface="Microsoft YaHei"/>
-                <a:ea typeface="Microsoft YaHei"/>
+                <a:latin typeface="微软雅黑" panose="020B0503020204020204" charset="-122"/>
+                <a:ea typeface="微软雅黑" panose="020B0503020204020204" charset="-122"/>
               </a:rPr>
               <a:t>追溯记录</a:t>
             </a:r>
+            <a:endParaRPr lang="zh-CN" sz="1100" b="1">
+              <a:solidFill>
+                <a:srgbClr val="172033"/>
+              </a:solidFill>
+              <a:latin typeface="微软雅黑" panose="020B0503020204020204" charset="-122"/>
+              <a:ea typeface="微软雅黑" panose="020B0503020204020204" charset="-122"/>
+            </a:endParaRPr>
           </a:p>
           <a:p>
             <a:pPr algn="ctr"/>
@@ -9083,11 +9955,18 @@
                 <a:solidFill>
                   <a:srgbClr val="172033"/>
                 </a:solidFill>
-                <a:latin typeface="Microsoft YaHei"/>
-                <a:ea typeface="Microsoft YaHei"/>
+                <a:latin typeface="微软雅黑" panose="020B0503020204020204" charset="-122"/>
+                <a:ea typeface="微软雅黑" panose="020B0503020204020204" charset="-122"/>
               </a:rPr>
               <a:t>输入 / 推理 / 调用</a:t>
             </a:r>
+            <a:endParaRPr lang="zh-CN" sz="900">
+              <a:solidFill>
+                <a:srgbClr val="172033"/>
+              </a:solidFill>
+              <a:latin typeface="微软雅黑" panose="020B0503020204020204" charset="-122"/>
+              <a:ea typeface="微软雅黑" panose="020B0503020204020204" charset="-122"/>
+            </a:endParaRPr>
           </a:p>
           <a:p>
             <a:pPr algn="ctr"/>
@@ -9096,11 +9975,18 @@
                 <a:solidFill>
                   <a:srgbClr val="172033"/>
                 </a:solidFill>
-                <a:latin typeface="Microsoft YaHei"/>
-                <a:ea typeface="Microsoft YaHei"/>
+                <a:latin typeface="微软雅黑" panose="020B0503020204020204" charset="-122"/>
+                <a:ea typeface="微软雅黑" panose="020B0503020204020204" charset="-122"/>
               </a:rPr>
               <a:t>审批 / 结果 / 反馈</a:t>
             </a:r>
+            <a:endParaRPr lang="zh-CN" sz="900">
+              <a:solidFill>
+                <a:srgbClr val="172033"/>
+              </a:solidFill>
+              <a:latin typeface="微软雅黑" panose="020B0503020204020204" charset="-122"/>
+              <a:ea typeface="微软雅黑" panose="020B0503020204020204" charset="-122"/>
+            </a:endParaRPr>
           </a:p>
         </p:txBody>
       </p:sp>
@@ -9146,7 +10032,7 @@
           </a:ln>
         </p:spPr>
         <p:txBody>
-          <a:bodyPr wrap="square" anchor="mid" lIns="0" rIns="0" tIns="0" bIns="0"/>
+          <a:bodyPr wrap="square" lIns="0" tIns="0" rIns="0" bIns="0" anchor="ctr"/>
           <a:lstStyle/>
           <a:p>
             <a:pPr algn="ctr"/>
@@ -9155,11 +10041,18 @@
                 <a:solidFill>
                   <a:srgbClr val="172033"/>
                 </a:solidFill>
-                <a:latin typeface="Microsoft YaHei"/>
-                <a:ea typeface="Microsoft YaHei"/>
+                <a:latin typeface="微软雅黑" panose="020B0503020204020204" charset="-122"/>
+                <a:ea typeface="微软雅黑" panose="020B0503020204020204" charset="-122"/>
               </a:rPr>
               <a:t>追溯记录</a:t>
             </a:r>
+            <a:endParaRPr lang="zh-CN" sz="1200" b="1">
+              <a:solidFill>
+                <a:srgbClr val="172033"/>
+              </a:solidFill>
+              <a:latin typeface="微软雅黑" panose="020B0503020204020204" charset="-122"/>
+              <a:ea typeface="微软雅黑" panose="020B0503020204020204" charset="-122"/>
+            </a:endParaRPr>
           </a:p>
         </p:txBody>
       </p:sp>
@@ -9187,7 +10080,7 @@
           </a:ln>
         </p:spPr>
         <p:txBody>
-          <a:bodyPr wrap="square" anchor="mid" lIns="91440" rIns="91440" tIns="50292" bIns="50292"/>
+          <a:bodyPr wrap="square" lIns="91440" tIns="50292" rIns="91440" bIns="50292" anchor="ctr"/>
           <a:lstStyle/>
           <a:p>
             <a:pPr algn="ctr"/>
@@ -9196,11 +10089,18 @@
                 <a:solidFill>
                   <a:srgbClr val="172033"/>
                 </a:solidFill>
-                <a:latin typeface="Microsoft YaHei"/>
-                <a:ea typeface="Microsoft YaHei"/>
+                <a:latin typeface="微软雅黑" panose="020B0503020204020204" charset="-122"/>
+                <a:ea typeface="微软雅黑" panose="020B0503020204020204" charset="-122"/>
               </a:rPr>
               <a:t>中期任务链</a:t>
             </a:r>
+            <a:endParaRPr lang="zh-CN" sz="1100" b="1">
+              <a:solidFill>
+                <a:srgbClr val="172033"/>
+              </a:solidFill>
+              <a:latin typeface="微软雅黑" panose="020B0503020204020204" charset="-122"/>
+              <a:ea typeface="微软雅黑" panose="020B0503020204020204" charset="-122"/>
+            </a:endParaRPr>
           </a:p>
           <a:p>
             <a:pPr algn="ctr"/>
@@ -9209,11 +10109,18 @@
                 <a:solidFill>
                   <a:srgbClr val="172033"/>
                 </a:solidFill>
-                <a:latin typeface="Microsoft YaHei"/>
-                <a:ea typeface="Microsoft YaHei"/>
+                <a:latin typeface="微软雅黑" panose="020B0503020204020204" charset="-122"/>
+                <a:ea typeface="微软雅黑" panose="020B0503020204020204" charset="-122"/>
               </a:rPr>
               <a:t>目标链 / 区域链</a:t>
             </a:r>
+            <a:endParaRPr lang="zh-CN" sz="900">
+              <a:solidFill>
+                <a:srgbClr val="172033"/>
+              </a:solidFill>
+              <a:latin typeface="微软雅黑" panose="020B0503020204020204" charset="-122"/>
+              <a:ea typeface="微软雅黑" panose="020B0503020204020204" charset="-122"/>
+            </a:endParaRPr>
           </a:p>
           <a:p>
             <a:pPr algn="ctr"/>
@@ -9222,11 +10129,18 @@
                 <a:solidFill>
                   <a:srgbClr val="172033"/>
                 </a:solidFill>
-                <a:latin typeface="Microsoft YaHei"/>
-                <a:ea typeface="Microsoft YaHei"/>
+                <a:latin typeface="微软雅黑" panose="020B0503020204020204" charset="-122"/>
+                <a:ea typeface="微软雅黑" panose="020B0503020204020204" charset="-122"/>
               </a:rPr>
               <a:t>参数链 / 异常链</a:t>
             </a:r>
+            <a:endParaRPr lang="zh-CN" sz="900">
+              <a:solidFill>
+                <a:srgbClr val="172033"/>
+              </a:solidFill>
+              <a:latin typeface="微软雅黑" panose="020B0503020204020204" charset="-122"/>
+              <a:ea typeface="微软雅黑" panose="020B0503020204020204" charset="-122"/>
+            </a:endParaRPr>
           </a:p>
         </p:txBody>
       </p:sp>
@@ -9272,7 +10186,7 @@
           </a:ln>
         </p:spPr>
         <p:txBody>
-          <a:bodyPr wrap="square" anchor="mid" lIns="0" rIns="0" tIns="0" bIns="0"/>
+          <a:bodyPr wrap="square" lIns="0" tIns="0" rIns="0" bIns="0" anchor="ctr"/>
           <a:lstStyle/>
           <a:p>
             <a:pPr algn="ctr"/>
@@ -9281,11 +10195,18 @@
                 <a:solidFill>
                   <a:srgbClr val="172033"/>
                 </a:solidFill>
-                <a:latin typeface="Microsoft YaHei"/>
-                <a:ea typeface="Microsoft YaHei"/>
+                <a:latin typeface="微软雅黑" panose="020B0503020204020204" charset="-122"/>
+                <a:ea typeface="微软雅黑" panose="020B0503020204020204" charset="-122"/>
               </a:rPr>
               <a:t>中期任务链</a:t>
             </a:r>
+            <a:endParaRPr lang="zh-CN" sz="1200" b="1">
+              <a:solidFill>
+                <a:srgbClr val="172033"/>
+              </a:solidFill>
+              <a:latin typeface="微软雅黑" panose="020B0503020204020204" charset="-122"/>
+              <a:ea typeface="微软雅黑" panose="020B0503020204020204" charset="-122"/>
+            </a:endParaRPr>
           </a:p>
         </p:txBody>
       </p:sp>
@@ -9313,7 +10234,7 @@
           </a:ln>
         </p:spPr>
         <p:txBody>
-          <a:bodyPr wrap="square" anchor="mid" lIns="91440" rIns="91440" tIns="50292" bIns="50292"/>
+          <a:bodyPr wrap="square" lIns="91440" tIns="50292" rIns="91440" bIns="50292" anchor="ctr"/>
           <a:lstStyle/>
           <a:p>
             <a:pPr algn="ctr"/>
@@ -9322,11 +10243,18 @@
                 <a:solidFill>
                   <a:srgbClr val="172033"/>
                 </a:solidFill>
-                <a:latin typeface="Microsoft YaHei"/>
-                <a:ea typeface="Microsoft YaHei"/>
+                <a:latin typeface="微软雅黑" panose="020B0503020204020204" charset="-122"/>
+                <a:ea typeface="微软雅黑" panose="020B0503020204020204" charset="-122"/>
               </a:rPr>
               <a:t>长期经验资产</a:t>
             </a:r>
+            <a:endParaRPr lang="zh-CN" sz="1100" b="1">
+              <a:solidFill>
+                <a:srgbClr val="172033"/>
+              </a:solidFill>
+              <a:latin typeface="微软雅黑" panose="020B0503020204020204" charset="-122"/>
+              <a:ea typeface="微软雅黑" panose="020B0503020204020204" charset="-122"/>
+            </a:endParaRPr>
           </a:p>
           <a:p>
             <a:pPr algn="ctr"/>
@@ -9335,11 +10263,18 @@
                 <a:solidFill>
                   <a:srgbClr val="172033"/>
                 </a:solidFill>
-                <a:latin typeface="Microsoft YaHei"/>
-                <a:ea typeface="Microsoft YaHei"/>
+                <a:latin typeface="微软雅黑" panose="020B0503020204020204" charset="-122"/>
+                <a:ea typeface="微软雅黑" panose="020B0503020204020204" charset="-122"/>
               </a:rPr>
               <a:t>知识库 / 案例库</a:t>
             </a:r>
+            <a:endParaRPr lang="zh-CN" sz="900">
+              <a:solidFill>
+                <a:srgbClr val="172033"/>
+              </a:solidFill>
+              <a:latin typeface="微软雅黑" panose="020B0503020204020204" charset="-122"/>
+              <a:ea typeface="微软雅黑" panose="020B0503020204020204" charset="-122"/>
+            </a:endParaRPr>
           </a:p>
           <a:p>
             <a:pPr algn="ctr"/>
@@ -9348,11 +10283,18 @@
                 <a:solidFill>
                   <a:srgbClr val="172033"/>
                 </a:solidFill>
-                <a:latin typeface="Microsoft YaHei"/>
-                <a:ea typeface="Microsoft YaHei"/>
+                <a:latin typeface="微软雅黑" panose="020B0503020204020204" charset="-122"/>
+                <a:ea typeface="微软雅黑" panose="020B0503020204020204" charset="-122"/>
               </a:rPr>
               <a:t>策略库 / 经验库</a:t>
             </a:r>
+            <a:endParaRPr lang="zh-CN" sz="900">
+              <a:solidFill>
+                <a:srgbClr val="172033"/>
+              </a:solidFill>
+              <a:latin typeface="微软雅黑" panose="020B0503020204020204" charset="-122"/>
+              <a:ea typeface="微软雅黑" panose="020B0503020204020204" charset="-122"/>
+            </a:endParaRPr>
           </a:p>
         </p:txBody>
       </p:sp>
@@ -9398,7 +10340,7 @@
           </a:ln>
         </p:spPr>
         <p:txBody>
-          <a:bodyPr wrap="square" anchor="mid" lIns="0" rIns="0" tIns="0" bIns="0"/>
+          <a:bodyPr wrap="square" lIns="0" tIns="0" rIns="0" bIns="0" anchor="ctr"/>
           <a:lstStyle/>
           <a:p>
             <a:pPr algn="ctr"/>
@@ -9407,11 +10349,18 @@
                 <a:solidFill>
                   <a:srgbClr val="172033"/>
                 </a:solidFill>
-                <a:latin typeface="Microsoft YaHei"/>
-                <a:ea typeface="Microsoft YaHei"/>
+                <a:latin typeface="微软雅黑" panose="020B0503020204020204" charset="-122"/>
+                <a:ea typeface="微软雅黑" panose="020B0503020204020204" charset="-122"/>
               </a:rPr>
               <a:t>长期经验资产</a:t>
             </a:r>
+            <a:endParaRPr lang="zh-CN" sz="1200" b="1">
+              <a:solidFill>
+                <a:srgbClr val="172033"/>
+              </a:solidFill>
+              <a:latin typeface="微软雅黑" panose="020B0503020204020204" charset="-122"/>
+              <a:ea typeface="微软雅黑" panose="020B0503020204020204" charset="-122"/>
+            </a:endParaRPr>
           </a:p>
         </p:txBody>
       </p:sp>
@@ -9555,7 +10504,7 @@
           </a:ln>
         </p:spPr>
         <p:txBody>
-          <a:bodyPr wrap="square" anchor="mid" lIns="91440" rIns="91440" tIns="50292" bIns="50292"/>
+          <a:bodyPr wrap="square" lIns="91440" tIns="50292" rIns="91440" bIns="50292" anchor="ctr"/>
           <a:lstStyle/>
           <a:p>
             <a:pPr algn="ctr"/>
@@ -9564,11 +10513,18 @@
                 <a:solidFill>
                   <a:srgbClr val="172033"/>
                 </a:solidFill>
-                <a:latin typeface="Microsoft YaHei"/>
-                <a:ea typeface="Microsoft YaHei"/>
+                <a:latin typeface="微软雅黑" panose="020B0503020204020204" charset="-122"/>
+                <a:ea typeface="微软雅黑" panose="020B0503020204020204" charset="-122"/>
               </a:rPr>
               <a:t>质量评估与复核</a:t>
             </a:r>
+            <a:endParaRPr lang="zh-CN" sz="1300" b="1">
+              <a:solidFill>
+                <a:srgbClr val="172033"/>
+              </a:solidFill>
+              <a:latin typeface="微软雅黑" panose="020B0503020204020204" charset="-122"/>
+              <a:ea typeface="微软雅黑" panose="020B0503020204020204" charset="-122"/>
+            </a:endParaRPr>
           </a:p>
           <a:p>
             <a:pPr algn="ctr"/>
@@ -9577,11 +10533,18 @@
                 <a:solidFill>
                   <a:srgbClr val="172033"/>
                 </a:solidFill>
-                <a:latin typeface="Microsoft YaHei"/>
-                <a:ea typeface="Microsoft YaHei"/>
+                <a:latin typeface="微软雅黑" panose="020B0503020204020204" charset="-122"/>
+                <a:ea typeface="微软雅黑" panose="020B0503020204020204" charset="-122"/>
               </a:rPr>
               <a:t>冲突检查 / 适用边界 / 版本管理 / 影子运行</a:t>
             </a:r>
+            <a:endParaRPr lang="zh-CN" sz="1100">
+              <a:solidFill>
+                <a:srgbClr val="172033"/>
+              </a:solidFill>
+              <a:latin typeface="微软雅黑" panose="020B0503020204020204" charset="-122"/>
+              <a:ea typeface="微软雅黑" panose="020B0503020204020204" charset="-122"/>
+            </a:endParaRPr>
           </a:p>
         </p:txBody>
       </p:sp>
@@ -9628,7 +10591,7 @@
           </a:ln>
         </p:spPr>
         <p:txBody>
-          <a:bodyPr wrap="square" anchor="mid" lIns="0" rIns="0" tIns="0" bIns="0"/>
+          <a:bodyPr wrap="square" lIns="0" tIns="0" rIns="0" bIns="0" anchor="ctr"/>
           <a:lstStyle/>
           <a:p>
             <a:pPr algn="ctr"/>
@@ -9637,11 +10600,18 @@
                 <a:solidFill>
                   <a:srgbClr val="64748B"/>
                 </a:solidFill>
-                <a:latin typeface="Microsoft YaHei"/>
-                <a:ea typeface="Microsoft YaHei"/>
+                <a:latin typeface="微软雅黑" panose="020B0503020204020204" charset="-122"/>
+                <a:ea typeface="微软雅黑" panose="020B0503020204020204" charset="-122"/>
               </a:rPr>
               <a:t>记忆回流原则：不是把一次任务记录直接变成长期经验，而是先形成经验候选，再经过质量评估、复核和版本治理。</a:t>
             </a:r>
+            <a:endParaRPr lang="zh-CN" sz="1000">
+              <a:solidFill>
+                <a:srgbClr val="64748B"/>
+              </a:solidFill>
+              <a:latin typeface="微软雅黑" panose="020B0503020204020204" charset="-122"/>
+              <a:ea typeface="微软雅黑" panose="020B0503020204020204" charset="-122"/>
+            </a:endParaRPr>
           </a:p>
         </p:txBody>
       </p:sp>
@@ -9687,7 +10657,7 @@
           </a:ln>
         </p:spPr>
         <p:txBody>
-          <a:bodyPr wrap="square" anchor="mid" lIns="0" rIns="0" tIns="0" bIns="0"/>
+          <a:bodyPr wrap="square" lIns="0" tIns="0" rIns="0" bIns="0" anchor="ctr"/>
           <a:lstStyle/>
           <a:p>
             <a:pPr algn="r"/>
@@ -9696,11 +10666,18 @@
                 <a:solidFill>
                   <a:srgbClr val="64748B"/>
                 </a:solidFill>
-                <a:latin typeface="Microsoft YaHei"/>
-                <a:ea typeface="Microsoft YaHei"/>
+                <a:latin typeface="微软雅黑" panose="020B0503020204020204" charset="-122"/>
+                <a:ea typeface="微软雅黑" panose="020B0503020204020204" charset="-122"/>
               </a:rPr>
               <a:t>Source: 4.3.3.2 雷达智能体子系统技术方案 · editable PowerPoint shapes</a:t>
             </a:r>
+            <a:endParaRPr lang="zh-CN" sz="700">
+              <a:solidFill>
+                <a:srgbClr val="64748B"/>
+              </a:solidFill>
+              <a:latin typeface="微软雅黑" panose="020B0503020204020204" charset="-122"/>
+              <a:ea typeface="微软雅黑" panose="020B0503020204020204" charset="-122"/>
+            </a:endParaRPr>
           </a:p>
         </p:txBody>
       </p:sp>
@@ -9771,7 +10748,7 @@
           </a:ln>
         </p:spPr>
         <p:txBody>
-          <a:bodyPr wrap="square" anchor="mid" lIns="0" rIns="0" tIns="0" bIns="0"/>
+          <a:bodyPr wrap="square" lIns="0" tIns="0" rIns="0" bIns="0" anchor="ctr"/>
           <a:lstStyle/>
           <a:p>
             <a:pPr algn="l"/>
@@ -9780,11 +10757,18 @@
                 <a:solidFill>
                   <a:srgbClr val="64748B"/>
                 </a:solidFill>
-                <a:latin typeface="Microsoft YaHei"/>
-                <a:ea typeface="Microsoft YaHei"/>
+                <a:latin typeface="微软雅黑" panose="020B0503020204020204" charset="-122"/>
+                <a:ea typeface="微软雅黑" panose="020B0503020204020204" charset="-122"/>
               </a:rPr>
               <a:t>INTERFACE MAP</a:t>
             </a:r>
+            <a:endParaRPr lang="zh-CN" sz="800" b="1">
+              <a:solidFill>
+                <a:srgbClr val="64748B"/>
+              </a:solidFill>
+              <a:latin typeface="微软雅黑" panose="020B0503020204020204" charset="-122"/>
+              <a:ea typeface="微软雅黑" panose="020B0503020204020204" charset="-122"/>
+            </a:endParaRPr>
           </a:p>
         </p:txBody>
       </p:sp>
@@ -9808,7 +10792,7 @@
           </a:ln>
         </p:spPr>
         <p:txBody>
-          <a:bodyPr wrap="square" anchor="mid" lIns="0" rIns="0" tIns="0" bIns="0"/>
+          <a:bodyPr wrap="square" lIns="0" tIns="0" rIns="0" bIns="0" anchor="ctr"/>
           <a:lstStyle/>
           <a:p>
             <a:pPr algn="l"/>
@@ -9817,11 +10801,18 @@
                 <a:solidFill>
                   <a:srgbClr val="172033"/>
                 </a:solidFill>
-                <a:latin typeface="Microsoft YaHei"/>
-                <a:ea typeface="Microsoft YaHei"/>
+                <a:latin typeface="微软雅黑" panose="020B0503020204020204" charset="-122"/>
+                <a:ea typeface="微软雅黑" panose="020B0503020204020204" charset="-122"/>
               </a:rPr>
               <a:t>接口关系图</a:t>
             </a:r>
+            <a:endParaRPr lang="zh-CN" sz="2400" b="1">
+              <a:solidFill>
+                <a:srgbClr val="172033"/>
+              </a:solidFill>
+              <a:latin typeface="微软雅黑" panose="020B0503020204020204" charset="-122"/>
+              <a:ea typeface="微软雅黑" panose="020B0503020204020204" charset="-122"/>
+            </a:endParaRPr>
           </a:p>
         </p:txBody>
       </p:sp>
@@ -9867,7 +10858,7 @@
           </a:ln>
         </p:spPr>
         <p:txBody>
-          <a:bodyPr wrap="square" anchor="mid" lIns="0" rIns="0" tIns="0" bIns="0"/>
+          <a:bodyPr wrap="square" lIns="0" tIns="0" rIns="0" bIns="0" anchor="ctr"/>
           <a:lstStyle/>
           <a:p>
             <a:pPr algn="r"/>
@@ -9876,11 +10867,18 @@
                 <a:solidFill>
                   <a:srgbClr val="64748B"/>
                 </a:solidFill>
-                <a:latin typeface="Microsoft YaHei"/>
-                <a:ea typeface="Microsoft YaHei"/>
+                <a:latin typeface="微软雅黑" panose="020B0503020204020204" charset="-122"/>
+                <a:ea typeface="微软雅黑" panose="020B0503020204020204" charset="-122"/>
               </a:rPr>
               <a:t>09 / 09</a:t>
             </a:r>
+            <a:endParaRPr lang="zh-CN" sz="900" b="1">
+              <a:solidFill>
+                <a:srgbClr val="64748B"/>
+              </a:solidFill>
+              <a:latin typeface="微软雅黑" panose="020B0503020204020204" charset="-122"/>
+              <a:ea typeface="微软雅黑" panose="020B0503020204020204" charset="-122"/>
+            </a:endParaRPr>
           </a:p>
         </p:txBody>
       </p:sp>
@@ -9904,7 +10902,7 @@
           </a:ln>
         </p:spPr>
         <p:txBody>
-          <a:bodyPr wrap="square" anchor="mid" lIns="0" rIns="0" tIns="0" bIns="0"/>
+          <a:bodyPr wrap="square" lIns="0" tIns="0" rIns="0" bIns="0" anchor="ctr"/>
           <a:lstStyle/>
           <a:p>
             <a:pPr algn="l"/>
@@ -9913,11 +10911,18 @@
                 <a:solidFill>
                   <a:srgbClr val="64748B"/>
                 </a:solidFill>
-                <a:latin typeface="Microsoft YaHei"/>
-                <a:ea typeface="Microsoft YaHei"/>
+                <a:latin typeface="微软雅黑" panose="020B0503020204020204" charset="-122"/>
+                <a:ea typeface="微软雅黑" panose="020B0503020204020204" charset="-122"/>
               </a:rPr>
               <a:t>接口围绕统一任务标识、目标/区域引用、证据引用和追溯引用展开，技术类型按实现形态划分。</a:t>
             </a:r>
+            <a:endParaRPr lang="zh-CN" sz="1000">
+              <a:solidFill>
+                <a:srgbClr val="64748B"/>
+              </a:solidFill>
+              <a:latin typeface="微软雅黑" panose="020B0503020204020204" charset="-122"/>
+              <a:ea typeface="微软雅黑" panose="020B0503020204020204" charset="-122"/>
+            </a:endParaRPr>
           </a:p>
         </p:txBody>
       </p:sp>
@@ -9929,7 +10934,7 @@
         </p:nvSpPr>
         <p:spPr>
           <a:xfrm>
-            <a:off x="4224528" y="2011680"/>
+            <a:off x="4247388" y="1993265"/>
             <a:ext cx="3703320" cy="2148840"/>
           </a:xfrm>
           <a:prstGeom prst="roundRect">
@@ -9945,7 +10950,7 @@
           </a:ln>
         </p:spPr>
         <p:txBody>
-          <a:bodyPr wrap="square" anchor="mid" lIns="91440" rIns="91440" tIns="50292" bIns="50292"/>
+          <a:bodyPr wrap="square" lIns="91440" tIns="50292" rIns="91440" bIns="50292" anchor="ctr"/>
           <a:lstStyle/>
           <a:p>
             <a:pPr algn="ctr"/>
@@ -9954,11 +10959,18 @@
                 <a:solidFill>
                   <a:srgbClr val="FFFFFF"/>
                 </a:solidFill>
-                <a:latin typeface="Microsoft YaHei"/>
-                <a:ea typeface="Microsoft YaHei"/>
+                <a:latin typeface="微软雅黑" panose="020B0503020204020204" charset="-122"/>
+                <a:ea typeface="微软雅黑" panose="020B0503020204020204" charset="-122"/>
               </a:rPr>
               <a:t>雷达智能体子系统</a:t>
             </a:r>
+            <a:endParaRPr lang="zh-CN" sz="1200" b="1">
+              <a:solidFill>
+                <a:srgbClr val="FFFFFF"/>
+              </a:solidFill>
+              <a:latin typeface="微软雅黑" panose="020B0503020204020204" charset="-122"/>
+              <a:ea typeface="微软雅黑" panose="020B0503020204020204" charset="-122"/>
+            </a:endParaRPr>
           </a:p>
           <a:p>
             <a:pPr algn="ctr"/>
@@ -9967,11 +10979,18 @@
                 <a:solidFill>
                   <a:srgbClr val="FFFFFF"/>
                 </a:solidFill>
-                <a:latin typeface="Microsoft YaHei"/>
-                <a:ea typeface="Microsoft YaHei"/>
+                <a:latin typeface="微软雅黑" panose="020B0503020204020204" charset="-122"/>
+                <a:ea typeface="微软雅黑" panose="020B0503020204020204" charset="-122"/>
               </a:rPr>
               <a:t>外部接入 / 任务运行 / 认知推理</a:t>
             </a:r>
+            <a:endParaRPr lang="zh-CN" sz="1000">
+              <a:solidFill>
+                <a:srgbClr val="FFFFFF"/>
+              </a:solidFill>
+              <a:latin typeface="微软雅黑" panose="020B0503020204020204" charset="-122"/>
+              <a:ea typeface="微软雅黑" panose="020B0503020204020204" charset="-122"/>
+            </a:endParaRPr>
           </a:p>
           <a:p>
             <a:pPr algn="ctr"/>
@@ -9980,11 +10999,18 @@
                 <a:solidFill>
                   <a:srgbClr val="FFFFFF"/>
                 </a:solidFill>
-                <a:latin typeface="Microsoft YaHei"/>
-                <a:ea typeface="Microsoft YaHei"/>
+                <a:latin typeface="微软雅黑" panose="020B0503020204020204" charset="-122"/>
+                <a:ea typeface="微软雅黑" panose="020B0503020204020204" charset="-122"/>
               </a:rPr>
               <a:t>记忆读写 / 工具代理 / 工作流代理</a:t>
             </a:r>
+            <a:endParaRPr lang="zh-CN" sz="1000">
+              <a:solidFill>
+                <a:srgbClr val="FFFFFF"/>
+              </a:solidFill>
+              <a:latin typeface="微软雅黑" panose="020B0503020204020204" charset="-122"/>
+              <a:ea typeface="微软雅黑" panose="020B0503020204020204" charset="-122"/>
+            </a:endParaRPr>
           </a:p>
           <a:p>
             <a:pPr algn="ctr"/>
@@ -9993,11 +11019,18 @@
                 <a:solidFill>
                   <a:srgbClr val="FFFFFF"/>
                 </a:solidFill>
-                <a:latin typeface="Microsoft YaHei"/>
-                <a:ea typeface="Microsoft YaHei"/>
+                <a:latin typeface="微软雅黑" panose="020B0503020204020204" charset="-122"/>
+                <a:ea typeface="微软雅黑" panose="020B0503020204020204" charset="-122"/>
               </a:rPr>
               <a:t>门控判定 / 数据库接入 / 追溯记录</a:t>
             </a:r>
+            <a:endParaRPr lang="zh-CN" sz="1000">
+              <a:solidFill>
+                <a:srgbClr val="FFFFFF"/>
+              </a:solidFill>
+              <a:latin typeface="微软雅黑" panose="020B0503020204020204" charset="-122"/>
+              <a:ea typeface="微软雅黑" panose="020B0503020204020204" charset="-122"/>
+            </a:endParaRPr>
           </a:p>
         </p:txBody>
       </p:sp>
@@ -10021,7 +11054,7 @@
           </a:ln>
         </p:spPr>
         <p:txBody>
-          <a:bodyPr wrap="square" anchor="mid" lIns="0" rIns="0" tIns="0" bIns="0"/>
+          <a:bodyPr wrap="square" lIns="0" tIns="0" rIns="0" bIns="0" anchor="ctr"/>
           <a:lstStyle/>
           <a:p>
             <a:pPr algn="ctr"/>
@@ -10030,11 +11063,18 @@
                 <a:solidFill>
                   <a:srgbClr val="FFFFFF"/>
                 </a:solidFill>
-                <a:latin typeface="Microsoft YaHei"/>
-                <a:ea typeface="Microsoft YaHei"/>
+                <a:latin typeface="微软雅黑" panose="020B0503020204020204" charset="-122"/>
+                <a:ea typeface="微软雅黑" panose="020B0503020204020204" charset="-122"/>
               </a:rPr>
               <a:t>雷达智能体子系统</a:t>
             </a:r>
+            <a:endParaRPr lang="zh-CN" sz="1500" b="1">
+              <a:solidFill>
+                <a:srgbClr val="FFFFFF"/>
+              </a:solidFill>
+              <a:latin typeface="微软雅黑" panose="020B0503020204020204" charset="-122"/>
+              <a:ea typeface="微软雅黑" panose="020B0503020204020204" charset="-122"/>
+            </a:endParaRPr>
           </a:p>
         </p:txBody>
       </p:sp>
@@ -10062,7 +11102,7 @@
           </a:ln>
         </p:spPr>
         <p:txBody>
-          <a:bodyPr wrap="square" anchor="mid" lIns="91440" rIns="91440" tIns="50292" bIns="50292"/>
+          <a:bodyPr wrap="square" lIns="91440" tIns="50292" rIns="91440" bIns="50292" anchor="ctr"/>
           <a:lstStyle/>
           <a:p>
             <a:pPr algn="ctr"/>
@@ -10071,11 +11111,18 @@
                 <a:solidFill>
                   <a:srgbClr val="172033"/>
                 </a:solidFill>
-                <a:latin typeface="Microsoft YaHei"/>
-                <a:ea typeface="Microsoft YaHei"/>
+                <a:latin typeface="微软雅黑" panose="020B0503020204020204" charset="-122"/>
+                <a:ea typeface="微软雅黑" panose="020B0503020204020204" charset="-122"/>
               </a:rPr>
               <a:t>显控分系统</a:t>
             </a:r>
+            <a:endParaRPr lang="zh-CN" sz="1000" b="1">
+              <a:solidFill>
+                <a:srgbClr val="172033"/>
+              </a:solidFill>
+              <a:latin typeface="微软雅黑" panose="020B0503020204020204" charset="-122"/>
+              <a:ea typeface="微软雅黑" panose="020B0503020204020204" charset="-122"/>
+            </a:endParaRPr>
           </a:p>
           <a:p>
             <a:pPr algn="ctr"/>
@@ -10084,11 +11131,18 @@
                 <a:solidFill>
                   <a:srgbClr val="172033"/>
                 </a:solidFill>
-                <a:latin typeface="Microsoft YaHei"/>
-                <a:ea typeface="Microsoft YaHei"/>
+                <a:latin typeface="微软雅黑" panose="020B0503020204020204" charset="-122"/>
+                <a:ea typeface="微软雅黑" panose="020B0503020204020204" charset="-122"/>
               </a:rPr>
               <a:t>HTTP / 消息</a:t>
             </a:r>
+            <a:endParaRPr lang="zh-CN" sz="800">
+              <a:solidFill>
+                <a:srgbClr val="172033"/>
+              </a:solidFill>
+              <a:latin typeface="微软雅黑" panose="020B0503020204020204" charset="-122"/>
+              <a:ea typeface="微软雅黑" panose="020B0503020204020204" charset="-122"/>
+            </a:endParaRPr>
           </a:p>
           <a:p>
             <a:pPr algn="ctr"/>
@@ -10097,11 +11151,18 @@
                 <a:solidFill>
                   <a:srgbClr val="172033"/>
                 </a:solidFill>
-                <a:latin typeface="Microsoft YaHei"/>
-                <a:ea typeface="Microsoft YaHei"/>
+                <a:latin typeface="微软雅黑" panose="020B0503020204020204" charset="-122"/>
+                <a:ea typeface="微软雅黑" panose="020B0503020204020204" charset="-122"/>
               </a:rPr>
               <a:t>任务提交、状态、结果</a:t>
             </a:r>
+            <a:endParaRPr lang="zh-CN" sz="800">
+              <a:solidFill>
+                <a:srgbClr val="172033"/>
+              </a:solidFill>
+              <a:latin typeface="微软雅黑" panose="020B0503020204020204" charset="-122"/>
+              <a:ea typeface="微软雅黑" panose="020B0503020204020204" charset="-122"/>
+            </a:endParaRPr>
           </a:p>
         </p:txBody>
       </p:sp>
@@ -10147,7 +11208,7 @@
           </a:ln>
         </p:spPr>
         <p:txBody>
-          <a:bodyPr wrap="square" anchor="mid" lIns="0" rIns="0" tIns="0" bIns="0"/>
+          <a:bodyPr wrap="square" lIns="0" tIns="0" rIns="0" bIns="0" anchor="ctr"/>
           <a:lstStyle/>
           <a:p>
             <a:pPr algn="ctr"/>
@@ -10156,11 +11217,18 @@
                 <a:solidFill>
                   <a:srgbClr val="172033"/>
                 </a:solidFill>
-                <a:latin typeface="Microsoft YaHei"/>
-                <a:ea typeface="Microsoft YaHei"/>
+                <a:latin typeface="微软雅黑" panose="020B0503020204020204" charset="-122"/>
+                <a:ea typeface="微软雅黑" panose="020B0503020204020204" charset="-122"/>
               </a:rPr>
               <a:t>显控分系统</a:t>
             </a:r>
+            <a:endParaRPr lang="zh-CN" sz="1100" b="1">
+              <a:solidFill>
+                <a:srgbClr val="172033"/>
+              </a:solidFill>
+              <a:latin typeface="微软雅黑" panose="020B0503020204020204" charset="-122"/>
+              <a:ea typeface="微软雅黑" panose="020B0503020204020204" charset="-122"/>
+            </a:endParaRPr>
           </a:p>
         </p:txBody>
       </p:sp>
@@ -10188,7 +11256,7 @@
           </a:ln>
         </p:spPr>
         <p:txBody>
-          <a:bodyPr wrap="square" anchor="mid" lIns="91440" rIns="91440" tIns="50292" bIns="50292"/>
+          <a:bodyPr wrap="square" lIns="91440" tIns="50292" rIns="91440" bIns="50292" anchor="ctr"/>
           <a:lstStyle/>
           <a:p>
             <a:pPr algn="ctr"/>
@@ -10197,11 +11265,18 @@
                 <a:solidFill>
                   <a:srgbClr val="172033"/>
                 </a:solidFill>
-                <a:latin typeface="Microsoft YaHei"/>
-                <a:ea typeface="Microsoft YaHei"/>
+                <a:latin typeface="微软雅黑" panose="020B0503020204020204" charset="-122"/>
+                <a:ea typeface="微软雅黑" panose="020B0503020204020204" charset="-122"/>
               </a:rPr>
               <a:t>信息处理感知子系统</a:t>
             </a:r>
+            <a:endParaRPr lang="zh-CN" sz="1000" b="1">
+              <a:solidFill>
+                <a:srgbClr val="172033"/>
+              </a:solidFill>
+              <a:latin typeface="微软雅黑" panose="020B0503020204020204" charset="-122"/>
+              <a:ea typeface="微软雅黑" panose="020B0503020204020204" charset="-122"/>
+            </a:endParaRPr>
           </a:p>
           <a:p>
             <a:pPr algn="ctr"/>
@@ -10210,11 +11285,18 @@
                 <a:solidFill>
                   <a:srgbClr val="172033"/>
                 </a:solidFill>
-                <a:latin typeface="Microsoft YaHei"/>
-                <a:ea typeface="Microsoft YaHei"/>
+                <a:latin typeface="微软雅黑" panose="020B0503020204020204" charset="-122"/>
+                <a:ea typeface="微软雅黑" panose="020B0503020204020204" charset="-122"/>
               </a:rPr>
               <a:t>消息接口</a:t>
             </a:r>
+            <a:endParaRPr lang="zh-CN" sz="800">
+              <a:solidFill>
+                <a:srgbClr val="172033"/>
+              </a:solidFill>
+              <a:latin typeface="微软雅黑" panose="020B0503020204020204" charset="-122"/>
+              <a:ea typeface="微软雅黑" panose="020B0503020204020204" charset="-122"/>
+            </a:endParaRPr>
           </a:p>
           <a:p>
             <a:pPr algn="ctr"/>
@@ -10223,11 +11305,18 @@
                 <a:solidFill>
                   <a:srgbClr val="172033"/>
                 </a:solidFill>
-                <a:latin typeface="Microsoft YaHei"/>
-                <a:ea typeface="Microsoft YaHei"/>
+                <a:latin typeface="微软雅黑" panose="020B0503020204020204" charset="-122"/>
+                <a:ea typeface="微软雅黑" panose="020B0503020204020204" charset="-122"/>
               </a:rPr>
               <a:t>检测、识别、跟踪、定位</a:t>
             </a:r>
+            <a:endParaRPr lang="zh-CN" sz="800">
+              <a:solidFill>
+                <a:srgbClr val="172033"/>
+              </a:solidFill>
+              <a:latin typeface="微软雅黑" panose="020B0503020204020204" charset="-122"/>
+              <a:ea typeface="微软雅黑" panose="020B0503020204020204" charset="-122"/>
+            </a:endParaRPr>
           </a:p>
         </p:txBody>
       </p:sp>
@@ -10273,7 +11362,7 @@
           </a:ln>
         </p:spPr>
         <p:txBody>
-          <a:bodyPr wrap="square" anchor="mid" lIns="0" rIns="0" tIns="0" bIns="0"/>
+          <a:bodyPr wrap="square" lIns="0" tIns="0" rIns="0" bIns="0" anchor="ctr"/>
           <a:lstStyle/>
           <a:p>
             <a:pPr algn="ctr"/>
@@ -10282,11 +11371,18 @@
                 <a:solidFill>
                   <a:srgbClr val="172033"/>
                 </a:solidFill>
-                <a:latin typeface="Microsoft YaHei"/>
-                <a:ea typeface="Microsoft YaHei"/>
+                <a:latin typeface="微软雅黑" panose="020B0503020204020204" charset="-122"/>
+                <a:ea typeface="微软雅黑" panose="020B0503020204020204" charset="-122"/>
               </a:rPr>
               <a:t>信息处理感知子系统</a:t>
             </a:r>
+            <a:endParaRPr lang="zh-CN" sz="1100" b="1">
+              <a:solidFill>
+                <a:srgbClr val="172033"/>
+              </a:solidFill>
+              <a:latin typeface="微软雅黑" panose="020B0503020204020204" charset="-122"/>
+              <a:ea typeface="微软雅黑" panose="020B0503020204020204" charset="-122"/>
+            </a:endParaRPr>
           </a:p>
         </p:txBody>
       </p:sp>
@@ -10314,7 +11410,7 @@
           </a:ln>
         </p:spPr>
         <p:txBody>
-          <a:bodyPr wrap="square" anchor="mid" lIns="91440" rIns="91440" tIns="50292" bIns="50292"/>
+          <a:bodyPr wrap="square" lIns="91440" tIns="50292" rIns="91440" bIns="50292" anchor="ctr"/>
           <a:lstStyle/>
           <a:p>
             <a:pPr algn="ctr"/>
@@ -10323,11 +11419,18 @@
                 <a:solidFill>
                   <a:srgbClr val="172033"/>
                 </a:solidFill>
-                <a:latin typeface="Microsoft YaHei"/>
-                <a:ea typeface="Microsoft YaHei"/>
+                <a:latin typeface="微软雅黑" panose="020B0503020204020204" charset="-122"/>
+                <a:ea typeface="微软雅黑" panose="020B0503020204020204" charset="-122"/>
               </a:rPr>
               <a:t>雷达状态与环境服务</a:t>
             </a:r>
+            <a:endParaRPr lang="zh-CN" sz="1000" b="1">
+              <a:solidFill>
+                <a:srgbClr val="172033"/>
+              </a:solidFill>
+              <a:latin typeface="微软雅黑" panose="020B0503020204020204" charset="-122"/>
+              <a:ea typeface="微软雅黑" panose="020B0503020204020204" charset="-122"/>
+            </a:endParaRPr>
           </a:p>
           <a:p>
             <a:pPr algn="ctr"/>
@@ -10336,11 +11439,18 @@
                 <a:solidFill>
                   <a:srgbClr val="172033"/>
                 </a:solidFill>
-                <a:latin typeface="Microsoft YaHei"/>
-                <a:ea typeface="Microsoft YaHei"/>
+                <a:latin typeface="微软雅黑" panose="020B0503020204020204" charset="-122"/>
+                <a:ea typeface="微软雅黑" panose="020B0503020204020204" charset="-122"/>
               </a:rPr>
               <a:t>网络通信 / 消息</a:t>
             </a:r>
+            <a:endParaRPr lang="zh-CN" sz="800">
+              <a:solidFill>
+                <a:srgbClr val="172033"/>
+              </a:solidFill>
+              <a:latin typeface="微软雅黑" panose="020B0503020204020204" charset="-122"/>
+              <a:ea typeface="微软雅黑" panose="020B0503020204020204" charset="-122"/>
+            </a:endParaRPr>
           </a:p>
           <a:p>
             <a:pPr algn="ctr"/>
@@ -10349,11 +11459,18 @@
                 <a:solidFill>
                   <a:srgbClr val="172033"/>
                 </a:solidFill>
-                <a:latin typeface="Microsoft YaHei"/>
-                <a:ea typeface="Microsoft YaHei"/>
+                <a:latin typeface="微软雅黑" panose="020B0503020204020204" charset="-122"/>
+                <a:ea typeface="微软雅黑" panose="020B0503020204020204" charset="-122"/>
               </a:rPr>
               <a:t>状态、参数、告警</a:t>
             </a:r>
+            <a:endParaRPr lang="zh-CN" sz="800">
+              <a:solidFill>
+                <a:srgbClr val="172033"/>
+              </a:solidFill>
+              <a:latin typeface="微软雅黑" panose="020B0503020204020204" charset="-122"/>
+              <a:ea typeface="微软雅黑" panose="020B0503020204020204" charset="-122"/>
+            </a:endParaRPr>
           </a:p>
         </p:txBody>
       </p:sp>
@@ -10399,7 +11516,7 @@
           </a:ln>
         </p:spPr>
         <p:txBody>
-          <a:bodyPr wrap="square" anchor="mid" lIns="0" rIns="0" tIns="0" bIns="0"/>
+          <a:bodyPr wrap="square" lIns="0" tIns="0" rIns="0" bIns="0" anchor="ctr"/>
           <a:lstStyle/>
           <a:p>
             <a:pPr algn="ctr"/>
@@ -10408,11 +11525,18 @@
                 <a:solidFill>
                   <a:srgbClr val="172033"/>
                 </a:solidFill>
-                <a:latin typeface="Microsoft YaHei"/>
-                <a:ea typeface="Microsoft YaHei"/>
+                <a:latin typeface="微软雅黑" panose="020B0503020204020204" charset="-122"/>
+                <a:ea typeface="微软雅黑" panose="020B0503020204020204" charset="-122"/>
               </a:rPr>
               <a:t>雷达状态与环境服务</a:t>
             </a:r>
+            <a:endParaRPr lang="zh-CN" sz="1100" b="1">
+              <a:solidFill>
+                <a:srgbClr val="172033"/>
+              </a:solidFill>
+              <a:latin typeface="微软雅黑" panose="020B0503020204020204" charset="-122"/>
+              <a:ea typeface="微软雅黑" panose="020B0503020204020204" charset="-122"/>
+            </a:endParaRPr>
           </a:p>
         </p:txBody>
       </p:sp>
@@ -10440,7 +11564,7 @@
           </a:ln>
         </p:spPr>
         <p:txBody>
-          <a:bodyPr wrap="square" anchor="mid" lIns="91440" rIns="91440" tIns="50292" bIns="50292"/>
+          <a:bodyPr wrap="square" lIns="91440" tIns="50292" rIns="91440" bIns="50292" anchor="ctr"/>
           <a:lstStyle/>
           <a:p>
             <a:pPr algn="ctr"/>
@@ -10449,11 +11573,18 @@
                 <a:solidFill>
                   <a:srgbClr val="172033"/>
                 </a:solidFill>
-                <a:latin typeface="Microsoft YaHei"/>
-                <a:ea typeface="Microsoft YaHei"/>
+                <a:latin typeface="微软雅黑" panose="020B0503020204020204" charset="-122"/>
+                <a:ea typeface="微软雅黑" panose="020B0503020204020204" charset="-122"/>
               </a:rPr>
               <a:t>控制执行链路</a:t>
             </a:r>
+            <a:endParaRPr lang="zh-CN" sz="1000" b="1">
+              <a:solidFill>
+                <a:srgbClr val="172033"/>
+              </a:solidFill>
+              <a:latin typeface="微软雅黑" panose="020B0503020204020204" charset="-122"/>
+              <a:ea typeface="微软雅黑" panose="020B0503020204020204" charset="-122"/>
+            </a:endParaRPr>
           </a:p>
           <a:p>
             <a:pPr algn="ctr"/>
@@ -10462,11 +11593,18 @@
                 <a:solidFill>
                   <a:srgbClr val="172033"/>
                 </a:solidFill>
-                <a:latin typeface="Microsoft YaHei"/>
-                <a:ea typeface="Microsoft YaHei"/>
+                <a:latin typeface="微软雅黑" panose="020B0503020204020204" charset="-122"/>
+                <a:ea typeface="微软雅黑" panose="020B0503020204020204" charset="-122"/>
               </a:rPr>
               <a:t>网络通信</a:t>
             </a:r>
+            <a:endParaRPr lang="zh-CN" sz="800">
+              <a:solidFill>
+                <a:srgbClr val="172033"/>
+              </a:solidFill>
+              <a:latin typeface="微软雅黑" panose="020B0503020204020204" charset="-122"/>
+              <a:ea typeface="微软雅黑" panose="020B0503020204020204" charset="-122"/>
+            </a:endParaRPr>
           </a:p>
           <a:p>
             <a:pPr algn="ctr"/>
@@ -10475,11 +11613,18 @@
                 <a:solidFill>
                   <a:srgbClr val="172033"/>
                 </a:solidFill>
-                <a:latin typeface="Microsoft YaHei"/>
-                <a:ea typeface="Microsoft YaHei"/>
+                <a:latin typeface="微软雅黑" panose="020B0503020204020204" charset="-122"/>
+                <a:ea typeface="微软雅黑" panose="020B0503020204020204" charset="-122"/>
               </a:rPr>
               <a:t>经审批控制请求</a:t>
             </a:r>
+            <a:endParaRPr lang="zh-CN" sz="800">
+              <a:solidFill>
+                <a:srgbClr val="172033"/>
+              </a:solidFill>
+              <a:latin typeface="微软雅黑" panose="020B0503020204020204" charset="-122"/>
+              <a:ea typeface="微软雅黑" panose="020B0503020204020204" charset="-122"/>
+            </a:endParaRPr>
           </a:p>
         </p:txBody>
       </p:sp>
@@ -10525,7 +11670,7 @@
           </a:ln>
         </p:spPr>
         <p:txBody>
-          <a:bodyPr wrap="square" anchor="mid" lIns="0" rIns="0" tIns="0" bIns="0"/>
+          <a:bodyPr wrap="square" lIns="0" tIns="0" rIns="0" bIns="0" anchor="ctr"/>
           <a:lstStyle/>
           <a:p>
             <a:pPr algn="ctr"/>
@@ -10534,11 +11679,18 @@
                 <a:solidFill>
                   <a:srgbClr val="172033"/>
                 </a:solidFill>
-                <a:latin typeface="Microsoft YaHei"/>
-                <a:ea typeface="Microsoft YaHei"/>
+                <a:latin typeface="微软雅黑" panose="020B0503020204020204" charset="-122"/>
+                <a:ea typeface="微软雅黑" panose="020B0503020204020204" charset="-122"/>
               </a:rPr>
               <a:t>控制执行链路</a:t>
             </a:r>
+            <a:endParaRPr lang="zh-CN" sz="1100" b="1">
+              <a:solidFill>
+                <a:srgbClr val="172033"/>
+              </a:solidFill>
+              <a:latin typeface="微软雅黑" panose="020B0503020204020204" charset="-122"/>
+              <a:ea typeface="微软雅黑" panose="020B0503020204020204" charset="-122"/>
+            </a:endParaRPr>
           </a:p>
         </p:txBody>
       </p:sp>
@@ -10566,7 +11718,7 @@
           </a:ln>
         </p:spPr>
         <p:txBody>
-          <a:bodyPr wrap="square" anchor="mid" lIns="91440" rIns="91440" tIns="50292" bIns="50292"/>
+          <a:bodyPr wrap="square" lIns="91440" tIns="50292" rIns="91440" bIns="50292" anchor="ctr"/>
           <a:lstStyle/>
           <a:p>
             <a:pPr algn="ctr"/>
@@ -10575,11 +11727,18 @@
                 <a:solidFill>
                   <a:srgbClr val="172033"/>
                 </a:solidFill>
-                <a:latin typeface="Microsoft YaHei"/>
-                <a:ea typeface="Microsoft YaHei"/>
+                <a:latin typeface="微软雅黑" panose="020B0503020204020204" charset="-122"/>
+                <a:ea typeface="微软雅黑" panose="020B0503020204020204" charset="-122"/>
               </a:rPr>
               <a:t>数据知识底座</a:t>
             </a:r>
+            <a:endParaRPr lang="zh-CN" sz="1000" b="1">
+              <a:solidFill>
+                <a:srgbClr val="172033"/>
+              </a:solidFill>
+              <a:latin typeface="微软雅黑" panose="020B0503020204020204" charset="-122"/>
+              <a:ea typeface="微软雅黑" panose="020B0503020204020204" charset="-122"/>
+            </a:endParaRPr>
           </a:p>
           <a:p>
             <a:pPr algn="ctr"/>
@@ -10588,11 +11747,18 @@
                 <a:solidFill>
                   <a:srgbClr val="172033"/>
                 </a:solidFill>
-                <a:latin typeface="Microsoft YaHei"/>
-                <a:ea typeface="Microsoft YaHei"/>
+                <a:latin typeface="微软雅黑" panose="020B0503020204020204" charset="-122"/>
+                <a:ea typeface="微软雅黑" panose="020B0503020204020204" charset="-122"/>
               </a:rPr>
               <a:t>HTTP / 数据库</a:t>
             </a:r>
+            <a:endParaRPr lang="zh-CN" sz="800">
+              <a:solidFill>
+                <a:srgbClr val="172033"/>
+              </a:solidFill>
+              <a:latin typeface="微软雅黑" panose="020B0503020204020204" charset="-122"/>
+              <a:ea typeface="微软雅黑" panose="020B0503020204020204" charset="-122"/>
+            </a:endParaRPr>
           </a:p>
           <a:p>
             <a:pPr algn="ctr"/>
@@ -10601,11 +11767,18 @@
                 <a:solidFill>
                   <a:srgbClr val="172033"/>
                 </a:solidFill>
-                <a:latin typeface="Microsoft YaHei"/>
-                <a:ea typeface="Microsoft YaHei"/>
+                <a:latin typeface="微软雅黑" panose="020B0503020204020204" charset="-122"/>
+                <a:ea typeface="微软雅黑" panose="020B0503020204020204" charset="-122"/>
               </a:rPr>
               <a:t>知识、案例、时序、图关系</a:t>
             </a:r>
+            <a:endParaRPr lang="zh-CN" sz="800">
+              <a:solidFill>
+                <a:srgbClr val="172033"/>
+              </a:solidFill>
+              <a:latin typeface="微软雅黑" panose="020B0503020204020204" charset="-122"/>
+              <a:ea typeface="微软雅黑" panose="020B0503020204020204" charset="-122"/>
+            </a:endParaRPr>
           </a:p>
         </p:txBody>
       </p:sp>
@@ -10651,7 +11824,7 @@
           </a:ln>
         </p:spPr>
         <p:txBody>
-          <a:bodyPr wrap="square" anchor="mid" lIns="0" rIns="0" tIns="0" bIns="0"/>
+          <a:bodyPr wrap="square" lIns="0" tIns="0" rIns="0" bIns="0" anchor="ctr"/>
           <a:lstStyle/>
           <a:p>
             <a:pPr algn="ctr"/>
@@ -10660,11 +11833,18 @@
                 <a:solidFill>
                   <a:srgbClr val="172033"/>
                 </a:solidFill>
-                <a:latin typeface="Microsoft YaHei"/>
-                <a:ea typeface="Microsoft YaHei"/>
+                <a:latin typeface="微软雅黑" panose="020B0503020204020204" charset="-122"/>
+                <a:ea typeface="微软雅黑" panose="020B0503020204020204" charset="-122"/>
               </a:rPr>
               <a:t>数据知识底座</a:t>
             </a:r>
+            <a:endParaRPr lang="zh-CN" sz="1100" b="1">
+              <a:solidFill>
+                <a:srgbClr val="172033"/>
+              </a:solidFill>
+              <a:latin typeface="微软雅黑" panose="020B0503020204020204" charset="-122"/>
+              <a:ea typeface="微软雅黑" panose="020B0503020204020204" charset="-122"/>
+            </a:endParaRPr>
           </a:p>
         </p:txBody>
       </p:sp>
@@ -10807,7 +11987,7 @@
           </a:ln>
         </p:spPr>
         <p:txBody>
-          <a:bodyPr wrap="square" anchor="mid" lIns="91440" rIns="91440" tIns="50292" bIns="50292"/>
+          <a:bodyPr wrap="square" lIns="91440" tIns="50292" rIns="91440" bIns="50292" anchor="ctr"/>
           <a:lstStyle/>
           <a:p>
             <a:pPr algn="ctr"/>
@@ -10816,11 +11996,18 @@
                 <a:solidFill>
                   <a:srgbClr val="FFFFFF"/>
                 </a:solidFill>
-                <a:latin typeface="Microsoft YaHei"/>
-                <a:ea typeface="Microsoft YaHei"/>
+                <a:latin typeface="微软雅黑" panose="020B0503020204020204" charset="-122"/>
+                <a:ea typeface="微软雅黑" panose="020B0503020204020204" charset="-122"/>
               </a:rPr>
               <a:t>HTTP</a:t>
             </a:r>
+            <a:endParaRPr lang="zh-CN" sz="800" b="1">
+              <a:solidFill>
+                <a:srgbClr val="FFFFFF"/>
+              </a:solidFill>
+              <a:latin typeface="微软雅黑" panose="020B0503020204020204" charset="-122"/>
+              <a:ea typeface="微软雅黑" panose="020B0503020204020204" charset="-122"/>
+            </a:endParaRPr>
           </a:p>
         </p:txBody>
       </p:sp>
@@ -10848,7 +12035,7 @@
           </a:ln>
         </p:spPr>
         <p:txBody>
-          <a:bodyPr wrap="square" anchor="mid" lIns="91440" rIns="91440" tIns="50292" bIns="50292"/>
+          <a:bodyPr wrap="square" lIns="91440" tIns="50292" rIns="91440" bIns="50292" anchor="ctr"/>
           <a:lstStyle/>
           <a:p>
             <a:pPr algn="ctr"/>
@@ -10857,11 +12044,18 @@
                 <a:solidFill>
                   <a:srgbClr val="FFFFFF"/>
                 </a:solidFill>
-                <a:latin typeface="Microsoft YaHei"/>
-                <a:ea typeface="Microsoft YaHei"/>
+                <a:latin typeface="微软雅黑" panose="020B0503020204020204" charset="-122"/>
+                <a:ea typeface="微软雅黑" panose="020B0503020204020204" charset="-122"/>
               </a:rPr>
               <a:t>消息</a:t>
             </a:r>
+            <a:endParaRPr lang="zh-CN" sz="800" b="1">
+              <a:solidFill>
+                <a:srgbClr val="FFFFFF"/>
+              </a:solidFill>
+              <a:latin typeface="微软雅黑" panose="020B0503020204020204" charset="-122"/>
+              <a:ea typeface="微软雅黑" panose="020B0503020204020204" charset="-122"/>
+            </a:endParaRPr>
           </a:p>
         </p:txBody>
       </p:sp>
@@ -10889,7 +12083,7 @@
           </a:ln>
         </p:spPr>
         <p:txBody>
-          <a:bodyPr wrap="square" anchor="mid" lIns="91440" rIns="91440" tIns="50292" bIns="50292"/>
+          <a:bodyPr wrap="square" lIns="91440" tIns="50292" rIns="91440" bIns="50292" anchor="ctr"/>
           <a:lstStyle/>
           <a:p>
             <a:pPr algn="ctr"/>
@@ -10898,11 +12092,18 @@
                 <a:solidFill>
                   <a:srgbClr val="FFFFFF"/>
                 </a:solidFill>
-                <a:latin typeface="Microsoft YaHei"/>
-                <a:ea typeface="Microsoft YaHei"/>
+                <a:latin typeface="微软雅黑" panose="020B0503020204020204" charset="-122"/>
+                <a:ea typeface="微软雅黑" panose="020B0503020204020204" charset="-122"/>
               </a:rPr>
               <a:t>网络通信</a:t>
             </a:r>
+            <a:endParaRPr lang="zh-CN" sz="800" b="1">
+              <a:solidFill>
+                <a:srgbClr val="FFFFFF"/>
+              </a:solidFill>
+              <a:latin typeface="微软雅黑" panose="020B0503020204020204" charset="-122"/>
+              <a:ea typeface="微软雅黑" panose="020B0503020204020204" charset="-122"/>
+            </a:endParaRPr>
           </a:p>
         </p:txBody>
       </p:sp>
@@ -10930,7 +12131,7 @@
           </a:ln>
         </p:spPr>
         <p:txBody>
-          <a:bodyPr wrap="square" anchor="mid" lIns="91440" rIns="91440" tIns="50292" bIns="50292"/>
+          <a:bodyPr wrap="square" lIns="91440" tIns="50292" rIns="91440" bIns="50292" anchor="ctr"/>
           <a:lstStyle/>
           <a:p>
             <a:pPr algn="ctr"/>
@@ -10939,11 +12140,18 @@
                 <a:solidFill>
                   <a:srgbClr val="FFFFFF"/>
                 </a:solidFill>
-                <a:latin typeface="Microsoft YaHei"/>
-                <a:ea typeface="Microsoft YaHei"/>
+                <a:latin typeface="微软雅黑" panose="020B0503020204020204" charset="-122"/>
+                <a:ea typeface="微软雅黑" panose="020B0503020204020204" charset="-122"/>
               </a:rPr>
               <a:t>数据库</a:t>
             </a:r>
+            <a:endParaRPr lang="zh-CN" sz="800" b="1">
+              <a:solidFill>
+                <a:srgbClr val="FFFFFF"/>
+              </a:solidFill>
+              <a:latin typeface="微软雅黑" panose="020B0503020204020204" charset="-122"/>
+              <a:ea typeface="微软雅黑" panose="020B0503020204020204" charset="-122"/>
+            </a:endParaRPr>
           </a:p>
         </p:txBody>
       </p:sp>
@@ -10971,7 +12179,7 @@
           </a:ln>
         </p:spPr>
         <p:txBody>
-          <a:bodyPr wrap="square" anchor="mid" lIns="91440" rIns="91440" tIns="50292" bIns="50292"/>
+          <a:bodyPr wrap="square" lIns="91440" tIns="50292" rIns="91440" bIns="50292" anchor="ctr"/>
           <a:lstStyle/>
           <a:p>
             <a:pPr algn="ctr"/>
@@ -10980,11 +12188,18 @@
                 <a:solidFill>
                   <a:srgbClr val="FFFFFF"/>
                 </a:solidFill>
-                <a:latin typeface="Microsoft YaHei"/>
-                <a:ea typeface="Microsoft YaHei"/>
+                <a:latin typeface="微软雅黑" panose="020B0503020204020204" charset="-122"/>
+                <a:ea typeface="微软雅黑" panose="020B0503020204020204" charset="-122"/>
               </a:rPr>
               <a:t>文件</a:t>
             </a:r>
+            <a:endParaRPr lang="zh-CN" sz="800" b="1">
+              <a:solidFill>
+                <a:srgbClr val="FFFFFF"/>
+              </a:solidFill>
+              <a:latin typeface="微软雅黑" panose="020B0503020204020204" charset="-122"/>
+              <a:ea typeface="微软雅黑" panose="020B0503020204020204" charset="-122"/>
+            </a:endParaRPr>
           </a:p>
         </p:txBody>
       </p:sp>
@@ -11012,7 +12227,7 @@
           </a:ln>
         </p:spPr>
         <p:txBody>
-          <a:bodyPr wrap="square" anchor="mid" lIns="91440" rIns="91440" tIns="50292" bIns="50292"/>
+          <a:bodyPr wrap="square" lIns="91440" tIns="50292" rIns="91440" bIns="50292" anchor="ctr"/>
           <a:lstStyle/>
           <a:p>
             <a:pPr algn="ctr"/>
@@ -11021,11 +12236,18 @@
                 <a:solidFill>
                   <a:srgbClr val="FFFFFF"/>
                 </a:solidFill>
-                <a:latin typeface="Microsoft YaHei"/>
-                <a:ea typeface="Microsoft YaHei"/>
+                <a:latin typeface="微软雅黑" panose="020B0503020204020204" charset="-122"/>
+                <a:ea typeface="微软雅黑" panose="020B0503020204020204" charset="-122"/>
               </a:rPr>
               <a:t>函数库调用</a:t>
             </a:r>
+            <a:endParaRPr lang="zh-CN" sz="800" b="1">
+              <a:solidFill>
+                <a:srgbClr val="FFFFFF"/>
+              </a:solidFill>
+              <a:latin typeface="微软雅黑" panose="020B0503020204020204" charset="-122"/>
+              <a:ea typeface="微软雅黑" panose="020B0503020204020204" charset="-122"/>
+            </a:endParaRPr>
           </a:p>
         </p:txBody>
       </p:sp>
@@ -11071,7 +12293,7 @@
           </a:ln>
         </p:spPr>
         <p:txBody>
-          <a:bodyPr wrap="square" anchor="mid" lIns="0" rIns="0" tIns="0" bIns="0"/>
+          <a:bodyPr wrap="square" lIns="0" tIns="0" rIns="0" bIns="0" anchor="ctr"/>
           <a:lstStyle/>
           <a:p>
             <a:pPr algn="r"/>
@@ -11080,11 +12302,18 @@
                 <a:solidFill>
                   <a:srgbClr val="64748B"/>
                 </a:solidFill>
-                <a:latin typeface="Microsoft YaHei"/>
-                <a:ea typeface="Microsoft YaHei"/>
+                <a:latin typeface="微软雅黑" panose="020B0503020204020204" charset="-122"/>
+                <a:ea typeface="微软雅黑" panose="020B0503020204020204" charset="-122"/>
               </a:rPr>
               <a:t>Source: 4.3.3.2 雷达智能体子系统技术方案 · editable PowerPoint shapes</a:t>
             </a:r>
+            <a:endParaRPr lang="zh-CN" sz="700">
+              <a:solidFill>
+                <a:srgbClr val="64748B"/>
+              </a:solidFill>
+              <a:latin typeface="微软雅黑" panose="020B0503020204020204" charset="-122"/>
+              <a:ea typeface="微软雅黑" panose="020B0503020204020204" charset="-122"/>
+            </a:endParaRPr>
           </a:p>
         </p:txBody>
       </p:sp>
@@ -11161,6 +12390,8 @@
             <a:schemeClr val="phClr"/>
           </a:solidFill>
         </a:ln>
+        <a:ln/>
+        <a:ln/>
       </a:lnStyleLst>
       <a:effectStyleLst>
         <a:effectStyle>
@@ -11174,5 +12405,10 @@
       </a:bgFillStyleLst>
     </a:fmtScheme>
   </a:themeElements>
+  <a:extLst>
+    <a:ext uri="{05A4C25C-085E-4340-85A3-A5531E510DB2}">
+      <thm15:themeFamily xmlns:thm15="http://schemas.microsoft.com/office/thememl/2012/main" name="Office Theme" id="{62F939B6-93AF-4DB8-9C6B-D6C7DFDC589F}" vid="{4A3C46E8-61CC-4603-A589-7422A47A8E4A}"/>
+    </a:ext>
+  </a:extLst>
 </a:theme>
 </file>